--- a/Fluctus_Laadplan_Charleroi.pptx
+++ b/Fluctus_Laadplan_Charleroi.pptx
@@ -7677,7 +7677,7 @@
                 <a:ea typeface="Arial" pitchFamily="34" charset="-122"/>
                 <a:cs typeface="Arial" pitchFamily="34" charset="-120"/>
               </a:rPr>
-              <a:t>De 20.780 wagens zijn de </a:t>
+              <a:t>De 20.765 wagens zijn de </a:t>
             </a:r>
             <a:pPr indent="0" marL="0">
               <a:buNone/>
@@ -7848,7 +7848,7 @@
                 <a:ea typeface="Arial" pitchFamily="34" charset="-122"/>
                 <a:cs typeface="Arial" pitchFamily="34" charset="-120"/>
               </a:rPr>
-              <a:t>20.780</a:t>
+              <a:t>20.765</a:t>
             </a:r>
             <a:endParaRPr lang="en-US" sz="3200" dirty="0"/>
           </a:p>
@@ -7960,7 +7960,7 @@
                 <a:ea typeface="Arial" pitchFamily="34" charset="-122"/>
                 <a:cs typeface="Arial" pitchFamily="34" charset="-120"/>
               </a:rPr>
-              <a:t>672</a:t>
+              <a:t>671</a:t>
             </a:r>
             <a:endParaRPr lang="en-US" sz="3200" dirty="0"/>
           </a:p>
@@ -8072,7 +8072,7 @@
                 <a:ea typeface="Arial" pitchFamily="34" charset="-122"/>
                 <a:cs typeface="Arial" pitchFamily="34" charset="-120"/>
               </a:rPr>
-              <a:t>€ 31,17 mln</a:t>
+              <a:t>€ 31,15 mln</a:t>
             </a:r>
             <a:endParaRPr lang="en-US" sz="3200" dirty="0"/>
           </a:p>
@@ -8184,7 +8184,7 @@
                 <a:ea typeface="Arial" pitchFamily="34" charset="-122"/>
                 <a:cs typeface="Arial" pitchFamily="34" charset="-120"/>
               </a:rPr>
-              <a:t>€ 62,34 mln</a:t>
+              <a:t>€ 62,30 mln</a:t>
             </a:r>
             <a:endParaRPr lang="en-US" sz="3200" dirty="0"/>
           </a:p>
@@ -8291,7 +8291,7 @@
                 <a:ea typeface="Arial" pitchFamily="34" charset="-122"/>
                 <a:cs typeface="Arial" pitchFamily="34" charset="-120"/>
               </a:rPr>
-              <a:t>20.780 wagens</a:t>
+              <a:t>20.765 wagens</a:t>
             </a:r>
             <a:pPr indent="0" marL="0">
               <a:buNone/>
@@ -8319,7 +8319,7 @@
                 <a:ea typeface="Arial" pitchFamily="34" charset="-122"/>
                 <a:cs typeface="Arial" pitchFamily="34" charset="-120"/>
               </a:rPr>
-              <a:t>€ 31,17 mln besparing / jaar</a:t>
+              <a:t>€ 31,15 mln besparing / jaar</a:t>
             </a:r>
             <a:endParaRPr lang="en-US" sz="1500" dirty="0"/>
           </a:p>
@@ -8358,7 +8358,7 @@
                 <a:ea typeface="Arial" pitchFamily="34" charset="-122"/>
                 <a:cs typeface="Arial" pitchFamily="34" charset="-120"/>
               </a:rPr>
-              <a:t>20.780 wagens</a:t>
+              <a:t>20.765 wagens</a:t>
             </a:r>
             <a:pPr indent="0" marL="0">
               <a:buNone/>
@@ -8386,7 +8386,7 @@
                 <a:ea typeface="Arial" pitchFamily="34" charset="-122"/>
                 <a:cs typeface="Arial" pitchFamily="34" charset="-120"/>
               </a:rPr>
-              <a:t>€ 62,34 mln investering</a:t>
+              <a:t>€ 62,30 mln investering</a:t>
             </a:r>
             <a:pPr indent="0" marL="0">
               <a:buNone/>
@@ -23423,7 +23423,7 @@
         </p:nvSpPr>
         <p:spPr>
           <a:xfrm>
-            <a:off x="5449034" y="2187227"/>
+            <a:off x="5449074" y="2187155"/>
             <a:ext cx="256032" cy="256032"/>
           </a:xfrm>
           <a:prstGeom prst="ellipse">
@@ -23448,7 +23448,7 @@
         </p:nvSpPr>
         <p:spPr>
           <a:xfrm>
-            <a:off x="5449034" y="2187227"/>
+            <a:off x="5449074" y="2187155"/>
             <a:ext cx="256032" cy="256032"/>
           </a:xfrm>
           <a:prstGeom prst="rect">
@@ -23487,7 +23487,7 @@
         </p:nvSpPr>
         <p:spPr>
           <a:xfrm>
-            <a:off x="5449074" y="2187155"/>
+            <a:off x="5449003" y="2186506"/>
             <a:ext cx="256032" cy="256032"/>
           </a:xfrm>
           <a:prstGeom prst="ellipse">
@@ -23512,7 +23512,7 @@
         </p:nvSpPr>
         <p:spPr>
           <a:xfrm>
-            <a:off x="5449074" y="2187155"/>
+            <a:off x="5449003" y="2186506"/>
             <a:ext cx="256032" cy="256032"/>
           </a:xfrm>
           <a:prstGeom prst="rect">
@@ -23551,7 +23551,7 @@
         </p:nvSpPr>
         <p:spPr>
           <a:xfrm>
-            <a:off x="5449003" y="2186506"/>
+            <a:off x="5449198" y="2185943"/>
             <a:ext cx="256032" cy="256032"/>
           </a:xfrm>
           <a:prstGeom prst="ellipse">
@@ -23576,7 +23576,7 @@
         </p:nvSpPr>
         <p:spPr>
           <a:xfrm>
-            <a:off x="5449003" y="2186506"/>
+            <a:off x="5449198" y="2185943"/>
             <a:ext cx="256032" cy="256032"/>
           </a:xfrm>
           <a:prstGeom prst="rect">
@@ -23615,7 +23615,7 @@
         </p:nvSpPr>
         <p:spPr>
           <a:xfrm>
-            <a:off x="5449198" y="2185943"/>
+            <a:off x="5449091" y="2186308"/>
             <a:ext cx="256032" cy="256032"/>
           </a:xfrm>
           <a:prstGeom prst="ellipse">
@@ -23640,7 +23640,7 @@
         </p:nvSpPr>
         <p:spPr>
           <a:xfrm>
-            <a:off x="5449198" y="2185943"/>
+            <a:off x="5449091" y="2186308"/>
             <a:ext cx="256032" cy="256032"/>
           </a:xfrm>
           <a:prstGeom prst="rect">
@@ -23679,7 +23679,7 @@
         </p:nvSpPr>
         <p:spPr>
           <a:xfrm>
-            <a:off x="5449091" y="2186308"/>
+            <a:off x="5449219" y="2185883"/>
             <a:ext cx="256032" cy="256032"/>
           </a:xfrm>
           <a:prstGeom prst="ellipse">
@@ -23704,7 +23704,7 @@
         </p:nvSpPr>
         <p:spPr>
           <a:xfrm>
-            <a:off x="5449091" y="2186308"/>
+            <a:off x="5449219" y="2185883"/>
             <a:ext cx="256032" cy="256032"/>
           </a:xfrm>
           <a:prstGeom prst="rect">
@@ -23743,7 +23743,7 @@
         </p:nvSpPr>
         <p:spPr>
           <a:xfrm>
-            <a:off x="5449219" y="2185883"/>
+            <a:off x="5449249" y="2186082"/>
             <a:ext cx="256032" cy="256032"/>
           </a:xfrm>
           <a:prstGeom prst="ellipse">
@@ -23768,7 +23768,7 @@
         </p:nvSpPr>
         <p:spPr>
           <a:xfrm>
-            <a:off x="5449219" y="2185883"/>
+            <a:off x="5449249" y="2186082"/>
             <a:ext cx="256032" cy="256032"/>
           </a:xfrm>
           <a:prstGeom prst="rect">
@@ -23807,7 +23807,7 @@
         </p:nvSpPr>
         <p:spPr>
           <a:xfrm>
-            <a:off x="5449249" y="2186082"/>
+            <a:off x="5449181" y="2186171"/>
             <a:ext cx="256032" cy="256032"/>
           </a:xfrm>
           <a:prstGeom prst="ellipse">
@@ -23832,7 +23832,7 @@
         </p:nvSpPr>
         <p:spPr>
           <a:xfrm>
-            <a:off x="5449249" y="2186082"/>
+            <a:off x="5449181" y="2186171"/>
             <a:ext cx="256032" cy="256032"/>
           </a:xfrm>
           <a:prstGeom prst="rect">
@@ -23871,7 +23871,7 @@
         </p:nvSpPr>
         <p:spPr>
           <a:xfrm>
-            <a:off x="5449181" y="2186171"/>
+            <a:off x="5449133" y="2186286"/>
             <a:ext cx="256032" cy="256032"/>
           </a:xfrm>
           <a:prstGeom prst="ellipse">
@@ -23896,7 +23896,7 @@
         </p:nvSpPr>
         <p:spPr>
           <a:xfrm>
-            <a:off x="5449181" y="2186171"/>
+            <a:off x="5449133" y="2186286"/>
             <a:ext cx="256032" cy="256032"/>
           </a:xfrm>
           <a:prstGeom prst="rect">
@@ -23935,7 +23935,7 @@
         </p:nvSpPr>
         <p:spPr>
           <a:xfrm>
-            <a:off x="5449133" y="2186286"/>
+            <a:off x="5449281" y="2186062"/>
             <a:ext cx="256032" cy="256032"/>
           </a:xfrm>
           <a:prstGeom prst="ellipse">
@@ -23960,7 +23960,7 @@
         </p:nvSpPr>
         <p:spPr>
           <a:xfrm>
-            <a:off x="5449133" y="2186286"/>
+            <a:off x="5449281" y="2186062"/>
             <a:ext cx="256032" cy="256032"/>
           </a:xfrm>
           <a:prstGeom prst="rect">
@@ -23999,7 +23999,7 @@
         </p:nvSpPr>
         <p:spPr>
           <a:xfrm>
-            <a:off x="5449281" y="2186062"/>
+            <a:off x="5449024" y="2186457"/>
             <a:ext cx="256032" cy="256032"/>
           </a:xfrm>
           <a:prstGeom prst="ellipse">
@@ -24024,7 +24024,7 @@
         </p:nvSpPr>
         <p:spPr>
           <a:xfrm>
-            <a:off x="5449281" y="2186062"/>
+            <a:off x="5449024" y="2186457"/>
             <a:ext cx="256032" cy="256032"/>
           </a:xfrm>
           <a:prstGeom prst="rect">
@@ -24063,7 +24063,7 @@
         </p:nvSpPr>
         <p:spPr>
           <a:xfrm>
-            <a:off x="5449024" y="2186457"/>
+            <a:off x="5449218" y="2186132"/>
             <a:ext cx="256032" cy="256032"/>
           </a:xfrm>
           <a:prstGeom prst="ellipse">
@@ -24088,7 +24088,7 @@
         </p:nvSpPr>
         <p:spPr>
           <a:xfrm>
-            <a:off x="5449024" y="2186457"/>
+            <a:off x="5449218" y="2186132"/>
             <a:ext cx="256032" cy="256032"/>
           </a:xfrm>
           <a:prstGeom prst="rect">
@@ -24127,7 +24127,7 @@
         </p:nvSpPr>
         <p:spPr>
           <a:xfrm>
-            <a:off x="5449218" y="2186132"/>
+            <a:off x="5447177" y="2172092"/>
             <a:ext cx="256032" cy="256032"/>
           </a:xfrm>
           <a:prstGeom prst="ellipse">
@@ -24152,7 +24152,7 @@
         </p:nvSpPr>
         <p:spPr>
           <a:xfrm>
-            <a:off x="5449218" y="2186132"/>
+            <a:off x="5447177" y="2172092"/>
             <a:ext cx="256032" cy="256032"/>
           </a:xfrm>
           <a:prstGeom prst="rect">
@@ -24191,7 +24191,7 @@
         </p:nvSpPr>
         <p:spPr>
           <a:xfrm>
-            <a:off x="5447177" y="2172092"/>
+            <a:off x="5447203" y="2169238"/>
             <a:ext cx="256032" cy="256032"/>
           </a:xfrm>
           <a:prstGeom prst="ellipse">
@@ -24216,7 +24216,7 @@
         </p:nvSpPr>
         <p:spPr>
           <a:xfrm>
-            <a:off x="5447177" y="2172092"/>
+            <a:off x="5447203" y="2169238"/>
             <a:ext cx="256032" cy="256032"/>
           </a:xfrm>
           <a:prstGeom prst="rect">
@@ -24255,7 +24255,7 @@
         </p:nvSpPr>
         <p:spPr>
           <a:xfrm>
-            <a:off x="5447203" y="2169238"/>
+            <a:off x="5446621" y="2170984"/>
             <a:ext cx="256032" cy="256032"/>
           </a:xfrm>
           <a:prstGeom prst="ellipse">
@@ -24280,7 +24280,7 @@
         </p:nvSpPr>
         <p:spPr>
           <a:xfrm>
-            <a:off x="5447203" y="2169238"/>
+            <a:off x="5446621" y="2170984"/>
             <a:ext cx="256032" cy="256032"/>
           </a:xfrm>
           <a:prstGeom prst="rect">
@@ -24319,7 +24319,7 @@
         </p:nvSpPr>
         <p:spPr>
           <a:xfrm>
-            <a:off x="5446621" y="2170984"/>
+            <a:off x="5448930" y="2170452"/>
             <a:ext cx="256032" cy="256032"/>
           </a:xfrm>
           <a:prstGeom prst="ellipse">
@@ -24344,7 +24344,7 @@
         </p:nvSpPr>
         <p:spPr>
           <a:xfrm>
-            <a:off x="5446621" y="2170984"/>
+            <a:off x="5448930" y="2170452"/>
             <a:ext cx="256032" cy="256032"/>
           </a:xfrm>
           <a:prstGeom prst="rect">
@@ -24383,7 +24383,7 @@
         </p:nvSpPr>
         <p:spPr>
           <a:xfrm>
-            <a:off x="5448930" y="2170452"/>
+            <a:off x="5448490" y="2170720"/>
             <a:ext cx="256032" cy="256032"/>
           </a:xfrm>
           <a:prstGeom prst="ellipse">
@@ -24408,7 +24408,7 @@
         </p:nvSpPr>
         <p:spPr>
           <a:xfrm>
-            <a:off x="5448930" y="2170452"/>
+            <a:off x="5448490" y="2170720"/>
             <a:ext cx="256032" cy="256032"/>
           </a:xfrm>
           <a:prstGeom prst="rect">
@@ -24447,7 +24447,7 @@
         </p:nvSpPr>
         <p:spPr>
           <a:xfrm>
-            <a:off x="5448490" y="2170720"/>
+            <a:off x="5448177" y="2173258"/>
             <a:ext cx="256032" cy="256032"/>
           </a:xfrm>
           <a:prstGeom prst="ellipse">
@@ -24472,7 +24472,7 @@
         </p:nvSpPr>
         <p:spPr>
           <a:xfrm>
-            <a:off x="5448490" y="2170720"/>
+            <a:off x="5448177" y="2173258"/>
             <a:ext cx="256032" cy="256032"/>
           </a:xfrm>
           <a:prstGeom prst="rect">
@@ -24511,7 +24511,7 @@
         </p:nvSpPr>
         <p:spPr>
           <a:xfrm>
-            <a:off x="5448177" y="2173258"/>
+            <a:off x="5448405" y="2173927"/>
             <a:ext cx="256032" cy="256032"/>
           </a:xfrm>
           <a:prstGeom prst="ellipse">
@@ -24536,7 +24536,7 @@
         </p:nvSpPr>
         <p:spPr>
           <a:xfrm>
-            <a:off x="5448177" y="2173258"/>
+            <a:off x="5448405" y="2173927"/>
             <a:ext cx="256032" cy="256032"/>
           </a:xfrm>
           <a:prstGeom prst="rect">
@@ -24575,7 +24575,7 @@
         </p:nvSpPr>
         <p:spPr>
           <a:xfrm>
-            <a:off x="5448405" y="2173927"/>
+            <a:off x="5447433" y="2171191"/>
             <a:ext cx="256032" cy="256032"/>
           </a:xfrm>
           <a:prstGeom prst="ellipse">
@@ -24600,7 +24600,7 @@
         </p:nvSpPr>
         <p:spPr>
           <a:xfrm>
-            <a:off x="5448405" y="2173927"/>
+            <a:off x="5447433" y="2171191"/>
             <a:ext cx="256032" cy="256032"/>
           </a:xfrm>
           <a:prstGeom prst="rect">
@@ -24639,7 +24639,7 @@
         </p:nvSpPr>
         <p:spPr>
           <a:xfrm>
-            <a:off x="5447433" y="2171191"/>
+            <a:off x="5449259" y="2185826"/>
             <a:ext cx="256032" cy="256032"/>
           </a:xfrm>
           <a:prstGeom prst="ellipse">
@@ -24664,7 +24664,7 @@
         </p:nvSpPr>
         <p:spPr>
           <a:xfrm>
-            <a:off x="5447433" y="2171191"/>
+            <a:off x="5449259" y="2185826"/>
             <a:ext cx="256032" cy="256032"/>
           </a:xfrm>
           <a:prstGeom prst="rect">
@@ -24703,7 +24703,7 @@
         </p:nvSpPr>
         <p:spPr>
           <a:xfrm>
-            <a:off x="5449259" y="2185826"/>
+            <a:off x="5448649" y="2173692"/>
             <a:ext cx="256032" cy="256032"/>
           </a:xfrm>
           <a:prstGeom prst="ellipse">
@@ -24728,7 +24728,7 @@
         </p:nvSpPr>
         <p:spPr>
           <a:xfrm>
-            <a:off x="5449259" y="2185826"/>
+            <a:off x="5448649" y="2173692"/>
             <a:ext cx="256032" cy="256032"/>
           </a:xfrm>
           <a:prstGeom prst="rect">
@@ -24767,7 +24767,7 @@
         </p:nvSpPr>
         <p:spPr>
           <a:xfrm>
-            <a:off x="5448649" y="2173692"/>
+            <a:off x="5448577" y="2174861"/>
             <a:ext cx="256032" cy="256032"/>
           </a:xfrm>
           <a:prstGeom prst="ellipse">
@@ -24792,7 +24792,7 @@
         </p:nvSpPr>
         <p:spPr>
           <a:xfrm>
-            <a:off x="5448649" y="2173692"/>
+            <a:off x="5448577" y="2174861"/>
             <a:ext cx="256032" cy="256032"/>
           </a:xfrm>
           <a:prstGeom prst="rect">
@@ -24831,7 +24831,7 @@
         </p:nvSpPr>
         <p:spPr>
           <a:xfrm>
-            <a:off x="5448577" y="2174861"/>
+            <a:off x="5448926" y="2174916"/>
             <a:ext cx="256032" cy="256032"/>
           </a:xfrm>
           <a:prstGeom prst="ellipse">
@@ -24856,7 +24856,7 @@
         </p:nvSpPr>
         <p:spPr>
           <a:xfrm>
-            <a:off x="5448577" y="2174861"/>
+            <a:off x="5448926" y="2174916"/>
             <a:ext cx="256032" cy="256032"/>
           </a:xfrm>
           <a:prstGeom prst="rect">
@@ -24895,7 +24895,7 @@
         </p:nvSpPr>
         <p:spPr>
           <a:xfrm>
-            <a:off x="5448926" y="2174916"/>
+            <a:off x="5449533" y="2168395"/>
             <a:ext cx="256032" cy="256032"/>
           </a:xfrm>
           <a:prstGeom prst="ellipse">
@@ -24920,7 +24920,7 @@
         </p:nvSpPr>
         <p:spPr>
           <a:xfrm>
-            <a:off x="5448926" y="2174916"/>
+            <a:off x="5449533" y="2168395"/>
             <a:ext cx="256032" cy="256032"/>
           </a:xfrm>
           <a:prstGeom prst="rect">
@@ -24959,7 +24959,7 @@
         </p:nvSpPr>
         <p:spPr>
           <a:xfrm>
-            <a:off x="5449533" y="2168395"/>
+            <a:off x="5449034" y="2172863"/>
             <a:ext cx="256032" cy="256032"/>
           </a:xfrm>
           <a:prstGeom prst="ellipse">
@@ -24984,7 +24984,7 @@
         </p:nvSpPr>
         <p:spPr>
           <a:xfrm>
-            <a:off x="5449533" y="2168395"/>
+            <a:off x="5449034" y="2172863"/>
             <a:ext cx="256032" cy="256032"/>
           </a:xfrm>
           <a:prstGeom prst="rect">
@@ -25023,7 +25023,7 @@
         </p:nvSpPr>
         <p:spPr>
           <a:xfrm>
-            <a:off x="5449034" y="2172863"/>
+            <a:off x="5447537" y="2176445"/>
             <a:ext cx="256032" cy="256032"/>
           </a:xfrm>
           <a:prstGeom prst="ellipse">
@@ -25048,7 +25048,7 @@
         </p:nvSpPr>
         <p:spPr>
           <a:xfrm>
-            <a:off x="5449034" y="2172863"/>
+            <a:off x="5447537" y="2176445"/>
             <a:ext cx="256032" cy="256032"/>
           </a:xfrm>
           <a:prstGeom prst="rect">
@@ -25087,7 +25087,7 @@
         </p:nvSpPr>
         <p:spPr>
           <a:xfrm>
-            <a:off x="5447537" y="2176445"/>
+            <a:off x="5449280" y="2173039"/>
             <a:ext cx="256032" cy="256032"/>
           </a:xfrm>
           <a:prstGeom prst="ellipse">
@@ -25112,7 +25112,7 @@
         </p:nvSpPr>
         <p:spPr>
           <a:xfrm>
-            <a:off x="5447537" y="2176445"/>
+            <a:off x="5449280" y="2173039"/>
             <a:ext cx="256032" cy="256032"/>
           </a:xfrm>
           <a:prstGeom prst="rect">
@@ -25151,7 +25151,7 @@
         </p:nvSpPr>
         <p:spPr>
           <a:xfrm>
-            <a:off x="5449280" y="2173039"/>
+            <a:off x="5447794" y="2176447"/>
             <a:ext cx="256032" cy="256032"/>
           </a:xfrm>
           <a:prstGeom prst="ellipse">
@@ -25176,7 +25176,7 @@
         </p:nvSpPr>
         <p:spPr>
           <a:xfrm>
-            <a:off x="5449280" y="2173039"/>
+            <a:off x="5447794" y="2176447"/>
             <a:ext cx="256032" cy="256032"/>
           </a:xfrm>
           <a:prstGeom prst="rect">
@@ -25215,7 +25215,7 @@
         </p:nvSpPr>
         <p:spPr>
           <a:xfrm>
-            <a:off x="5447794" y="2176447"/>
+            <a:off x="5448905" y="2175503"/>
             <a:ext cx="256032" cy="256032"/>
           </a:xfrm>
           <a:prstGeom prst="ellipse">
@@ -25240,7 +25240,7 @@
         </p:nvSpPr>
         <p:spPr>
           <a:xfrm>
-            <a:off x="5447794" y="2176447"/>
+            <a:off x="5448905" y="2175503"/>
             <a:ext cx="256032" cy="256032"/>
           </a:xfrm>
           <a:prstGeom prst="rect">
@@ -25279,7 +25279,7 @@
         </p:nvSpPr>
         <p:spPr>
           <a:xfrm>
-            <a:off x="5448905" y="2175503"/>
+            <a:off x="5448840" y="2174067"/>
             <a:ext cx="256032" cy="256032"/>
           </a:xfrm>
           <a:prstGeom prst="ellipse">
@@ -25304,7 +25304,7 @@
         </p:nvSpPr>
         <p:spPr>
           <a:xfrm>
-            <a:off x="5448905" y="2175503"/>
+            <a:off x="5448840" y="2174067"/>
             <a:ext cx="256032" cy="256032"/>
           </a:xfrm>
           <a:prstGeom prst="rect">
@@ -25343,7 +25343,7 @@
         </p:nvSpPr>
         <p:spPr>
           <a:xfrm>
-            <a:off x="5448840" y="2174067"/>
+            <a:off x="5448373" y="2179593"/>
             <a:ext cx="256032" cy="256032"/>
           </a:xfrm>
           <a:prstGeom prst="ellipse">
@@ -25368,7 +25368,7 @@
         </p:nvSpPr>
         <p:spPr>
           <a:xfrm>
-            <a:off x="5448840" y="2174067"/>
+            <a:off x="5448373" y="2179593"/>
             <a:ext cx="256032" cy="256032"/>
           </a:xfrm>
           <a:prstGeom prst="rect">
@@ -25407,7 +25407,7 @@
         </p:nvSpPr>
         <p:spPr>
           <a:xfrm>
-            <a:off x="5448373" y="2179593"/>
+            <a:off x="5447753" y="2179444"/>
             <a:ext cx="256032" cy="256032"/>
           </a:xfrm>
           <a:prstGeom prst="ellipse">
@@ -25432,7 +25432,7 @@
         </p:nvSpPr>
         <p:spPr>
           <a:xfrm>
-            <a:off x="5448373" y="2179593"/>
+            <a:off x="5447753" y="2179444"/>
             <a:ext cx="256032" cy="256032"/>
           </a:xfrm>
           <a:prstGeom prst="rect">
@@ -25471,7 +25471,7 @@
         </p:nvSpPr>
         <p:spPr>
           <a:xfrm>
-            <a:off x="5447753" y="2179444"/>
+            <a:off x="5447826" y="2179505"/>
             <a:ext cx="256032" cy="256032"/>
           </a:xfrm>
           <a:prstGeom prst="ellipse">
@@ -25496,7 +25496,7 @@
         </p:nvSpPr>
         <p:spPr>
           <a:xfrm>
-            <a:off x="5447753" y="2179444"/>
+            <a:off x="5447826" y="2179505"/>
             <a:ext cx="256032" cy="256032"/>
           </a:xfrm>
           <a:prstGeom prst="rect">
@@ -25535,7 +25535,7 @@
         </p:nvSpPr>
         <p:spPr>
           <a:xfrm>
-            <a:off x="5447826" y="2179505"/>
+            <a:off x="5447897" y="2178299"/>
             <a:ext cx="256032" cy="256032"/>
           </a:xfrm>
           <a:prstGeom prst="ellipse">
@@ -25560,7 +25560,7 @@
         </p:nvSpPr>
         <p:spPr>
           <a:xfrm>
-            <a:off x="5447826" y="2179505"/>
+            <a:off x="5447897" y="2178299"/>
             <a:ext cx="256032" cy="256032"/>
           </a:xfrm>
           <a:prstGeom prst="rect">
@@ -25599,7 +25599,7 @@
         </p:nvSpPr>
         <p:spPr>
           <a:xfrm>
-            <a:off x="5447897" y="2178299"/>
+            <a:off x="5447995" y="2179215"/>
             <a:ext cx="256032" cy="256032"/>
           </a:xfrm>
           <a:prstGeom prst="ellipse">
@@ -25624,7 +25624,7 @@
         </p:nvSpPr>
         <p:spPr>
           <a:xfrm>
-            <a:off x="5447897" y="2178299"/>
+            <a:off x="5447995" y="2179215"/>
             <a:ext cx="256032" cy="256032"/>
           </a:xfrm>
           <a:prstGeom prst="rect">
@@ -25663,7 +25663,7 @@
         </p:nvSpPr>
         <p:spPr>
           <a:xfrm>
-            <a:off x="5447995" y="2179215"/>
+            <a:off x="5447949" y="2179853"/>
             <a:ext cx="256032" cy="256032"/>
           </a:xfrm>
           <a:prstGeom prst="ellipse">
@@ -25688,7 +25688,7 @@
         </p:nvSpPr>
         <p:spPr>
           <a:xfrm>
-            <a:off x="5447995" y="2179215"/>
+            <a:off x="5447949" y="2179853"/>
             <a:ext cx="256032" cy="256032"/>
           </a:xfrm>
           <a:prstGeom prst="rect">
@@ -25727,7 +25727,7 @@
         </p:nvSpPr>
         <p:spPr>
           <a:xfrm>
-            <a:off x="5447949" y="2179853"/>
+            <a:off x="5449204" y="2178767"/>
             <a:ext cx="256032" cy="256032"/>
           </a:xfrm>
           <a:prstGeom prst="ellipse">
@@ -25752,7 +25752,7 @@
         </p:nvSpPr>
         <p:spPr>
           <a:xfrm>
-            <a:off x="5447949" y="2179853"/>
+            <a:off x="5449204" y="2178767"/>
             <a:ext cx="256032" cy="256032"/>
           </a:xfrm>
           <a:prstGeom prst="rect">
@@ -25791,7 +25791,7 @@
         </p:nvSpPr>
         <p:spPr>
           <a:xfrm>
-            <a:off x="5449204" y="2178767"/>
+            <a:off x="5449153" y="2178902"/>
             <a:ext cx="256032" cy="256032"/>
           </a:xfrm>
           <a:prstGeom prst="ellipse">
@@ -25816,7 +25816,7 @@
         </p:nvSpPr>
         <p:spPr>
           <a:xfrm>
-            <a:off x="5449204" y="2178767"/>
+            <a:off x="5449153" y="2178902"/>
             <a:ext cx="256032" cy="256032"/>
           </a:xfrm>
           <a:prstGeom prst="rect">
@@ -25855,7 +25855,7 @@
         </p:nvSpPr>
         <p:spPr>
           <a:xfrm>
-            <a:off x="5449153" y="2178902"/>
+            <a:off x="5449133" y="2179867"/>
             <a:ext cx="256032" cy="256032"/>
           </a:xfrm>
           <a:prstGeom prst="ellipse">
@@ -25880,7 +25880,7 @@
         </p:nvSpPr>
         <p:spPr>
           <a:xfrm>
-            <a:off x="5449153" y="2178902"/>
+            <a:off x="5449133" y="2179867"/>
             <a:ext cx="256032" cy="256032"/>
           </a:xfrm>
           <a:prstGeom prst="rect">
@@ -25919,7 +25919,7 @@
         </p:nvSpPr>
         <p:spPr>
           <a:xfrm>
-            <a:off x="5449133" y="2179867"/>
+            <a:off x="5448847" y="2181151"/>
             <a:ext cx="256032" cy="256032"/>
           </a:xfrm>
           <a:prstGeom prst="ellipse">
@@ -25944,7 +25944,7 @@
         </p:nvSpPr>
         <p:spPr>
           <a:xfrm>
-            <a:off x="5449133" y="2179867"/>
+            <a:off x="5448847" y="2181151"/>
             <a:ext cx="256032" cy="256032"/>
           </a:xfrm>
           <a:prstGeom prst="rect">
@@ -25983,7 +25983,7 @@
         </p:nvSpPr>
         <p:spPr>
           <a:xfrm>
-            <a:off x="5448847" y="2181151"/>
+            <a:off x="5449016" y="2182065"/>
             <a:ext cx="256032" cy="256032"/>
           </a:xfrm>
           <a:prstGeom prst="ellipse">
@@ -26008,7 +26008,7 @@
         </p:nvSpPr>
         <p:spPr>
           <a:xfrm>
-            <a:off x="5448847" y="2181151"/>
+            <a:off x="5449016" y="2182065"/>
             <a:ext cx="256032" cy="256032"/>
           </a:xfrm>
           <a:prstGeom prst="rect">
@@ -26047,7 +26047,7 @@
         </p:nvSpPr>
         <p:spPr>
           <a:xfrm>
-            <a:off x="5449016" y="2182065"/>
+            <a:off x="5448457" y="2181983"/>
             <a:ext cx="256032" cy="256032"/>
           </a:xfrm>
           <a:prstGeom prst="ellipse">
@@ -26072,7 +26072,7 @@
         </p:nvSpPr>
         <p:spPr>
           <a:xfrm>
-            <a:off x="5449016" y="2182065"/>
+            <a:off x="5448457" y="2181983"/>
             <a:ext cx="256032" cy="256032"/>
           </a:xfrm>
           <a:prstGeom prst="rect">
@@ -26111,7 +26111,7 @@
         </p:nvSpPr>
         <p:spPr>
           <a:xfrm>
-            <a:off x="5448457" y="2181983"/>
+            <a:off x="5448945" y="2187985"/>
             <a:ext cx="256032" cy="256032"/>
           </a:xfrm>
           <a:prstGeom prst="ellipse">
@@ -26136,7 +26136,7 @@
         </p:nvSpPr>
         <p:spPr>
           <a:xfrm>
-            <a:off x="5448457" y="2181983"/>
+            <a:off x="5448945" y="2187985"/>
             <a:ext cx="256032" cy="256032"/>
           </a:xfrm>
           <a:prstGeom prst="rect">
@@ -26175,7 +26175,7 @@
         </p:nvSpPr>
         <p:spPr>
           <a:xfrm>
-            <a:off x="5448945" y="2187985"/>
+            <a:off x="5449029" y="2187547"/>
             <a:ext cx="256032" cy="256032"/>
           </a:xfrm>
           <a:prstGeom prst="ellipse">
@@ -26200,7 +26200,7 @@
         </p:nvSpPr>
         <p:spPr>
           <a:xfrm>
-            <a:off x="5448945" y="2187985"/>
+            <a:off x="5449029" y="2187547"/>
             <a:ext cx="256032" cy="256032"/>
           </a:xfrm>
           <a:prstGeom prst="rect">
@@ -26239,7 +26239,7 @@
         </p:nvSpPr>
         <p:spPr>
           <a:xfrm>
-            <a:off x="5449029" y="2187547"/>
+            <a:off x="5448972" y="2186547"/>
             <a:ext cx="256032" cy="256032"/>
           </a:xfrm>
           <a:prstGeom prst="ellipse">
@@ -26264,7 +26264,7 @@
         </p:nvSpPr>
         <p:spPr>
           <a:xfrm>
-            <a:off x="5449029" y="2187547"/>
+            <a:off x="5448972" y="2186547"/>
             <a:ext cx="256032" cy="256032"/>
           </a:xfrm>
           <a:prstGeom prst="rect">
@@ -26303,7 +26303,7 @@
         </p:nvSpPr>
         <p:spPr>
           <a:xfrm>
-            <a:off x="5448972" y="2186547"/>
+            <a:off x="5448973" y="2186747"/>
             <a:ext cx="256032" cy="256032"/>
           </a:xfrm>
           <a:prstGeom prst="ellipse">
@@ -26328,7 +26328,7 @@
         </p:nvSpPr>
         <p:spPr>
           <a:xfrm>
-            <a:off x="5448972" y="2186547"/>
+            <a:off x="5448973" y="2186747"/>
             <a:ext cx="256032" cy="256032"/>
           </a:xfrm>
           <a:prstGeom prst="rect">
@@ -26367,7 +26367,7 @@
         </p:nvSpPr>
         <p:spPr>
           <a:xfrm>
-            <a:off x="5448973" y="2186747"/>
+            <a:off x="5446207" y="2165629"/>
             <a:ext cx="256032" cy="256032"/>
           </a:xfrm>
           <a:prstGeom prst="ellipse">
@@ -26392,7 +26392,7 @@
         </p:nvSpPr>
         <p:spPr>
           <a:xfrm>
-            <a:off x="5448973" y="2186747"/>
+            <a:off x="5446207" y="2165629"/>
             <a:ext cx="256032" cy="256032"/>
           </a:xfrm>
           <a:prstGeom prst="rect">
@@ -26431,7 +26431,7 @@
         </p:nvSpPr>
         <p:spPr>
           <a:xfrm>
-            <a:off x="5446207" y="2165629"/>
+            <a:off x="5448296" y="2181053"/>
             <a:ext cx="256032" cy="256032"/>
           </a:xfrm>
           <a:prstGeom prst="ellipse">
@@ -26456,7 +26456,7 @@
         </p:nvSpPr>
         <p:spPr>
           <a:xfrm>
-            <a:off x="5446207" y="2165629"/>
+            <a:off x="5448296" y="2181053"/>
             <a:ext cx="256032" cy="256032"/>
           </a:xfrm>
           <a:prstGeom prst="rect">
@@ -26495,7 +26495,7 @@
         </p:nvSpPr>
         <p:spPr>
           <a:xfrm>
-            <a:off x="5448296" y="2181053"/>
+            <a:off x="5448240" y="2180998"/>
             <a:ext cx="256032" cy="256032"/>
           </a:xfrm>
           <a:prstGeom prst="ellipse">
@@ -26520,7 +26520,7 @@
         </p:nvSpPr>
         <p:spPr>
           <a:xfrm>
-            <a:off x="5448296" y="2181053"/>
+            <a:off x="5448240" y="2180998"/>
             <a:ext cx="256032" cy="256032"/>
           </a:xfrm>
           <a:prstGeom prst="rect">
@@ -26559,7 +26559,7 @@
         </p:nvSpPr>
         <p:spPr>
           <a:xfrm>
-            <a:off x="5448240" y="2180998"/>
+            <a:off x="5447644" y="2181543"/>
             <a:ext cx="256032" cy="256032"/>
           </a:xfrm>
           <a:prstGeom prst="ellipse">
@@ -26584,7 +26584,7 @@
         </p:nvSpPr>
         <p:spPr>
           <a:xfrm>
-            <a:off x="5448240" y="2180998"/>
+            <a:off x="5447644" y="2181543"/>
             <a:ext cx="256032" cy="256032"/>
           </a:xfrm>
           <a:prstGeom prst="rect">
@@ -26623,7 +26623,7 @@
         </p:nvSpPr>
         <p:spPr>
           <a:xfrm>
-            <a:off x="5447644" y="2181543"/>
+            <a:off x="5448143" y="2181757"/>
             <a:ext cx="256032" cy="256032"/>
           </a:xfrm>
           <a:prstGeom prst="ellipse">
@@ -26648,7 +26648,7 @@
         </p:nvSpPr>
         <p:spPr>
           <a:xfrm>
-            <a:off x="5447644" y="2181543"/>
+            <a:off x="5448143" y="2181757"/>
             <a:ext cx="256032" cy="256032"/>
           </a:xfrm>
           <a:prstGeom prst="rect">
@@ -26687,7 +26687,7 @@
         </p:nvSpPr>
         <p:spPr>
           <a:xfrm>
-            <a:off x="5448143" y="2181757"/>
+            <a:off x="5448307" y="2181898"/>
             <a:ext cx="256032" cy="256032"/>
           </a:xfrm>
           <a:prstGeom prst="ellipse">
@@ -26712,7 +26712,7 @@
         </p:nvSpPr>
         <p:spPr>
           <a:xfrm>
-            <a:off x="5448143" y="2181757"/>
+            <a:off x="5448307" y="2181898"/>
             <a:ext cx="256032" cy="256032"/>
           </a:xfrm>
           <a:prstGeom prst="rect">
@@ -26751,7 +26751,7 @@
         </p:nvSpPr>
         <p:spPr>
           <a:xfrm>
-            <a:off x="5448307" y="2181898"/>
+            <a:off x="5448374" y="2186119"/>
             <a:ext cx="256032" cy="256032"/>
           </a:xfrm>
           <a:prstGeom prst="ellipse">
@@ -26776,7 +26776,7 @@
         </p:nvSpPr>
         <p:spPr>
           <a:xfrm>
-            <a:off x="5448307" y="2181898"/>
+            <a:off x="5448374" y="2186119"/>
             <a:ext cx="256032" cy="256032"/>
           </a:xfrm>
           <a:prstGeom prst="rect">
@@ -26815,7 +26815,7 @@
         </p:nvSpPr>
         <p:spPr>
           <a:xfrm>
-            <a:off x="5448374" y="2186119"/>
+            <a:off x="5447582" y="2183371"/>
             <a:ext cx="256032" cy="256032"/>
           </a:xfrm>
           <a:prstGeom prst="ellipse">
@@ -26840,7 +26840,7 @@
         </p:nvSpPr>
         <p:spPr>
           <a:xfrm>
-            <a:off x="5448374" y="2186119"/>
+            <a:off x="5447582" y="2183371"/>
             <a:ext cx="256032" cy="256032"/>
           </a:xfrm>
           <a:prstGeom prst="rect">
@@ -26879,7 +26879,7 @@
         </p:nvSpPr>
         <p:spPr>
           <a:xfrm>
-            <a:off x="5447582" y="2183371"/>
+            <a:off x="5447711" y="2184606"/>
             <a:ext cx="256032" cy="256032"/>
           </a:xfrm>
           <a:prstGeom prst="ellipse">
@@ -26904,7 +26904,7 @@
         </p:nvSpPr>
         <p:spPr>
           <a:xfrm>
-            <a:off x="5447582" y="2183371"/>
+            <a:off x="5447711" y="2184606"/>
             <a:ext cx="256032" cy="256032"/>
           </a:xfrm>
           <a:prstGeom prst="rect">
@@ -26943,7 +26943,7 @@
         </p:nvSpPr>
         <p:spPr>
           <a:xfrm>
-            <a:off x="5447711" y="2184606"/>
+            <a:off x="5447240" y="2186333"/>
             <a:ext cx="256032" cy="256032"/>
           </a:xfrm>
           <a:prstGeom prst="ellipse">
@@ -26968,7 +26968,7 @@
         </p:nvSpPr>
         <p:spPr>
           <a:xfrm>
-            <a:off x="5447711" y="2184606"/>
+            <a:off x="5447240" y="2186333"/>
             <a:ext cx="256032" cy="256032"/>
           </a:xfrm>
           <a:prstGeom prst="rect">
@@ -27007,7 +27007,7 @@
         </p:nvSpPr>
         <p:spPr>
           <a:xfrm>
-            <a:off x="5447240" y="2186333"/>
+            <a:off x="5447420" y="2186437"/>
             <a:ext cx="256032" cy="256032"/>
           </a:xfrm>
           <a:prstGeom prst="ellipse">
@@ -27032,7 +27032,7 @@
         </p:nvSpPr>
         <p:spPr>
           <a:xfrm>
-            <a:off x="5447240" y="2186333"/>
+            <a:off x="5447420" y="2186437"/>
             <a:ext cx="256032" cy="256032"/>
           </a:xfrm>
           <a:prstGeom prst="rect">
@@ -27071,7 +27071,7 @@
         </p:nvSpPr>
         <p:spPr>
           <a:xfrm>
-            <a:off x="5447420" y="2186437"/>
+            <a:off x="5447546" y="2186716"/>
             <a:ext cx="256032" cy="256032"/>
           </a:xfrm>
           <a:prstGeom prst="ellipse">
@@ -27096,7 +27096,7 @@
         </p:nvSpPr>
         <p:spPr>
           <a:xfrm>
-            <a:off x="5447420" y="2186437"/>
+            <a:off x="5447546" y="2186716"/>
             <a:ext cx="256032" cy="256032"/>
           </a:xfrm>
           <a:prstGeom prst="rect">
@@ -27135,7 +27135,7 @@
         </p:nvSpPr>
         <p:spPr>
           <a:xfrm>
-            <a:off x="5447546" y="2186716"/>
+            <a:off x="5447860" y="2186851"/>
             <a:ext cx="256032" cy="256032"/>
           </a:xfrm>
           <a:prstGeom prst="ellipse">
@@ -27160,7 +27160,7 @@
         </p:nvSpPr>
         <p:spPr>
           <a:xfrm>
-            <a:off x="5447546" y="2186716"/>
+            <a:off x="5447860" y="2186851"/>
             <a:ext cx="256032" cy="256032"/>
           </a:xfrm>
           <a:prstGeom prst="rect">
@@ -27199,7 +27199,7 @@
         </p:nvSpPr>
         <p:spPr>
           <a:xfrm>
-            <a:off x="5447860" y="2186851"/>
+            <a:off x="5448901" y="2188816"/>
             <a:ext cx="256032" cy="256032"/>
           </a:xfrm>
           <a:prstGeom prst="ellipse">
@@ -27224,7 +27224,7 @@
         </p:nvSpPr>
         <p:spPr>
           <a:xfrm>
-            <a:off x="5447860" y="2186851"/>
+            <a:off x="5448901" y="2188816"/>
             <a:ext cx="256032" cy="256032"/>
           </a:xfrm>
           <a:prstGeom prst="rect">
@@ -27263,7 +27263,7 @@
         </p:nvSpPr>
         <p:spPr>
           <a:xfrm>
-            <a:off x="5448901" y="2188816"/>
+            <a:off x="5448669" y="2189074"/>
             <a:ext cx="256032" cy="256032"/>
           </a:xfrm>
           <a:prstGeom prst="ellipse">
@@ -27288,7 +27288,7 @@
         </p:nvSpPr>
         <p:spPr>
           <a:xfrm>
-            <a:off x="5448901" y="2188816"/>
+            <a:off x="5448669" y="2189074"/>
             <a:ext cx="256032" cy="256032"/>
           </a:xfrm>
           <a:prstGeom prst="rect">
@@ -27327,7 +27327,7 @@
         </p:nvSpPr>
         <p:spPr>
           <a:xfrm>
-            <a:off x="5448669" y="2189074"/>
+            <a:off x="5448083" y="2189405"/>
             <a:ext cx="256032" cy="256032"/>
           </a:xfrm>
           <a:prstGeom prst="ellipse">
@@ -27352,7 +27352,7 @@
         </p:nvSpPr>
         <p:spPr>
           <a:xfrm>
-            <a:off x="5448669" y="2189074"/>
+            <a:off x="5448083" y="2189405"/>
             <a:ext cx="256032" cy="256032"/>
           </a:xfrm>
           <a:prstGeom prst="rect">
@@ -27391,7 +27391,7 @@
         </p:nvSpPr>
         <p:spPr>
           <a:xfrm>
-            <a:off x="5448083" y="2189405"/>
+            <a:off x="5448109" y="2188843"/>
             <a:ext cx="256032" cy="256032"/>
           </a:xfrm>
           <a:prstGeom prst="ellipse">
@@ -27416,7 +27416,7 @@
         </p:nvSpPr>
         <p:spPr>
           <a:xfrm>
-            <a:off x="5448083" y="2189405"/>
+            <a:off x="5448109" y="2188843"/>
             <a:ext cx="256032" cy="256032"/>
           </a:xfrm>
           <a:prstGeom prst="rect">
@@ -27455,7 +27455,7 @@
         </p:nvSpPr>
         <p:spPr>
           <a:xfrm>
-            <a:off x="5448109" y="2188843"/>
+            <a:off x="5447932" y="2188063"/>
             <a:ext cx="256032" cy="256032"/>
           </a:xfrm>
           <a:prstGeom prst="ellipse">
@@ -27480,7 +27480,7 @@
         </p:nvSpPr>
         <p:spPr>
           <a:xfrm>
-            <a:off x="5448109" y="2188843"/>
+            <a:off x="5447932" y="2188063"/>
             <a:ext cx="256032" cy="256032"/>
           </a:xfrm>
           <a:prstGeom prst="rect">
@@ -27519,7 +27519,7 @@
         </p:nvSpPr>
         <p:spPr>
           <a:xfrm>
-            <a:off x="5447932" y="2188063"/>
+            <a:off x="5446778" y="2186031"/>
             <a:ext cx="256032" cy="256032"/>
           </a:xfrm>
           <a:prstGeom prst="ellipse">
@@ -27544,7 +27544,7 @@
         </p:nvSpPr>
         <p:spPr>
           <a:xfrm>
-            <a:off x="5447932" y="2188063"/>
+            <a:off x="5446778" y="2186031"/>
             <a:ext cx="256032" cy="256032"/>
           </a:xfrm>
           <a:prstGeom prst="rect">
@@ -27583,7 +27583,7 @@
         </p:nvSpPr>
         <p:spPr>
           <a:xfrm>
-            <a:off x="5446778" y="2186031"/>
+            <a:off x="5447283" y="2187871"/>
             <a:ext cx="256032" cy="256032"/>
           </a:xfrm>
           <a:prstGeom prst="ellipse">
@@ -27608,7 +27608,7 @@
         </p:nvSpPr>
         <p:spPr>
           <a:xfrm>
-            <a:off x="5446778" y="2186031"/>
+            <a:off x="5447283" y="2187871"/>
             <a:ext cx="256032" cy="256032"/>
           </a:xfrm>
           <a:prstGeom prst="rect">
@@ -27647,7 +27647,7 @@
         </p:nvSpPr>
         <p:spPr>
           <a:xfrm>
-            <a:off x="5447283" y="2187871"/>
+            <a:off x="5447168" y="2188045"/>
             <a:ext cx="256032" cy="256032"/>
           </a:xfrm>
           <a:prstGeom prst="ellipse">
@@ -27672,7 +27672,7 @@
         </p:nvSpPr>
         <p:spPr>
           <a:xfrm>
-            <a:off x="5447283" y="2187871"/>
+            <a:off x="5447168" y="2188045"/>
             <a:ext cx="256032" cy="256032"/>
           </a:xfrm>
           <a:prstGeom prst="rect">
@@ -27711,7 +27711,7 @@
         </p:nvSpPr>
         <p:spPr>
           <a:xfrm>
-            <a:off x="5447168" y="2188045"/>
+            <a:off x="5447562" y="2191661"/>
             <a:ext cx="256032" cy="256032"/>
           </a:xfrm>
           <a:prstGeom prst="ellipse">
@@ -27736,7 +27736,7 @@
         </p:nvSpPr>
         <p:spPr>
           <a:xfrm>
-            <a:off x="5447168" y="2188045"/>
+            <a:off x="5447562" y="2191661"/>
             <a:ext cx="256032" cy="256032"/>
           </a:xfrm>
           <a:prstGeom prst="rect">
@@ -27775,7 +27775,7 @@
         </p:nvSpPr>
         <p:spPr>
           <a:xfrm>
-            <a:off x="5447562" y="2191661"/>
+            <a:off x="5447559" y="2191712"/>
             <a:ext cx="256032" cy="256032"/>
           </a:xfrm>
           <a:prstGeom prst="ellipse">
@@ -27800,7 +27800,7 @@
         </p:nvSpPr>
         <p:spPr>
           <a:xfrm>
-            <a:off x="5447562" y="2191661"/>
+            <a:off x="5447559" y="2191712"/>
             <a:ext cx="256032" cy="256032"/>
           </a:xfrm>
           <a:prstGeom prst="rect">
@@ -27839,7 +27839,7 @@
         </p:nvSpPr>
         <p:spPr>
           <a:xfrm>
-            <a:off x="5447559" y="2191712"/>
+            <a:off x="5448252" y="2190929"/>
             <a:ext cx="256032" cy="256032"/>
           </a:xfrm>
           <a:prstGeom prst="ellipse">
@@ -27864,7 +27864,7 @@
         </p:nvSpPr>
         <p:spPr>
           <a:xfrm>
-            <a:off x="5447559" y="2191712"/>
+            <a:off x="5448252" y="2190929"/>
             <a:ext cx="256032" cy="256032"/>
           </a:xfrm>
           <a:prstGeom prst="rect">
@@ -27903,7 +27903,7 @@
         </p:nvSpPr>
         <p:spPr>
           <a:xfrm>
-            <a:off x="5448252" y="2190929"/>
+            <a:off x="5448499" y="2193164"/>
             <a:ext cx="256032" cy="256032"/>
           </a:xfrm>
           <a:prstGeom prst="ellipse">
@@ -27928,7 +27928,7 @@
         </p:nvSpPr>
         <p:spPr>
           <a:xfrm>
-            <a:off x="5448252" y="2190929"/>
+            <a:off x="5448499" y="2193164"/>
             <a:ext cx="256032" cy="256032"/>
           </a:xfrm>
           <a:prstGeom prst="rect">
@@ -27967,7 +27967,7 @@
         </p:nvSpPr>
         <p:spPr>
           <a:xfrm>
-            <a:off x="5448499" y="2193164"/>
+            <a:off x="5446896" y="2185257"/>
             <a:ext cx="256032" cy="256032"/>
           </a:xfrm>
           <a:prstGeom prst="ellipse">
@@ -27992,7 +27992,7 @@
         </p:nvSpPr>
         <p:spPr>
           <a:xfrm>
-            <a:off x="5448499" y="2193164"/>
+            <a:off x="5446896" y="2185257"/>
             <a:ext cx="256032" cy="256032"/>
           </a:xfrm>
           <a:prstGeom prst="rect">
@@ -28031,7 +28031,7 @@
         </p:nvSpPr>
         <p:spPr>
           <a:xfrm>
-            <a:off x="5446896" y="2185257"/>
+            <a:off x="5446904" y="2185410"/>
             <a:ext cx="256032" cy="256032"/>
           </a:xfrm>
           <a:prstGeom prst="ellipse">
@@ -28056,7 +28056,7 @@
         </p:nvSpPr>
         <p:spPr>
           <a:xfrm>
-            <a:off x="5446896" y="2185257"/>
+            <a:off x="5446904" y="2185410"/>
             <a:ext cx="256032" cy="256032"/>
           </a:xfrm>
           <a:prstGeom prst="rect">
@@ -28095,7 +28095,7 @@
         </p:nvSpPr>
         <p:spPr>
           <a:xfrm>
-            <a:off x="5446904" y="2185410"/>
+            <a:off x="5446946" y="2185499"/>
             <a:ext cx="256032" cy="256032"/>
           </a:xfrm>
           <a:prstGeom prst="ellipse">
@@ -28120,7 +28120,7 @@
         </p:nvSpPr>
         <p:spPr>
           <a:xfrm>
-            <a:off x="5446904" y="2185410"/>
+            <a:off x="5446946" y="2185499"/>
             <a:ext cx="256032" cy="256032"/>
           </a:xfrm>
           <a:prstGeom prst="rect">
@@ -28159,7 +28159,7 @@
         </p:nvSpPr>
         <p:spPr>
           <a:xfrm>
-            <a:off x="5446946" y="2185499"/>
+            <a:off x="5448341" y="2175284"/>
             <a:ext cx="256032" cy="256032"/>
           </a:xfrm>
           <a:prstGeom prst="ellipse">
@@ -28184,7 +28184,7 @@
         </p:nvSpPr>
         <p:spPr>
           <a:xfrm>
-            <a:off x="5446946" y="2185499"/>
+            <a:off x="5448341" y="2175284"/>
             <a:ext cx="256032" cy="256032"/>
           </a:xfrm>
           <a:prstGeom prst="rect">
@@ -28223,7 +28223,7 @@
         </p:nvSpPr>
         <p:spPr>
           <a:xfrm>
-            <a:off x="5448341" y="2175284"/>
+            <a:off x="5448794" y="2188580"/>
             <a:ext cx="256032" cy="256032"/>
           </a:xfrm>
           <a:prstGeom prst="ellipse">
@@ -28248,7 +28248,7 @@
         </p:nvSpPr>
         <p:spPr>
           <a:xfrm>
-            <a:off x="5448341" y="2175284"/>
+            <a:off x="5448794" y="2188580"/>
             <a:ext cx="256032" cy="256032"/>
           </a:xfrm>
           <a:prstGeom prst="rect">
@@ -28287,7 +28287,7 @@
         </p:nvSpPr>
         <p:spPr>
           <a:xfrm>
-            <a:off x="5448794" y="2188580"/>
+            <a:off x="5444967" y="2166735"/>
             <a:ext cx="256032" cy="256032"/>
           </a:xfrm>
           <a:prstGeom prst="ellipse">
@@ -28312,7 +28312,7 @@
         </p:nvSpPr>
         <p:spPr>
           <a:xfrm>
-            <a:off x="5448794" y="2188580"/>
+            <a:off x="5444967" y="2166735"/>
             <a:ext cx="256032" cy="256032"/>
           </a:xfrm>
           <a:prstGeom prst="rect">
@@ -28351,7 +28351,7 @@
         </p:nvSpPr>
         <p:spPr>
           <a:xfrm>
-            <a:off x="5444967" y="2166735"/>
+            <a:off x="5448327" y="2188781"/>
             <a:ext cx="256032" cy="256032"/>
           </a:xfrm>
           <a:prstGeom prst="ellipse">
@@ -28376,7 +28376,7 @@
         </p:nvSpPr>
         <p:spPr>
           <a:xfrm>
-            <a:off x="5444967" y="2166735"/>
+            <a:off x="5448327" y="2188781"/>
             <a:ext cx="256032" cy="256032"/>
           </a:xfrm>
           <a:prstGeom prst="rect">
@@ -28415,7 +28415,7 @@
         </p:nvSpPr>
         <p:spPr>
           <a:xfrm>
-            <a:off x="5448327" y="2188781"/>
+            <a:off x="5449335" y="2185937"/>
             <a:ext cx="256032" cy="256032"/>
           </a:xfrm>
           <a:prstGeom prst="ellipse">
@@ -28440,7 +28440,7 @@
         </p:nvSpPr>
         <p:spPr>
           <a:xfrm>
-            <a:off x="5448327" y="2188781"/>
+            <a:off x="5449335" y="2185937"/>
             <a:ext cx="256032" cy="256032"/>
           </a:xfrm>
           <a:prstGeom prst="rect">
@@ -28479,7 +28479,7 @@
         </p:nvSpPr>
         <p:spPr>
           <a:xfrm>
-            <a:off x="5449335" y="2185937"/>
+            <a:off x="5449259" y="2186899"/>
             <a:ext cx="256032" cy="256032"/>
           </a:xfrm>
           <a:prstGeom prst="ellipse">
@@ -28504,7 +28504,7 @@
         </p:nvSpPr>
         <p:spPr>
           <a:xfrm>
-            <a:off x="5449335" y="2185937"/>
+            <a:off x="5449259" y="2186899"/>
             <a:ext cx="256032" cy="256032"/>
           </a:xfrm>
           <a:prstGeom prst="rect">
@@ -28543,7 +28543,7 @@
         </p:nvSpPr>
         <p:spPr>
           <a:xfrm>
-            <a:off x="5449259" y="2186899"/>
+            <a:off x="5447073" y="2170532"/>
             <a:ext cx="256032" cy="256032"/>
           </a:xfrm>
           <a:prstGeom prst="ellipse">
@@ -28568,7 +28568,7 @@
         </p:nvSpPr>
         <p:spPr>
           <a:xfrm>
-            <a:off x="5449259" y="2186899"/>
+            <a:off x="5447073" y="2170532"/>
             <a:ext cx="256032" cy="256032"/>
           </a:xfrm>
           <a:prstGeom prst="rect">
@@ -28607,7 +28607,7 @@
         </p:nvSpPr>
         <p:spPr>
           <a:xfrm>
-            <a:off x="5447073" y="2170532"/>
+            <a:off x="5447982" y="2180059"/>
             <a:ext cx="256032" cy="256032"/>
           </a:xfrm>
           <a:prstGeom prst="ellipse">
@@ -28632,7 +28632,7 @@
         </p:nvSpPr>
         <p:spPr>
           <a:xfrm>
-            <a:off x="5447073" y="2170532"/>
+            <a:off x="5447982" y="2180059"/>
             <a:ext cx="256032" cy="256032"/>
           </a:xfrm>
           <a:prstGeom prst="rect">
@@ -28671,7 +28671,7 @@
         </p:nvSpPr>
         <p:spPr>
           <a:xfrm>
-            <a:off x="5447982" y="2180059"/>
+            <a:off x="5446967" y="2181458"/>
             <a:ext cx="256032" cy="256032"/>
           </a:xfrm>
           <a:prstGeom prst="ellipse">
@@ -28696,7 +28696,7 @@
         </p:nvSpPr>
         <p:spPr>
           <a:xfrm>
-            <a:off x="5447982" y="2180059"/>
+            <a:off x="5446967" y="2181458"/>
             <a:ext cx="256032" cy="256032"/>
           </a:xfrm>
           <a:prstGeom prst="rect">
@@ -28735,7 +28735,7 @@
         </p:nvSpPr>
         <p:spPr>
           <a:xfrm>
-            <a:off x="5446967" y="2181458"/>
+            <a:off x="5446300" y="2164838"/>
             <a:ext cx="256032" cy="256032"/>
           </a:xfrm>
           <a:prstGeom prst="ellipse">
@@ -28760,32 +28760,32 @@
         </p:nvSpPr>
         <p:spPr>
           <a:xfrm>
-            <a:off x="5446967" y="2181458"/>
-            <a:ext cx="256032" cy="256032"/>
-          </a:xfrm>
-          <a:prstGeom prst="rect">
-            <a:avLst/>
-          </a:prstGeom>
-          <a:noFill/>
-          <a:ln/>
-        </p:spPr>
-        <p:txBody>
-          <a:bodyPr wrap="square" lIns="0" tIns="0" rIns="0" bIns="0" rtlCol="0" anchor="ctr"/>
-          <a:lstStyle/>
-          <a:p>
-            <a:pPr algn="ctr" indent="0" marL="0">
-              <a:buNone/>
-            </a:pPr>
-            <a:r>
-              <a:rPr lang="en-US" sz="900" b="1" dirty="0">
-                <a:solidFill>
-                  <a:srgbClr val="FFFFFF"/>
-                </a:solidFill>
-                <a:latin typeface="Arial" pitchFamily="34" charset="0"/>
-                <a:ea typeface="Arial" pitchFamily="34" charset="-122"/>
-                <a:cs typeface="Arial" pitchFamily="34" charset="-120"/>
-              </a:rPr>
-              <a:t>15</a:t>
+            <a:off x="5446300" y="2164838"/>
+            <a:ext cx="256032" cy="256032"/>
+          </a:xfrm>
+          <a:prstGeom prst="rect">
+            <a:avLst/>
+          </a:prstGeom>
+          <a:noFill/>
+          <a:ln/>
+        </p:spPr>
+        <p:txBody>
+          <a:bodyPr wrap="square" lIns="0" tIns="0" rIns="0" bIns="0" rtlCol="0" anchor="ctr"/>
+          <a:lstStyle/>
+          <a:p>
+            <a:pPr algn="ctr" indent="0" marL="0">
+              <a:buNone/>
+            </a:pPr>
+            <a:r>
+              <a:rPr lang="en-US" sz="900" b="1" dirty="0">
+                <a:solidFill>
+                  <a:srgbClr val="FFFFFF"/>
+                </a:solidFill>
+                <a:latin typeface="Arial" pitchFamily="34" charset="0"/>
+                <a:ea typeface="Arial" pitchFamily="34" charset="-122"/>
+                <a:cs typeface="Arial" pitchFamily="34" charset="-120"/>
+              </a:rPr>
+              <a:t>16</a:t>
             </a:r>
             <a:endParaRPr lang="en-US" sz="900" dirty="0"/>
           </a:p>
@@ -28799,7 +28799,7 @@
         </p:nvSpPr>
         <p:spPr>
           <a:xfrm>
-            <a:off x="5446300" y="2164838"/>
+            <a:off x="5446363" y="2164831"/>
             <a:ext cx="256032" cy="256032"/>
           </a:xfrm>
           <a:prstGeom prst="ellipse">
@@ -28824,7 +28824,7 @@
         </p:nvSpPr>
         <p:spPr>
           <a:xfrm>
-            <a:off x="5446300" y="2164838"/>
+            <a:off x="5446363" y="2164831"/>
             <a:ext cx="256032" cy="256032"/>
           </a:xfrm>
           <a:prstGeom prst="rect">
@@ -28863,7 +28863,7 @@
         </p:nvSpPr>
         <p:spPr>
           <a:xfrm>
-            <a:off x="5446363" y="2164831"/>
+            <a:off x="5447141" y="2169765"/>
             <a:ext cx="256032" cy="256032"/>
           </a:xfrm>
           <a:prstGeom prst="ellipse">
@@ -28888,7 +28888,7 @@
         </p:nvSpPr>
         <p:spPr>
           <a:xfrm>
-            <a:off x="5446363" y="2164831"/>
+            <a:off x="5447141" y="2169765"/>
             <a:ext cx="256032" cy="256032"/>
           </a:xfrm>
           <a:prstGeom prst="rect">
@@ -28927,7 +28927,7 @@
         </p:nvSpPr>
         <p:spPr>
           <a:xfrm>
-            <a:off x="5447141" y="2169765"/>
+            <a:off x="5449325" y="2185548"/>
             <a:ext cx="256032" cy="256032"/>
           </a:xfrm>
           <a:prstGeom prst="ellipse">
@@ -28952,7 +28952,7 @@
         </p:nvSpPr>
         <p:spPr>
           <a:xfrm>
-            <a:off x="5447141" y="2169765"/>
+            <a:off x="5449325" y="2185548"/>
             <a:ext cx="256032" cy="256032"/>
           </a:xfrm>
           <a:prstGeom prst="rect">
@@ -28991,7 +28991,7 @@
         </p:nvSpPr>
         <p:spPr>
           <a:xfrm>
-            <a:off x="5449325" y="2185548"/>
+            <a:off x="5447933" y="2180874"/>
             <a:ext cx="256032" cy="256032"/>
           </a:xfrm>
           <a:prstGeom prst="ellipse">
@@ -29016,7 +29016,7 @@
         </p:nvSpPr>
         <p:spPr>
           <a:xfrm>
-            <a:off x="5449325" y="2185548"/>
+            <a:off x="5447933" y="2180874"/>
             <a:ext cx="256032" cy="256032"/>
           </a:xfrm>
           <a:prstGeom prst="rect">
@@ -29055,7 +29055,7 @@
         </p:nvSpPr>
         <p:spPr>
           <a:xfrm>
-            <a:off x="5447933" y="2180874"/>
+            <a:off x="925687" y="5472678"/>
             <a:ext cx="256032" cy="256032"/>
           </a:xfrm>
           <a:prstGeom prst="ellipse">
@@ -29080,7 +29080,7 @@
         </p:nvSpPr>
         <p:spPr>
           <a:xfrm>
-            <a:off x="5447933" y="2180874"/>
+            <a:off x="925687" y="5472678"/>
             <a:ext cx="256032" cy="256032"/>
           </a:xfrm>
           <a:prstGeom prst="rect">
@@ -29119,7 +29119,7 @@
         </p:nvSpPr>
         <p:spPr>
           <a:xfrm>
-            <a:off x="925687" y="5472678"/>
+            <a:off x="5446285" y="2183781"/>
             <a:ext cx="256032" cy="256032"/>
           </a:xfrm>
           <a:prstGeom prst="ellipse">
@@ -29144,7 +29144,7 @@
         </p:nvSpPr>
         <p:spPr>
           <a:xfrm>
-            <a:off x="925687" y="5472678"/>
+            <a:off x="5446285" y="2183781"/>
             <a:ext cx="256032" cy="256032"/>
           </a:xfrm>
           <a:prstGeom prst="rect">
@@ -29183,7 +29183,7 @@
         </p:nvSpPr>
         <p:spPr>
           <a:xfrm>
-            <a:off x="5446285" y="2183781"/>
+            <a:off x="5445943" y="2190630"/>
             <a:ext cx="256032" cy="256032"/>
           </a:xfrm>
           <a:prstGeom prst="ellipse">
@@ -29208,7 +29208,7 @@
         </p:nvSpPr>
         <p:spPr>
           <a:xfrm>
-            <a:off x="5446285" y="2183781"/>
+            <a:off x="5445943" y="2190630"/>
             <a:ext cx="256032" cy="256032"/>
           </a:xfrm>
           <a:prstGeom prst="rect">
@@ -29247,7 +29247,7 @@
         </p:nvSpPr>
         <p:spPr>
           <a:xfrm>
-            <a:off x="5445943" y="2190630"/>
+            <a:off x="5448593" y="2180652"/>
             <a:ext cx="256032" cy="256032"/>
           </a:xfrm>
           <a:prstGeom prst="ellipse">
@@ -29272,7 +29272,7 @@
         </p:nvSpPr>
         <p:spPr>
           <a:xfrm>
-            <a:off x="5445943" y="2190630"/>
+            <a:off x="5448593" y="2180652"/>
             <a:ext cx="256032" cy="256032"/>
           </a:xfrm>
           <a:prstGeom prst="rect">
@@ -29311,7 +29311,7 @@
         </p:nvSpPr>
         <p:spPr>
           <a:xfrm>
-            <a:off x="5448593" y="2180652"/>
+            <a:off x="5443874" y="2174877"/>
             <a:ext cx="256032" cy="256032"/>
           </a:xfrm>
           <a:prstGeom prst="ellipse">
@@ -29336,7 +29336,7 @@
         </p:nvSpPr>
         <p:spPr>
           <a:xfrm>
-            <a:off x="5448593" y="2180652"/>
+            <a:off x="5443874" y="2174877"/>
             <a:ext cx="256032" cy="256032"/>
           </a:xfrm>
           <a:prstGeom prst="rect">
@@ -29375,7 +29375,7 @@
         </p:nvSpPr>
         <p:spPr>
           <a:xfrm>
-            <a:off x="5443874" y="2174877"/>
+            <a:off x="5446037" y="2162061"/>
             <a:ext cx="256032" cy="256032"/>
           </a:xfrm>
           <a:prstGeom prst="ellipse">
@@ -29400,7 +29400,7 @@
         </p:nvSpPr>
         <p:spPr>
           <a:xfrm>
-            <a:off x="5443874" y="2174877"/>
+            <a:off x="5446037" y="2162061"/>
             <a:ext cx="256032" cy="256032"/>
           </a:xfrm>
           <a:prstGeom prst="rect">
@@ -29439,7 +29439,7 @@
         </p:nvSpPr>
         <p:spPr>
           <a:xfrm>
-            <a:off x="5446037" y="2162061"/>
+            <a:off x="5447123" y="2170449"/>
             <a:ext cx="256032" cy="256032"/>
           </a:xfrm>
           <a:prstGeom prst="ellipse">
@@ -29464,7 +29464,7 @@
         </p:nvSpPr>
         <p:spPr>
           <a:xfrm>
-            <a:off x="5446037" y="2162061"/>
+            <a:off x="5447123" y="2170449"/>
             <a:ext cx="256032" cy="256032"/>
           </a:xfrm>
           <a:prstGeom prst="rect">
@@ -29503,7 +29503,7 @@
         </p:nvSpPr>
         <p:spPr>
           <a:xfrm>
-            <a:off x="5447123" y="2170449"/>
+            <a:off x="5446433" y="2163609"/>
             <a:ext cx="256032" cy="256032"/>
           </a:xfrm>
           <a:prstGeom prst="ellipse">
@@ -29528,32 +29528,32 @@
         </p:nvSpPr>
         <p:spPr>
           <a:xfrm>
-            <a:off x="5447123" y="2170449"/>
-            <a:ext cx="256032" cy="256032"/>
-          </a:xfrm>
-          <a:prstGeom prst="rect">
-            <a:avLst/>
-          </a:prstGeom>
-          <a:noFill/>
-          <a:ln/>
-        </p:spPr>
-        <p:txBody>
-          <a:bodyPr wrap="square" lIns="0" tIns="0" rIns="0" bIns="0" rtlCol="0" anchor="ctr"/>
-          <a:lstStyle/>
-          <a:p>
-            <a:pPr algn="ctr" indent="0" marL="0">
-              <a:buNone/>
-            </a:pPr>
-            <a:r>
-              <a:rPr lang="en-US" sz="900" b="1" dirty="0">
-                <a:solidFill>
-                  <a:srgbClr val="FFFFFF"/>
-                </a:solidFill>
-                <a:latin typeface="Arial" pitchFamily="34" charset="0"/>
-                <a:ea typeface="Arial" pitchFamily="34" charset="-122"/>
-                <a:cs typeface="Arial" pitchFamily="34" charset="-120"/>
-              </a:rPr>
-              <a:t>16</a:t>
+            <a:off x="5446433" y="2163609"/>
+            <a:ext cx="256032" cy="256032"/>
+          </a:xfrm>
+          <a:prstGeom prst="rect">
+            <a:avLst/>
+          </a:prstGeom>
+          <a:noFill/>
+          <a:ln/>
+        </p:spPr>
+        <p:txBody>
+          <a:bodyPr wrap="square" lIns="0" tIns="0" rIns="0" bIns="0" rtlCol="0" anchor="ctr"/>
+          <a:lstStyle/>
+          <a:p>
+            <a:pPr algn="ctr" indent="0" marL="0">
+              <a:buNone/>
+            </a:pPr>
+            <a:r>
+              <a:rPr lang="en-US" sz="900" b="1" dirty="0">
+                <a:solidFill>
+                  <a:srgbClr val="FFFFFF"/>
+                </a:solidFill>
+                <a:latin typeface="Arial" pitchFamily="34" charset="0"/>
+                <a:ea typeface="Arial" pitchFamily="34" charset="-122"/>
+                <a:cs typeface="Arial" pitchFamily="34" charset="-120"/>
+              </a:rPr>
+              <a:t>17</a:t>
             </a:r>
             <a:endParaRPr lang="en-US" sz="900" dirty="0"/>
           </a:p>
@@ -29567,7 +29567,7 @@
         </p:nvSpPr>
         <p:spPr>
           <a:xfrm>
-            <a:off x="5446433" y="2163609"/>
+            <a:off x="5446288" y="2165908"/>
             <a:ext cx="256032" cy="256032"/>
           </a:xfrm>
           <a:prstGeom prst="ellipse">
@@ -29592,7 +29592,7 @@
         </p:nvSpPr>
         <p:spPr>
           <a:xfrm>
-            <a:off x="5446433" y="2163609"/>
+            <a:off x="5446288" y="2165908"/>
             <a:ext cx="256032" cy="256032"/>
           </a:xfrm>
           <a:prstGeom prst="rect">
@@ -29631,7 +29631,7 @@
         </p:nvSpPr>
         <p:spPr>
           <a:xfrm>
-            <a:off x="5446288" y="2165908"/>
+            <a:off x="5446425" y="2165015"/>
             <a:ext cx="256032" cy="256032"/>
           </a:xfrm>
           <a:prstGeom prst="ellipse">
@@ -29656,7 +29656,7 @@
         </p:nvSpPr>
         <p:spPr>
           <a:xfrm>
-            <a:off x="5446288" y="2165908"/>
+            <a:off x="5446425" y="2165015"/>
             <a:ext cx="256032" cy="256032"/>
           </a:xfrm>
           <a:prstGeom prst="rect">
@@ -29695,7 +29695,7 @@
         </p:nvSpPr>
         <p:spPr>
           <a:xfrm>
-            <a:off x="5446425" y="2165015"/>
+            <a:off x="5446282" y="2166070"/>
             <a:ext cx="256032" cy="256032"/>
           </a:xfrm>
           <a:prstGeom prst="ellipse">
@@ -29720,7 +29720,7 @@
         </p:nvSpPr>
         <p:spPr>
           <a:xfrm>
-            <a:off x="5446425" y="2165015"/>
+            <a:off x="5446282" y="2166070"/>
             <a:ext cx="256032" cy="256032"/>
           </a:xfrm>
           <a:prstGeom prst="rect">
@@ -29759,7 +29759,7 @@
         </p:nvSpPr>
         <p:spPr>
           <a:xfrm>
-            <a:off x="5446282" y="2166070"/>
+            <a:off x="5446435" y="2165796"/>
             <a:ext cx="256032" cy="256032"/>
           </a:xfrm>
           <a:prstGeom prst="ellipse">
@@ -29784,7 +29784,7 @@
         </p:nvSpPr>
         <p:spPr>
           <a:xfrm>
-            <a:off x="5446282" y="2166070"/>
+            <a:off x="5446435" y="2165796"/>
             <a:ext cx="256032" cy="256032"/>
           </a:xfrm>
           <a:prstGeom prst="rect">
@@ -29823,7 +29823,7 @@
         </p:nvSpPr>
         <p:spPr>
           <a:xfrm>
-            <a:off x="5446435" y="2165796"/>
+            <a:off x="5446423" y="2165119"/>
             <a:ext cx="256032" cy="256032"/>
           </a:xfrm>
           <a:prstGeom prst="ellipse">
@@ -29848,7 +29848,7 @@
         </p:nvSpPr>
         <p:spPr>
           <a:xfrm>
-            <a:off x="5446435" y="2165796"/>
+            <a:off x="5446423" y="2165119"/>
             <a:ext cx="256032" cy="256032"/>
           </a:xfrm>
           <a:prstGeom prst="rect">
@@ -29887,7 +29887,7 @@
         </p:nvSpPr>
         <p:spPr>
           <a:xfrm>
-            <a:off x="5446423" y="2165119"/>
+            <a:off x="5446429" y="2165451"/>
             <a:ext cx="256032" cy="256032"/>
           </a:xfrm>
           <a:prstGeom prst="ellipse">
@@ -29912,7 +29912,7 @@
         </p:nvSpPr>
         <p:spPr>
           <a:xfrm>
-            <a:off x="5446423" y="2165119"/>
+            <a:off x="5446429" y="2165451"/>
             <a:ext cx="256032" cy="256032"/>
           </a:xfrm>
           <a:prstGeom prst="rect">
@@ -29951,7 +29951,7 @@
         </p:nvSpPr>
         <p:spPr>
           <a:xfrm>
-            <a:off x="5446429" y="2165451"/>
+            <a:off x="5446330" y="2166120"/>
             <a:ext cx="256032" cy="256032"/>
           </a:xfrm>
           <a:prstGeom prst="ellipse">
@@ -29976,7 +29976,7 @@
         </p:nvSpPr>
         <p:spPr>
           <a:xfrm>
-            <a:off x="5446429" y="2165451"/>
+            <a:off x="5446330" y="2166120"/>
             <a:ext cx="256032" cy="256032"/>
           </a:xfrm>
           <a:prstGeom prst="rect">
@@ -30015,7 +30015,7 @@
         </p:nvSpPr>
         <p:spPr>
           <a:xfrm>
-            <a:off x="5446330" y="2166120"/>
+            <a:off x="5447385" y="2166082"/>
             <a:ext cx="256032" cy="256032"/>
           </a:xfrm>
           <a:prstGeom prst="ellipse">
@@ -30040,7 +30040,7 @@
         </p:nvSpPr>
         <p:spPr>
           <a:xfrm>
-            <a:off x="5446330" y="2166120"/>
+            <a:off x="5447385" y="2166082"/>
             <a:ext cx="256032" cy="256032"/>
           </a:xfrm>
           <a:prstGeom prst="rect">
@@ -30079,7 +30079,7 @@
         </p:nvSpPr>
         <p:spPr>
           <a:xfrm>
-            <a:off x="5447385" y="2166082"/>
+            <a:off x="5447260" y="2180965"/>
             <a:ext cx="256032" cy="256032"/>
           </a:xfrm>
           <a:prstGeom prst="ellipse">
@@ -30104,7 +30104,7 @@
         </p:nvSpPr>
         <p:spPr>
           <a:xfrm>
-            <a:off x="5447385" y="2166082"/>
+            <a:off x="5447260" y="2180965"/>
             <a:ext cx="256032" cy="256032"/>
           </a:xfrm>
           <a:prstGeom prst="rect">
@@ -30143,7 +30143,7 @@
         </p:nvSpPr>
         <p:spPr>
           <a:xfrm>
-            <a:off x="5447260" y="2180965"/>
+            <a:off x="5447608" y="2191431"/>
             <a:ext cx="256032" cy="256032"/>
           </a:xfrm>
           <a:prstGeom prst="ellipse">
@@ -30168,7 +30168,7 @@
         </p:nvSpPr>
         <p:spPr>
           <a:xfrm>
-            <a:off x="5447260" y="2180965"/>
+            <a:off x="5447608" y="2191431"/>
             <a:ext cx="256032" cy="256032"/>
           </a:xfrm>
           <a:prstGeom prst="rect">
@@ -30207,7 +30207,7 @@
         </p:nvSpPr>
         <p:spPr>
           <a:xfrm>
-            <a:off x="5447608" y="2191431"/>
+            <a:off x="5446290" y="2174544"/>
             <a:ext cx="256032" cy="256032"/>
           </a:xfrm>
           <a:prstGeom prst="ellipse">
@@ -30232,7 +30232,7 @@
         </p:nvSpPr>
         <p:spPr>
           <a:xfrm>
-            <a:off x="5447608" y="2191431"/>
+            <a:off x="5446290" y="2174544"/>
             <a:ext cx="256032" cy="256032"/>
           </a:xfrm>
           <a:prstGeom prst="rect">
@@ -30271,7 +30271,7 @@
         </p:nvSpPr>
         <p:spPr>
           <a:xfrm>
-            <a:off x="5446290" y="2174544"/>
+            <a:off x="5447084" y="2159186"/>
             <a:ext cx="256032" cy="256032"/>
           </a:xfrm>
           <a:prstGeom prst="ellipse">
@@ -30296,7 +30296,7 @@
         </p:nvSpPr>
         <p:spPr>
           <a:xfrm>
-            <a:off x="5446290" y="2174544"/>
+            <a:off x="5447084" y="2159186"/>
             <a:ext cx="256032" cy="256032"/>
           </a:xfrm>
           <a:prstGeom prst="rect">
@@ -30335,7 +30335,7 @@
         </p:nvSpPr>
         <p:spPr>
           <a:xfrm>
-            <a:off x="5447084" y="2159186"/>
+            <a:off x="5449075" y="2186057"/>
             <a:ext cx="256032" cy="256032"/>
           </a:xfrm>
           <a:prstGeom prst="ellipse">
@@ -30360,7 +30360,7 @@
         </p:nvSpPr>
         <p:spPr>
           <a:xfrm>
-            <a:off x="5447084" y="2159186"/>
+            <a:off x="5449075" y="2186057"/>
             <a:ext cx="256032" cy="256032"/>
           </a:xfrm>
           <a:prstGeom prst="rect">
@@ -30399,7 +30399,7 @@
         </p:nvSpPr>
         <p:spPr>
           <a:xfrm>
-            <a:off x="5449075" y="2186057"/>
+            <a:off x="5447184" y="2158094"/>
             <a:ext cx="256032" cy="256032"/>
           </a:xfrm>
           <a:prstGeom prst="ellipse">
@@ -30424,32 +30424,32 @@
         </p:nvSpPr>
         <p:spPr>
           <a:xfrm>
-            <a:off x="5449075" y="2186057"/>
-            <a:ext cx="256032" cy="256032"/>
-          </a:xfrm>
-          <a:prstGeom prst="rect">
-            <a:avLst/>
-          </a:prstGeom>
-          <a:noFill/>
-          <a:ln/>
-        </p:spPr>
-        <p:txBody>
-          <a:bodyPr wrap="square" lIns="0" tIns="0" rIns="0" bIns="0" rtlCol="0" anchor="ctr"/>
-          <a:lstStyle/>
-          <a:p>
-            <a:pPr algn="ctr" indent="0" marL="0">
-              <a:buNone/>
-            </a:pPr>
-            <a:r>
-              <a:rPr lang="en-US" sz="900" b="1" dirty="0">
-                <a:solidFill>
-                  <a:srgbClr val="FFFFFF"/>
-                </a:solidFill>
-                <a:latin typeface="Arial" pitchFamily="34" charset="0"/>
-                <a:ea typeface="Arial" pitchFamily="34" charset="-122"/>
-                <a:cs typeface="Arial" pitchFamily="34" charset="-120"/>
-              </a:rPr>
-              <a:t>17</a:t>
+            <a:off x="5447184" y="2158094"/>
+            <a:ext cx="256032" cy="256032"/>
+          </a:xfrm>
+          <a:prstGeom prst="rect">
+            <a:avLst/>
+          </a:prstGeom>
+          <a:noFill/>
+          <a:ln/>
+        </p:spPr>
+        <p:txBody>
+          <a:bodyPr wrap="square" lIns="0" tIns="0" rIns="0" bIns="0" rtlCol="0" anchor="ctr"/>
+          <a:lstStyle/>
+          <a:p>
+            <a:pPr algn="ctr" indent="0" marL="0">
+              <a:buNone/>
+            </a:pPr>
+            <a:r>
+              <a:rPr lang="en-US" sz="900" b="1" dirty="0">
+                <a:solidFill>
+                  <a:srgbClr val="FFFFFF"/>
+                </a:solidFill>
+                <a:latin typeface="Arial" pitchFamily="34" charset="0"/>
+                <a:ea typeface="Arial" pitchFamily="34" charset="-122"/>
+                <a:cs typeface="Arial" pitchFamily="34" charset="-120"/>
+              </a:rPr>
+              <a:t>18</a:t>
             </a:r>
             <a:endParaRPr lang="en-US" sz="900" dirty="0"/>
           </a:p>
@@ -30463,7 +30463,7 @@
         </p:nvSpPr>
         <p:spPr>
           <a:xfrm>
-            <a:off x="5447184" y="2158094"/>
+            <a:off x="5446909" y="2159496"/>
             <a:ext cx="256032" cy="256032"/>
           </a:xfrm>
           <a:prstGeom prst="ellipse">
@@ -30488,7 +30488,7 @@
         </p:nvSpPr>
         <p:spPr>
           <a:xfrm>
-            <a:off x="5447184" y="2158094"/>
+            <a:off x="5446909" y="2159496"/>
             <a:ext cx="256032" cy="256032"/>
           </a:xfrm>
           <a:prstGeom prst="rect">
@@ -30527,7 +30527,7 @@
         </p:nvSpPr>
         <p:spPr>
           <a:xfrm>
-            <a:off x="5446909" y="2159496"/>
+            <a:off x="5444968" y="2167338"/>
             <a:ext cx="256032" cy="256032"/>
           </a:xfrm>
           <a:prstGeom prst="ellipse">
@@ -30552,7 +30552,7 @@
         </p:nvSpPr>
         <p:spPr>
           <a:xfrm>
-            <a:off x="5446909" y="2159496"/>
+            <a:off x="5444968" y="2167338"/>
             <a:ext cx="256032" cy="256032"/>
           </a:xfrm>
           <a:prstGeom prst="rect">
@@ -30591,7 +30591,7 @@
         </p:nvSpPr>
         <p:spPr>
           <a:xfrm>
-            <a:off x="5444968" y="2167338"/>
+            <a:off x="5446296" y="2175675"/>
             <a:ext cx="256032" cy="256032"/>
           </a:xfrm>
           <a:prstGeom prst="ellipse">
@@ -30616,7 +30616,7 @@
         </p:nvSpPr>
         <p:spPr>
           <a:xfrm>
-            <a:off x="5444968" y="2167338"/>
+            <a:off x="5446296" y="2175675"/>
             <a:ext cx="256032" cy="256032"/>
           </a:xfrm>
           <a:prstGeom prst="rect">
@@ -30655,7 +30655,7 @@
         </p:nvSpPr>
         <p:spPr>
           <a:xfrm>
-            <a:off x="5446296" y="2175675"/>
+            <a:off x="5447084" y="2181379"/>
             <a:ext cx="256032" cy="256032"/>
           </a:xfrm>
           <a:prstGeom prst="ellipse">
@@ -30680,7 +30680,7 @@
         </p:nvSpPr>
         <p:spPr>
           <a:xfrm>
-            <a:off x="5446296" y="2175675"/>
+            <a:off x="5447084" y="2181379"/>
             <a:ext cx="256032" cy="256032"/>
           </a:xfrm>
           <a:prstGeom prst="rect">
@@ -30719,7 +30719,7 @@
         </p:nvSpPr>
         <p:spPr>
           <a:xfrm>
-            <a:off x="5447084" y="2181379"/>
+            <a:off x="5449824" y="2177232"/>
             <a:ext cx="256032" cy="256032"/>
           </a:xfrm>
           <a:prstGeom prst="ellipse">
@@ -30744,7 +30744,7 @@
         </p:nvSpPr>
         <p:spPr>
           <a:xfrm>
-            <a:off x="5447084" y="2181379"/>
+            <a:off x="5449824" y="2177232"/>
             <a:ext cx="256032" cy="256032"/>
           </a:xfrm>
           <a:prstGeom prst="rect">
@@ -30783,7 +30783,7 @@
         </p:nvSpPr>
         <p:spPr>
           <a:xfrm>
-            <a:off x="5449824" y="2177232"/>
+            <a:off x="5445897" y="2166596"/>
             <a:ext cx="256032" cy="256032"/>
           </a:xfrm>
           <a:prstGeom prst="ellipse">
@@ -30808,7 +30808,7 @@
         </p:nvSpPr>
         <p:spPr>
           <a:xfrm>
-            <a:off x="5449824" y="2177232"/>
+            <a:off x="5445897" y="2166596"/>
             <a:ext cx="256032" cy="256032"/>
           </a:xfrm>
           <a:prstGeom prst="rect">
@@ -30847,7 +30847,7 @@
         </p:nvSpPr>
         <p:spPr>
           <a:xfrm>
-            <a:off x="5445897" y="2166596"/>
+            <a:off x="5448960" y="2179052"/>
             <a:ext cx="256032" cy="256032"/>
           </a:xfrm>
           <a:prstGeom prst="ellipse">
@@ -30872,7 +30872,7 @@
         </p:nvSpPr>
         <p:spPr>
           <a:xfrm>
-            <a:off x="5445897" y="2166596"/>
+            <a:off x="5448960" y="2179052"/>
             <a:ext cx="256032" cy="256032"/>
           </a:xfrm>
           <a:prstGeom prst="rect">
@@ -30911,7 +30911,7 @@
         </p:nvSpPr>
         <p:spPr>
           <a:xfrm>
-            <a:off x="5448960" y="2179052"/>
+            <a:off x="5447609" y="2192098"/>
             <a:ext cx="256032" cy="256032"/>
           </a:xfrm>
           <a:prstGeom prst="ellipse">
@@ -30936,7 +30936,7 @@
         </p:nvSpPr>
         <p:spPr>
           <a:xfrm>
-            <a:off x="5448960" y="2179052"/>
+            <a:off x="5447609" y="2192098"/>
             <a:ext cx="256032" cy="256032"/>
           </a:xfrm>
           <a:prstGeom prst="rect">
@@ -30975,7 +30975,7 @@
         </p:nvSpPr>
         <p:spPr>
           <a:xfrm>
-            <a:off x="5447609" y="2192098"/>
+            <a:off x="5446604" y="2177739"/>
             <a:ext cx="256032" cy="256032"/>
           </a:xfrm>
           <a:prstGeom prst="ellipse">
@@ -31000,7 +31000,7 @@
         </p:nvSpPr>
         <p:spPr>
           <a:xfrm>
-            <a:off x="5447609" y="2192098"/>
+            <a:off x="5446604" y="2177739"/>
             <a:ext cx="256032" cy="256032"/>
           </a:xfrm>
           <a:prstGeom prst="rect">
@@ -31039,7 +31039,7 @@
         </p:nvSpPr>
         <p:spPr>
           <a:xfrm>
-            <a:off x="5446604" y="2177739"/>
+            <a:off x="5446738" y="2160670"/>
             <a:ext cx="256032" cy="256032"/>
           </a:xfrm>
           <a:prstGeom prst="ellipse">
@@ -31064,7 +31064,7 @@
         </p:nvSpPr>
         <p:spPr>
           <a:xfrm>
-            <a:off x="5446604" y="2177739"/>
+            <a:off x="5446738" y="2160670"/>
             <a:ext cx="256032" cy="256032"/>
           </a:xfrm>
           <a:prstGeom prst="rect">
@@ -31103,7 +31103,7 @@
         </p:nvSpPr>
         <p:spPr>
           <a:xfrm>
-            <a:off x="5446738" y="2160670"/>
+            <a:off x="5446325" y="2166254"/>
             <a:ext cx="256032" cy="256032"/>
           </a:xfrm>
           <a:prstGeom prst="ellipse">
@@ -31128,7 +31128,7 @@
         </p:nvSpPr>
         <p:spPr>
           <a:xfrm>
-            <a:off x="5446738" y="2160670"/>
+            <a:off x="5446325" y="2166254"/>
             <a:ext cx="256032" cy="256032"/>
           </a:xfrm>
           <a:prstGeom prst="rect">
@@ -31167,7 +31167,7 @@
         </p:nvSpPr>
         <p:spPr>
           <a:xfrm>
-            <a:off x="5446325" y="2166254"/>
+            <a:off x="5446433" y="2163472"/>
             <a:ext cx="256032" cy="256032"/>
           </a:xfrm>
           <a:prstGeom prst="ellipse">
@@ -31192,7 +31192,7 @@
         </p:nvSpPr>
         <p:spPr>
           <a:xfrm>
-            <a:off x="5446325" y="2166254"/>
+            <a:off x="5446433" y="2163472"/>
             <a:ext cx="256032" cy="256032"/>
           </a:xfrm>
           <a:prstGeom prst="rect">
@@ -31231,7 +31231,7 @@
         </p:nvSpPr>
         <p:spPr>
           <a:xfrm>
-            <a:off x="5446433" y="2163472"/>
+            <a:off x="5446407" y="2165950"/>
             <a:ext cx="256032" cy="256032"/>
           </a:xfrm>
           <a:prstGeom prst="ellipse">
@@ -31256,7 +31256,7 @@
         </p:nvSpPr>
         <p:spPr>
           <a:xfrm>
-            <a:off x="5446433" y="2163472"/>
+            <a:off x="5446407" y="2165950"/>
             <a:ext cx="256032" cy="256032"/>
           </a:xfrm>
           <a:prstGeom prst="rect">
@@ -31295,7 +31295,7 @@
         </p:nvSpPr>
         <p:spPr>
           <a:xfrm>
-            <a:off x="5446407" y="2165950"/>
+            <a:off x="5446642" y="2187811"/>
             <a:ext cx="256032" cy="256032"/>
           </a:xfrm>
           <a:prstGeom prst="ellipse">
@@ -31320,7 +31320,7 @@
         </p:nvSpPr>
         <p:spPr>
           <a:xfrm>
-            <a:off x="5446407" y="2165950"/>
+            <a:off x="5446642" y="2187811"/>
             <a:ext cx="256032" cy="256032"/>
           </a:xfrm>
           <a:prstGeom prst="rect">
@@ -31359,7 +31359,7 @@
         </p:nvSpPr>
         <p:spPr>
           <a:xfrm>
-            <a:off x="5446642" y="2187811"/>
+            <a:off x="5445138" y="2186543"/>
             <a:ext cx="256032" cy="256032"/>
           </a:xfrm>
           <a:prstGeom prst="ellipse">
@@ -31384,7 +31384,7 @@
         </p:nvSpPr>
         <p:spPr>
           <a:xfrm>
-            <a:off x="5446642" y="2187811"/>
+            <a:off x="5445138" y="2186543"/>
             <a:ext cx="256032" cy="256032"/>
           </a:xfrm>
           <a:prstGeom prst="rect">
@@ -31423,7 +31423,7 @@
         </p:nvSpPr>
         <p:spPr>
           <a:xfrm>
-            <a:off x="5445138" y="2186543"/>
+            <a:off x="5446349" y="2165564"/>
             <a:ext cx="256032" cy="256032"/>
           </a:xfrm>
           <a:prstGeom prst="ellipse">
@@ -31448,7 +31448,7 @@
         </p:nvSpPr>
         <p:spPr>
           <a:xfrm>
-            <a:off x="5445138" y="2186543"/>
+            <a:off x="5446349" y="2165564"/>
             <a:ext cx="256032" cy="256032"/>
           </a:xfrm>
           <a:prstGeom prst="rect">
@@ -31487,7 +31487,7 @@
         </p:nvSpPr>
         <p:spPr>
           <a:xfrm>
-            <a:off x="5446349" y="2165564"/>
+            <a:off x="5445205" y="2194720"/>
             <a:ext cx="256032" cy="256032"/>
           </a:xfrm>
           <a:prstGeom prst="ellipse">
@@ -31512,7 +31512,7 @@
         </p:nvSpPr>
         <p:spPr>
           <a:xfrm>
-            <a:off x="5446349" y="2165564"/>
+            <a:off x="5445205" y="2194720"/>
             <a:ext cx="256032" cy="256032"/>
           </a:xfrm>
           <a:prstGeom prst="rect">
@@ -31551,7 +31551,7 @@
         </p:nvSpPr>
         <p:spPr>
           <a:xfrm>
-            <a:off x="5445205" y="2194720"/>
+            <a:off x="5447498" y="2191245"/>
             <a:ext cx="256032" cy="256032"/>
           </a:xfrm>
           <a:prstGeom prst="ellipse">
@@ -31576,7 +31576,7 @@
         </p:nvSpPr>
         <p:spPr>
           <a:xfrm>
-            <a:off x="5445205" y="2194720"/>
+            <a:off x="5447498" y="2191245"/>
             <a:ext cx="256032" cy="256032"/>
           </a:xfrm>
           <a:prstGeom prst="rect">
@@ -31615,7 +31615,7 @@
         </p:nvSpPr>
         <p:spPr>
           <a:xfrm>
-            <a:off x="5447498" y="2191245"/>
+            <a:off x="5444292" y="2192316"/>
             <a:ext cx="256032" cy="256032"/>
           </a:xfrm>
           <a:prstGeom prst="ellipse">
@@ -31640,7 +31640,7 @@
         </p:nvSpPr>
         <p:spPr>
           <a:xfrm>
-            <a:off x="5447498" y="2191245"/>
+            <a:off x="5444292" y="2192316"/>
             <a:ext cx="256032" cy="256032"/>
           </a:xfrm>
           <a:prstGeom prst="rect">
@@ -31679,7 +31679,7 @@
         </p:nvSpPr>
         <p:spPr>
           <a:xfrm>
-            <a:off x="5444292" y="2192316"/>
+            <a:off x="5446099" y="2168154"/>
             <a:ext cx="256032" cy="256032"/>
           </a:xfrm>
           <a:prstGeom prst="ellipse">
@@ -31704,7 +31704,7 @@
         </p:nvSpPr>
         <p:spPr>
           <a:xfrm>
-            <a:off x="5444292" y="2192316"/>
+            <a:off x="5446099" y="2168154"/>
             <a:ext cx="256032" cy="256032"/>
           </a:xfrm>
           <a:prstGeom prst="rect">
@@ -31743,7 +31743,7 @@
         </p:nvSpPr>
         <p:spPr>
           <a:xfrm>
-            <a:off x="5446099" y="2168154"/>
+            <a:off x="5445998" y="2191099"/>
             <a:ext cx="256032" cy="256032"/>
           </a:xfrm>
           <a:prstGeom prst="ellipse">
@@ -31768,7 +31768,7 @@
         </p:nvSpPr>
         <p:spPr>
           <a:xfrm>
-            <a:off x="5446099" y="2168154"/>
+            <a:off x="5445998" y="2191099"/>
             <a:ext cx="256032" cy="256032"/>
           </a:xfrm>
           <a:prstGeom prst="rect">
@@ -31807,7 +31807,7 @@
         </p:nvSpPr>
         <p:spPr>
           <a:xfrm>
-            <a:off x="5445998" y="2191099"/>
+            <a:off x="5443285" y="2184582"/>
             <a:ext cx="256032" cy="256032"/>
           </a:xfrm>
           <a:prstGeom prst="ellipse">
@@ -31832,7 +31832,7 @@
         </p:nvSpPr>
         <p:spPr>
           <a:xfrm>
-            <a:off x="5445998" y="2191099"/>
+            <a:off x="5443285" y="2184582"/>
             <a:ext cx="256032" cy="256032"/>
           </a:xfrm>
           <a:prstGeom prst="rect">
@@ -31871,7 +31871,7 @@
         </p:nvSpPr>
         <p:spPr>
           <a:xfrm>
-            <a:off x="5443285" y="2184582"/>
+            <a:off x="5448394" y="2186740"/>
             <a:ext cx="256032" cy="256032"/>
           </a:xfrm>
           <a:prstGeom prst="ellipse">
@@ -31896,7 +31896,7 @@
         </p:nvSpPr>
         <p:spPr>
           <a:xfrm>
-            <a:off x="5443285" y="2184582"/>
+            <a:off x="5448394" y="2186740"/>
             <a:ext cx="256032" cy="256032"/>
           </a:xfrm>
           <a:prstGeom prst="rect">
@@ -31935,7 +31935,7 @@
         </p:nvSpPr>
         <p:spPr>
           <a:xfrm>
-            <a:off x="5448394" y="2186740"/>
+            <a:off x="5445243" y="2174752"/>
             <a:ext cx="256032" cy="256032"/>
           </a:xfrm>
           <a:prstGeom prst="ellipse">
@@ -31960,7 +31960,7 @@
         </p:nvSpPr>
         <p:spPr>
           <a:xfrm>
-            <a:off x="5448394" y="2186740"/>
+            <a:off x="5445243" y="2174752"/>
             <a:ext cx="256032" cy="256032"/>
           </a:xfrm>
           <a:prstGeom prst="rect">
@@ -31999,7 +31999,7 @@
         </p:nvSpPr>
         <p:spPr>
           <a:xfrm>
-            <a:off x="5445243" y="2174752"/>
+            <a:off x="5444827" y="2167169"/>
             <a:ext cx="256032" cy="256032"/>
           </a:xfrm>
           <a:prstGeom prst="ellipse">
@@ -32024,7 +32024,7 @@
         </p:nvSpPr>
         <p:spPr>
           <a:xfrm>
-            <a:off x="5445243" y="2174752"/>
+            <a:off x="5444827" y="2167169"/>
             <a:ext cx="256032" cy="256032"/>
           </a:xfrm>
           <a:prstGeom prst="rect">
@@ -32063,7 +32063,7 @@
         </p:nvSpPr>
         <p:spPr>
           <a:xfrm>
-            <a:off x="5444827" y="2167169"/>
+            <a:off x="5446795" y="2177767"/>
             <a:ext cx="256032" cy="256032"/>
           </a:xfrm>
           <a:prstGeom prst="ellipse">
@@ -32088,7 +32088,7 @@
         </p:nvSpPr>
         <p:spPr>
           <a:xfrm>
-            <a:off x="5444827" y="2167169"/>
+            <a:off x="5446795" y="2177767"/>
             <a:ext cx="256032" cy="256032"/>
           </a:xfrm>
           <a:prstGeom prst="rect">
@@ -32127,7 +32127,7 @@
         </p:nvSpPr>
         <p:spPr>
           <a:xfrm>
-            <a:off x="5446795" y="2177767"/>
+            <a:off x="5446316" y="2181044"/>
             <a:ext cx="256032" cy="256032"/>
           </a:xfrm>
           <a:prstGeom prst="ellipse">
@@ -32152,7 +32152,7 @@
         </p:nvSpPr>
         <p:spPr>
           <a:xfrm>
-            <a:off x="5446795" y="2177767"/>
+            <a:off x="5446316" y="2181044"/>
             <a:ext cx="256032" cy="256032"/>
           </a:xfrm>
           <a:prstGeom prst="rect">
@@ -32191,7 +32191,7 @@
         </p:nvSpPr>
         <p:spPr>
           <a:xfrm>
-            <a:off x="5446316" y="2181044"/>
+            <a:off x="5445966" y="2183294"/>
             <a:ext cx="256032" cy="256032"/>
           </a:xfrm>
           <a:prstGeom prst="ellipse">
@@ -32216,7 +32216,7 @@
         </p:nvSpPr>
         <p:spPr>
           <a:xfrm>
-            <a:off x="5446316" y="2181044"/>
+            <a:off x="5445966" y="2183294"/>
             <a:ext cx="256032" cy="256032"/>
           </a:xfrm>
           <a:prstGeom prst="rect">
@@ -32255,7 +32255,7 @@
         </p:nvSpPr>
         <p:spPr>
           <a:xfrm>
-            <a:off x="5445966" y="2183294"/>
+            <a:off x="5445991" y="2170829"/>
             <a:ext cx="256032" cy="256032"/>
           </a:xfrm>
           <a:prstGeom prst="ellipse">
@@ -32280,7 +32280,7 @@
         </p:nvSpPr>
         <p:spPr>
           <a:xfrm>
-            <a:off x="5445966" y="2183294"/>
+            <a:off x="5445991" y="2170829"/>
             <a:ext cx="256032" cy="256032"/>
           </a:xfrm>
           <a:prstGeom prst="rect">
@@ -32319,7 +32319,7 @@
         </p:nvSpPr>
         <p:spPr>
           <a:xfrm>
-            <a:off x="5445991" y="2170829"/>
+            <a:off x="5445962" y="2171001"/>
             <a:ext cx="256032" cy="256032"/>
           </a:xfrm>
           <a:prstGeom prst="ellipse">
@@ -32344,7 +32344,7 @@
         </p:nvSpPr>
         <p:spPr>
           <a:xfrm>
-            <a:off x="5445991" y="2170829"/>
+            <a:off x="5445962" y="2171001"/>
             <a:ext cx="256032" cy="256032"/>
           </a:xfrm>
           <a:prstGeom prst="rect">
@@ -32383,7 +32383,7 @@
         </p:nvSpPr>
         <p:spPr>
           <a:xfrm>
-            <a:off x="5445962" y="2171001"/>
+            <a:off x="5445978" y="2171138"/>
             <a:ext cx="256032" cy="256032"/>
           </a:xfrm>
           <a:prstGeom prst="ellipse">
@@ -32408,7 +32408,7 @@
         </p:nvSpPr>
         <p:spPr>
           <a:xfrm>
-            <a:off x="5445962" y="2171001"/>
+            <a:off x="5445978" y="2171138"/>
             <a:ext cx="256032" cy="256032"/>
           </a:xfrm>
           <a:prstGeom prst="rect">
@@ -32447,7 +32447,7 @@
         </p:nvSpPr>
         <p:spPr>
           <a:xfrm>
-            <a:off x="5445978" y="2171138"/>
+            <a:off x="5446379" y="2178559"/>
             <a:ext cx="256032" cy="256032"/>
           </a:xfrm>
           <a:prstGeom prst="ellipse">
@@ -32472,7 +32472,7 @@
         </p:nvSpPr>
         <p:spPr>
           <a:xfrm>
-            <a:off x="5445978" y="2171138"/>
+            <a:off x="5446379" y="2178559"/>
             <a:ext cx="256032" cy="256032"/>
           </a:xfrm>
           <a:prstGeom prst="rect">
@@ -32511,7 +32511,7 @@
         </p:nvSpPr>
         <p:spPr>
           <a:xfrm>
-            <a:off x="5446379" y="2178559"/>
+            <a:off x="5447312" y="2177737"/>
             <a:ext cx="256032" cy="256032"/>
           </a:xfrm>
           <a:prstGeom prst="ellipse">
@@ -32536,7 +32536,7 @@
         </p:nvSpPr>
         <p:spPr>
           <a:xfrm>
-            <a:off x="5446379" y="2178559"/>
+            <a:off x="5447312" y="2177737"/>
             <a:ext cx="256032" cy="256032"/>
           </a:xfrm>
           <a:prstGeom prst="rect">
@@ -32575,7 +32575,7 @@
         </p:nvSpPr>
         <p:spPr>
           <a:xfrm>
-            <a:off x="5447312" y="2177737"/>
+            <a:off x="5447312" y="2177887"/>
             <a:ext cx="256032" cy="256032"/>
           </a:xfrm>
           <a:prstGeom prst="ellipse">
@@ -32600,7 +32600,7 @@
         </p:nvSpPr>
         <p:spPr>
           <a:xfrm>
-            <a:off x="5447312" y="2177737"/>
+            <a:off x="5447312" y="2177887"/>
             <a:ext cx="256032" cy="256032"/>
           </a:xfrm>
           <a:prstGeom prst="rect">
@@ -32639,7 +32639,7 @@
         </p:nvSpPr>
         <p:spPr>
           <a:xfrm>
-            <a:off x="5447312" y="2177887"/>
+            <a:off x="5447645" y="2169573"/>
             <a:ext cx="256032" cy="256032"/>
           </a:xfrm>
           <a:prstGeom prst="ellipse">
@@ -32664,7 +32664,7 @@
         </p:nvSpPr>
         <p:spPr>
           <a:xfrm>
-            <a:off x="5447312" y="2177887"/>
+            <a:off x="5447645" y="2169573"/>
             <a:ext cx="256032" cy="256032"/>
           </a:xfrm>
           <a:prstGeom prst="rect">
@@ -32703,7 +32703,7 @@
         </p:nvSpPr>
         <p:spPr>
           <a:xfrm>
-            <a:off x="5447645" y="2169573"/>
+            <a:off x="5448038" y="2172521"/>
             <a:ext cx="256032" cy="256032"/>
           </a:xfrm>
           <a:prstGeom prst="ellipse">
@@ -32728,7 +32728,7 @@
         </p:nvSpPr>
         <p:spPr>
           <a:xfrm>
-            <a:off x="5447645" y="2169573"/>
+            <a:off x="5448038" y="2172521"/>
             <a:ext cx="256032" cy="256032"/>
           </a:xfrm>
           <a:prstGeom prst="rect">
@@ -32767,7 +32767,7 @@
         </p:nvSpPr>
         <p:spPr>
           <a:xfrm>
-            <a:off x="5448038" y="2172521"/>
+            <a:off x="5447679" y="2186062"/>
             <a:ext cx="256032" cy="256032"/>
           </a:xfrm>
           <a:prstGeom prst="ellipse">
@@ -32792,7 +32792,7 @@
         </p:nvSpPr>
         <p:spPr>
           <a:xfrm>
-            <a:off x="5448038" y="2172521"/>
+            <a:off x="5447679" y="2186062"/>
             <a:ext cx="256032" cy="256032"/>
           </a:xfrm>
           <a:prstGeom prst="rect">
@@ -32831,7 +32831,7 @@
         </p:nvSpPr>
         <p:spPr>
           <a:xfrm>
-            <a:off x="5447679" y="2186062"/>
+            <a:off x="5448352" y="2180419"/>
             <a:ext cx="256032" cy="256032"/>
           </a:xfrm>
           <a:prstGeom prst="ellipse">
@@ -32856,7 +32856,7 @@
         </p:nvSpPr>
         <p:spPr>
           <a:xfrm>
-            <a:off x="5447679" y="2186062"/>
+            <a:off x="5448352" y="2180419"/>
             <a:ext cx="256032" cy="256032"/>
           </a:xfrm>
           <a:prstGeom prst="rect">
@@ -32895,7 +32895,7 @@
         </p:nvSpPr>
         <p:spPr>
           <a:xfrm>
-            <a:off x="5448352" y="2180419"/>
+            <a:off x="5448373" y="2183915"/>
             <a:ext cx="256032" cy="256032"/>
           </a:xfrm>
           <a:prstGeom prst="ellipse">
@@ -32920,7 +32920,7 @@
         </p:nvSpPr>
         <p:spPr>
           <a:xfrm>
-            <a:off x="5448352" y="2180419"/>
+            <a:off x="5448373" y="2183915"/>
             <a:ext cx="256032" cy="256032"/>
           </a:xfrm>
           <a:prstGeom prst="rect">
@@ -32959,7 +32959,7 @@
         </p:nvSpPr>
         <p:spPr>
           <a:xfrm>
-            <a:off x="5448373" y="2183915"/>
+            <a:off x="5445674" y="2186665"/>
             <a:ext cx="256032" cy="256032"/>
           </a:xfrm>
           <a:prstGeom prst="ellipse">
@@ -32984,7 +32984,7 @@
         </p:nvSpPr>
         <p:spPr>
           <a:xfrm>
-            <a:off x="5448373" y="2183915"/>
+            <a:off x="5445674" y="2186665"/>
             <a:ext cx="256032" cy="256032"/>
           </a:xfrm>
           <a:prstGeom prst="rect">
@@ -33023,7 +33023,7 @@
         </p:nvSpPr>
         <p:spPr>
           <a:xfrm>
-            <a:off x="5445674" y="2186665"/>
+            <a:off x="5443402" y="2180270"/>
             <a:ext cx="256032" cy="256032"/>
           </a:xfrm>
           <a:prstGeom prst="ellipse">
@@ -33048,7 +33048,7 @@
         </p:nvSpPr>
         <p:spPr>
           <a:xfrm>
-            <a:off x="5445674" y="2186665"/>
+            <a:off x="5443402" y="2180270"/>
             <a:ext cx="256032" cy="256032"/>
           </a:xfrm>
           <a:prstGeom prst="rect">
@@ -33087,7 +33087,7 @@
         </p:nvSpPr>
         <p:spPr>
           <a:xfrm>
-            <a:off x="5443402" y="2180270"/>
+            <a:off x="5447246" y="2189386"/>
             <a:ext cx="256032" cy="256032"/>
           </a:xfrm>
           <a:prstGeom prst="ellipse">
@@ -33112,7 +33112,7 @@
         </p:nvSpPr>
         <p:spPr>
           <a:xfrm>
-            <a:off x="5443402" y="2180270"/>
+            <a:off x="5447246" y="2189386"/>
             <a:ext cx="256032" cy="256032"/>
           </a:xfrm>
           <a:prstGeom prst="rect">
@@ -33151,7 +33151,7 @@
         </p:nvSpPr>
         <p:spPr>
           <a:xfrm>
-            <a:off x="5447246" y="2189386"/>
+            <a:off x="5447145" y="2188272"/>
             <a:ext cx="256032" cy="256032"/>
           </a:xfrm>
           <a:prstGeom prst="ellipse">
@@ -33176,7 +33176,7 @@
         </p:nvSpPr>
         <p:spPr>
           <a:xfrm>
-            <a:off x="5447246" y="2189386"/>
+            <a:off x="5447145" y="2188272"/>
             <a:ext cx="256032" cy="256032"/>
           </a:xfrm>
           <a:prstGeom prst="rect">
@@ -33215,7 +33215,7 @@
         </p:nvSpPr>
         <p:spPr>
           <a:xfrm>
-            <a:off x="5447145" y="2188272"/>
+            <a:off x="5443463" y="2184314"/>
             <a:ext cx="256032" cy="256032"/>
           </a:xfrm>
           <a:prstGeom prst="ellipse">
@@ -33240,7 +33240,7 @@
         </p:nvSpPr>
         <p:spPr>
           <a:xfrm>
-            <a:off x="5447145" y="2188272"/>
+            <a:off x="5443463" y="2184314"/>
             <a:ext cx="256032" cy="256032"/>
           </a:xfrm>
           <a:prstGeom prst="rect">
@@ -33279,7 +33279,7 @@
         </p:nvSpPr>
         <p:spPr>
           <a:xfrm>
-            <a:off x="5443463" y="2184314"/>
+            <a:off x="5446235" y="2189844"/>
             <a:ext cx="256032" cy="256032"/>
           </a:xfrm>
           <a:prstGeom prst="ellipse">
@@ -33304,7 +33304,7 @@
         </p:nvSpPr>
         <p:spPr>
           <a:xfrm>
-            <a:off x="5443463" y="2184314"/>
+            <a:off x="5446235" y="2189844"/>
             <a:ext cx="256032" cy="256032"/>
           </a:xfrm>
           <a:prstGeom prst="rect">
@@ -33343,7 +33343,7 @@
         </p:nvSpPr>
         <p:spPr>
           <a:xfrm>
-            <a:off x="5446235" y="2189844"/>
+            <a:off x="5445408" y="2187498"/>
             <a:ext cx="256032" cy="256032"/>
           </a:xfrm>
           <a:prstGeom prst="ellipse">
@@ -33368,7 +33368,7 @@
         </p:nvSpPr>
         <p:spPr>
           <a:xfrm>
-            <a:off x="5446235" y="2189844"/>
+            <a:off x="5445408" y="2187498"/>
             <a:ext cx="256032" cy="256032"/>
           </a:xfrm>
           <a:prstGeom prst="rect">
@@ -33407,7 +33407,7 @@
         </p:nvSpPr>
         <p:spPr>
           <a:xfrm>
-            <a:off x="5445408" y="2187498"/>
+            <a:off x="5446370" y="2184629"/>
             <a:ext cx="256032" cy="256032"/>
           </a:xfrm>
           <a:prstGeom prst="ellipse">
@@ -33432,7 +33432,7 @@
         </p:nvSpPr>
         <p:spPr>
           <a:xfrm>
-            <a:off x="5445408" y="2187498"/>
+            <a:off x="5446370" y="2184629"/>
             <a:ext cx="256032" cy="256032"/>
           </a:xfrm>
           <a:prstGeom prst="rect">
@@ -33471,7 +33471,7 @@
         </p:nvSpPr>
         <p:spPr>
           <a:xfrm>
-            <a:off x="5446370" y="2184629"/>
+            <a:off x="5448514" y="2187189"/>
             <a:ext cx="256032" cy="256032"/>
           </a:xfrm>
           <a:prstGeom prst="ellipse">
@@ -33496,7 +33496,7 @@
         </p:nvSpPr>
         <p:spPr>
           <a:xfrm>
-            <a:off x="5446370" y="2184629"/>
+            <a:off x="5448514" y="2187189"/>
             <a:ext cx="256032" cy="256032"/>
           </a:xfrm>
           <a:prstGeom prst="rect">
@@ -33535,7 +33535,7 @@
         </p:nvSpPr>
         <p:spPr>
           <a:xfrm>
-            <a:off x="5448514" y="2187189"/>
+            <a:off x="5447766" y="2180977"/>
             <a:ext cx="256032" cy="256032"/>
           </a:xfrm>
           <a:prstGeom prst="ellipse">
@@ -33560,7 +33560,7 @@
         </p:nvSpPr>
         <p:spPr>
           <a:xfrm>
-            <a:off x="5448514" y="2187189"/>
+            <a:off x="5447766" y="2180977"/>
             <a:ext cx="256032" cy="256032"/>
           </a:xfrm>
           <a:prstGeom prst="rect">
@@ -33599,7 +33599,7 @@
         </p:nvSpPr>
         <p:spPr>
           <a:xfrm>
-            <a:off x="5447766" y="2180977"/>
+            <a:off x="5446135" y="2168030"/>
             <a:ext cx="256032" cy="256032"/>
           </a:xfrm>
           <a:prstGeom prst="ellipse">
@@ -33624,7 +33624,7 @@
         </p:nvSpPr>
         <p:spPr>
           <a:xfrm>
-            <a:off x="5447766" y="2180977"/>
+            <a:off x="5446135" y="2168030"/>
             <a:ext cx="256032" cy="256032"/>
           </a:xfrm>
           <a:prstGeom prst="rect">
@@ -33663,7 +33663,7 @@
         </p:nvSpPr>
         <p:spPr>
           <a:xfrm>
-            <a:off x="5446135" y="2168030"/>
+            <a:off x="925743" y="5472300"/>
             <a:ext cx="256032" cy="256032"/>
           </a:xfrm>
           <a:prstGeom prst="ellipse">
@@ -33688,7 +33688,7 @@
         </p:nvSpPr>
         <p:spPr>
           <a:xfrm>
-            <a:off x="5446135" y="2168030"/>
+            <a:off x="925743" y="5472300"/>
             <a:ext cx="256032" cy="256032"/>
           </a:xfrm>
           <a:prstGeom prst="rect">
@@ -33727,7 +33727,7 @@
         </p:nvSpPr>
         <p:spPr>
           <a:xfrm>
-            <a:off x="925743" y="5472300"/>
+            <a:off x="925712" y="5472424"/>
             <a:ext cx="256032" cy="256032"/>
           </a:xfrm>
           <a:prstGeom prst="ellipse">
@@ -33752,7 +33752,7 @@
         </p:nvSpPr>
         <p:spPr>
           <a:xfrm>
-            <a:off x="925743" y="5472300"/>
+            <a:off x="925712" y="5472424"/>
             <a:ext cx="256032" cy="256032"/>
           </a:xfrm>
           <a:prstGeom prst="rect">
@@ -33791,7 +33791,7 @@
         </p:nvSpPr>
         <p:spPr>
           <a:xfrm>
-            <a:off x="925712" y="5472424"/>
+            <a:off x="5445805" y="2184219"/>
             <a:ext cx="256032" cy="256032"/>
           </a:xfrm>
           <a:prstGeom prst="ellipse">
@@ -33816,7 +33816,7 @@
         </p:nvSpPr>
         <p:spPr>
           <a:xfrm>
-            <a:off x="925712" y="5472424"/>
+            <a:off x="5445805" y="2184219"/>
             <a:ext cx="256032" cy="256032"/>
           </a:xfrm>
           <a:prstGeom prst="rect">
@@ -33855,7 +33855,7 @@
         </p:nvSpPr>
         <p:spPr>
           <a:xfrm>
-            <a:off x="5445805" y="2184219"/>
+            <a:off x="5445927" y="2190674"/>
             <a:ext cx="256032" cy="256032"/>
           </a:xfrm>
           <a:prstGeom prst="ellipse">
@@ -33880,7 +33880,7 @@
         </p:nvSpPr>
         <p:spPr>
           <a:xfrm>
-            <a:off x="5445805" y="2184219"/>
+            <a:off x="5445927" y="2190674"/>
             <a:ext cx="256032" cy="256032"/>
           </a:xfrm>
           <a:prstGeom prst="rect">
@@ -33919,7 +33919,7 @@
         </p:nvSpPr>
         <p:spPr>
           <a:xfrm>
-            <a:off x="5445927" y="2190674"/>
+            <a:off x="5444172" y="2172054"/>
             <a:ext cx="256032" cy="256032"/>
           </a:xfrm>
           <a:prstGeom prst="ellipse">
@@ -33944,7 +33944,7 @@
         </p:nvSpPr>
         <p:spPr>
           <a:xfrm>
-            <a:off x="5445927" y="2190674"/>
+            <a:off x="5444172" y="2172054"/>
             <a:ext cx="256032" cy="256032"/>
           </a:xfrm>
           <a:prstGeom prst="rect">
@@ -33983,7 +33983,7 @@
         </p:nvSpPr>
         <p:spPr>
           <a:xfrm>
-            <a:off x="5444172" y="2172054"/>
+            <a:off x="5444848" y="2182008"/>
             <a:ext cx="256032" cy="256032"/>
           </a:xfrm>
           <a:prstGeom prst="ellipse">
@@ -34008,7 +34008,7 @@
         </p:nvSpPr>
         <p:spPr>
           <a:xfrm>
-            <a:off x="5444172" y="2172054"/>
+            <a:off x="5444848" y="2182008"/>
             <a:ext cx="256032" cy="256032"/>
           </a:xfrm>
           <a:prstGeom prst="rect">
@@ -34047,7 +34047,7 @@
         </p:nvSpPr>
         <p:spPr>
           <a:xfrm>
-            <a:off x="5444848" y="2182008"/>
+            <a:off x="5445551" y="2193608"/>
             <a:ext cx="256032" cy="256032"/>
           </a:xfrm>
           <a:prstGeom prst="ellipse">
@@ -34072,7 +34072,7 @@
         </p:nvSpPr>
         <p:spPr>
           <a:xfrm>
-            <a:off x="5444848" y="2182008"/>
+            <a:off x="5445551" y="2193608"/>
             <a:ext cx="256032" cy="256032"/>
           </a:xfrm>
           <a:prstGeom prst="rect">
@@ -34111,7 +34111,7 @@
         </p:nvSpPr>
         <p:spPr>
           <a:xfrm>
-            <a:off x="5445551" y="2193608"/>
+            <a:off x="5447956" y="2180043"/>
             <a:ext cx="256032" cy="256032"/>
           </a:xfrm>
           <a:prstGeom prst="ellipse">
@@ -34136,7 +34136,7 @@
         </p:nvSpPr>
         <p:spPr>
           <a:xfrm>
-            <a:off x="5445551" y="2193608"/>
+            <a:off x="5447956" y="2180043"/>
             <a:ext cx="256032" cy="256032"/>
           </a:xfrm>
           <a:prstGeom prst="rect">
@@ -34175,7 +34175,7 @@
         </p:nvSpPr>
         <p:spPr>
           <a:xfrm>
-            <a:off x="5447956" y="2180043"/>
+            <a:off x="5448037" y="2180837"/>
             <a:ext cx="256032" cy="256032"/>
           </a:xfrm>
           <a:prstGeom prst="ellipse">
@@ -34200,7 +34200,7 @@
         </p:nvSpPr>
         <p:spPr>
           <a:xfrm>
-            <a:off x="5447956" y="2180043"/>
+            <a:off x="5448037" y="2180837"/>
             <a:ext cx="256032" cy="256032"/>
           </a:xfrm>
           <a:prstGeom prst="rect">
@@ -34239,7 +34239,7 @@
         </p:nvSpPr>
         <p:spPr>
           <a:xfrm>
-            <a:off x="5448037" y="2180837"/>
+            <a:off x="5448577" y="2188856"/>
             <a:ext cx="256032" cy="256032"/>
           </a:xfrm>
           <a:prstGeom prst="ellipse">
@@ -34264,7 +34264,7 @@
         </p:nvSpPr>
         <p:spPr>
           <a:xfrm>
-            <a:off x="5448037" y="2180837"/>
+            <a:off x="5448577" y="2188856"/>
             <a:ext cx="256032" cy="256032"/>
           </a:xfrm>
           <a:prstGeom prst="rect">
@@ -34303,7 +34303,7 @@
         </p:nvSpPr>
         <p:spPr>
           <a:xfrm>
-            <a:off x="5448577" y="2188856"/>
+            <a:off x="5445265" y="2166377"/>
             <a:ext cx="256032" cy="256032"/>
           </a:xfrm>
           <a:prstGeom prst="ellipse">
@@ -34328,7 +34328,7 @@
         </p:nvSpPr>
         <p:spPr>
           <a:xfrm>
-            <a:off x="5448577" y="2188856"/>
+            <a:off x="5445265" y="2166377"/>
             <a:ext cx="256032" cy="256032"/>
           </a:xfrm>
           <a:prstGeom prst="rect">
@@ -34367,7 +34367,7 @@
         </p:nvSpPr>
         <p:spPr>
           <a:xfrm>
-            <a:off x="5445265" y="2166377"/>
+            <a:off x="5448020" y="2171991"/>
             <a:ext cx="256032" cy="256032"/>
           </a:xfrm>
           <a:prstGeom prst="ellipse">
@@ -34392,7 +34392,7 @@
         </p:nvSpPr>
         <p:spPr>
           <a:xfrm>
-            <a:off x="5445265" y="2166377"/>
+            <a:off x="5448020" y="2171991"/>
             <a:ext cx="256032" cy="256032"/>
           </a:xfrm>
           <a:prstGeom prst="rect">
@@ -34431,7 +34431,7 @@
         </p:nvSpPr>
         <p:spPr>
           <a:xfrm>
-            <a:off x="5448020" y="2171991"/>
+            <a:off x="5448413" y="2180524"/>
             <a:ext cx="256032" cy="256032"/>
           </a:xfrm>
           <a:prstGeom prst="ellipse">
@@ -34456,7 +34456,7 @@
         </p:nvSpPr>
         <p:spPr>
           <a:xfrm>
-            <a:off x="5448020" y="2171991"/>
+            <a:off x="5448413" y="2180524"/>
             <a:ext cx="256032" cy="256032"/>
           </a:xfrm>
           <a:prstGeom prst="rect">
@@ -34495,7 +34495,7 @@
         </p:nvSpPr>
         <p:spPr>
           <a:xfrm>
-            <a:off x="5448413" y="2180524"/>
+            <a:off x="926201" y="5477256"/>
             <a:ext cx="256032" cy="256032"/>
           </a:xfrm>
           <a:prstGeom prst="ellipse">
@@ -34520,7 +34520,7 @@
         </p:nvSpPr>
         <p:spPr>
           <a:xfrm>
-            <a:off x="5448413" y="2180524"/>
+            <a:off x="926201" y="5477256"/>
             <a:ext cx="256032" cy="256032"/>
           </a:xfrm>
           <a:prstGeom prst="rect">
@@ -34559,7 +34559,7 @@
         </p:nvSpPr>
         <p:spPr>
           <a:xfrm>
-            <a:off x="926201" y="5477256"/>
+            <a:off x="925721" y="5463567"/>
             <a:ext cx="256032" cy="256032"/>
           </a:xfrm>
           <a:prstGeom prst="ellipse">
@@ -34584,7 +34584,7 @@
         </p:nvSpPr>
         <p:spPr>
           <a:xfrm>
-            <a:off x="926201" y="5477256"/>
+            <a:off x="925721" y="5463567"/>
             <a:ext cx="256032" cy="256032"/>
           </a:xfrm>
           <a:prstGeom prst="rect">
@@ -34623,7 +34623,7 @@
         </p:nvSpPr>
         <p:spPr>
           <a:xfrm>
-            <a:off x="925721" y="5463567"/>
+            <a:off x="5447033" y="2158815"/>
             <a:ext cx="256032" cy="256032"/>
           </a:xfrm>
           <a:prstGeom prst="ellipse">
@@ -34648,32 +34648,32 @@
         </p:nvSpPr>
         <p:spPr>
           <a:xfrm>
-            <a:off x="925721" y="5463567"/>
-            <a:ext cx="256032" cy="256032"/>
-          </a:xfrm>
-          <a:prstGeom prst="rect">
-            <a:avLst/>
-          </a:prstGeom>
-          <a:noFill/>
-          <a:ln/>
-        </p:spPr>
-        <p:txBody>
-          <a:bodyPr wrap="square" lIns="0" tIns="0" rIns="0" bIns="0" rtlCol="0" anchor="ctr"/>
-          <a:lstStyle/>
-          <a:p>
-            <a:pPr algn="ctr" indent="0" marL="0">
-              <a:buNone/>
-            </a:pPr>
-            <a:r>
-              <a:rPr lang="en-US" sz="900" b="1" dirty="0">
-                <a:solidFill>
-                  <a:srgbClr val="FFFFFF"/>
-                </a:solidFill>
-                <a:latin typeface="Arial" pitchFamily="34" charset="0"/>
-                <a:ea typeface="Arial" pitchFamily="34" charset="-122"/>
-                <a:cs typeface="Arial" pitchFamily="34" charset="-120"/>
-              </a:rPr>
-              <a:t>18</a:t>
+            <a:off x="5447033" y="2158815"/>
+            <a:ext cx="256032" cy="256032"/>
+          </a:xfrm>
+          <a:prstGeom prst="rect">
+            <a:avLst/>
+          </a:prstGeom>
+          <a:noFill/>
+          <a:ln/>
+        </p:spPr>
+        <p:txBody>
+          <a:bodyPr wrap="square" lIns="0" tIns="0" rIns="0" bIns="0" rtlCol="0" anchor="ctr"/>
+          <a:lstStyle/>
+          <a:p>
+            <a:pPr algn="ctr" indent="0" marL="0">
+              <a:buNone/>
+            </a:pPr>
+            <a:r>
+              <a:rPr lang="en-US" sz="900" b="1" dirty="0">
+                <a:solidFill>
+                  <a:srgbClr val="FFFFFF"/>
+                </a:solidFill>
+                <a:latin typeface="Arial" pitchFamily="34" charset="0"/>
+                <a:ea typeface="Arial" pitchFamily="34" charset="-122"/>
+                <a:cs typeface="Arial" pitchFamily="34" charset="-120"/>
+              </a:rPr>
+              <a:t>19</a:t>
             </a:r>
             <a:endParaRPr lang="en-US" sz="900" dirty="0"/>
           </a:p>
@@ -34687,7 +34687,7 @@
         </p:nvSpPr>
         <p:spPr>
           <a:xfrm>
-            <a:off x="5447033" y="2158815"/>
+            <a:off x="5446432" y="2165642"/>
             <a:ext cx="256032" cy="256032"/>
           </a:xfrm>
           <a:prstGeom prst="ellipse">
@@ -34712,7 +34712,7 @@
         </p:nvSpPr>
         <p:spPr>
           <a:xfrm>
-            <a:off x="5447033" y="2158815"/>
+            <a:off x="5446432" y="2165642"/>
             <a:ext cx="256032" cy="256032"/>
           </a:xfrm>
           <a:prstGeom prst="rect">
@@ -34751,7 +34751,7 @@
         </p:nvSpPr>
         <p:spPr>
           <a:xfrm>
-            <a:off x="5446432" y="2165642"/>
+            <a:off x="5446323" y="2164364"/>
             <a:ext cx="256032" cy="256032"/>
           </a:xfrm>
           <a:prstGeom prst="ellipse">
@@ -34776,7 +34776,7 @@
         </p:nvSpPr>
         <p:spPr>
           <a:xfrm>
-            <a:off x="5446432" y="2165642"/>
+            <a:off x="5446323" y="2164364"/>
             <a:ext cx="256032" cy="256032"/>
           </a:xfrm>
           <a:prstGeom prst="rect">
@@ -34815,7 +34815,7 @@
         </p:nvSpPr>
         <p:spPr>
           <a:xfrm>
-            <a:off x="5446323" y="2164364"/>
+            <a:off x="5446287" y="2180867"/>
             <a:ext cx="256032" cy="256032"/>
           </a:xfrm>
           <a:prstGeom prst="ellipse">
@@ -34840,7 +34840,7 @@
         </p:nvSpPr>
         <p:spPr>
           <a:xfrm>
-            <a:off x="5446323" y="2164364"/>
+            <a:off x="5446287" y="2180867"/>
             <a:ext cx="256032" cy="256032"/>
           </a:xfrm>
           <a:prstGeom prst="rect">
@@ -34879,7 +34879,7 @@
         </p:nvSpPr>
         <p:spPr>
           <a:xfrm>
-            <a:off x="5446287" y="2180867"/>
+            <a:off x="5448438" y="2186710"/>
             <a:ext cx="256032" cy="256032"/>
           </a:xfrm>
           <a:prstGeom prst="ellipse">
@@ -34904,7 +34904,7 @@
         </p:nvSpPr>
         <p:spPr>
           <a:xfrm>
-            <a:off x="5446287" y="2180867"/>
+            <a:off x="5448438" y="2186710"/>
             <a:ext cx="256032" cy="256032"/>
           </a:xfrm>
           <a:prstGeom prst="rect">
@@ -34943,7 +34943,7 @@
         </p:nvSpPr>
         <p:spPr>
           <a:xfrm>
-            <a:off x="5448438" y="2186710"/>
+            <a:off x="5446905" y="2160480"/>
             <a:ext cx="256032" cy="256032"/>
           </a:xfrm>
           <a:prstGeom prst="ellipse">
@@ -34968,32 +34968,32 @@
         </p:nvSpPr>
         <p:spPr>
           <a:xfrm>
-            <a:off x="5448438" y="2186710"/>
-            <a:ext cx="256032" cy="256032"/>
-          </a:xfrm>
-          <a:prstGeom prst="rect">
-            <a:avLst/>
-          </a:prstGeom>
-          <a:noFill/>
-          <a:ln/>
-        </p:spPr>
-        <p:txBody>
-          <a:bodyPr wrap="square" lIns="0" tIns="0" rIns="0" bIns="0" rtlCol="0" anchor="ctr"/>
-          <a:lstStyle/>
-          <a:p>
-            <a:pPr algn="ctr" indent="0" marL="0">
-              <a:buNone/>
-            </a:pPr>
-            <a:r>
-              <a:rPr lang="en-US" sz="900" b="1" dirty="0">
-                <a:solidFill>
-                  <a:srgbClr val="FFFFFF"/>
-                </a:solidFill>
-                <a:latin typeface="Arial" pitchFamily="34" charset="0"/>
-                <a:ea typeface="Arial" pitchFamily="34" charset="-122"/>
-                <a:cs typeface="Arial" pitchFamily="34" charset="-120"/>
-              </a:rPr>
-              <a:t>19</a:t>
+            <a:off x="5446905" y="2160480"/>
+            <a:ext cx="256032" cy="256032"/>
+          </a:xfrm>
+          <a:prstGeom prst="rect">
+            <a:avLst/>
+          </a:prstGeom>
+          <a:noFill/>
+          <a:ln/>
+        </p:spPr>
+        <p:txBody>
+          <a:bodyPr wrap="square" lIns="0" tIns="0" rIns="0" bIns="0" rtlCol="0" anchor="ctr"/>
+          <a:lstStyle/>
+          <a:p>
+            <a:pPr algn="ctr" indent="0" marL="0">
+              <a:buNone/>
+            </a:pPr>
+            <a:r>
+              <a:rPr lang="en-US" sz="900" b="1" dirty="0">
+                <a:solidFill>
+                  <a:srgbClr val="FFFFFF"/>
+                </a:solidFill>
+                <a:latin typeface="Arial" pitchFamily="34" charset="0"/>
+                <a:ea typeface="Arial" pitchFamily="34" charset="-122"/>
+                <a:cs typeface="Arial" pitchFamily="34" charset="-120"/>
+              </a:rPr>
+              <a:t>20</a:t>
             </a:r>
             <a:endParaRPr lang="en-US" sz="900" dirty="0"/>
           </a:p>
@@ -35007,7 +35007,7 @@
         </p:nvSpPr>
         <p:spPr>
           <a:xfrm>
-            <a:off x="5446905" y="2160480"/>
+            <a:off x="5446058" y="2171492"/>
             <a:ext cx="256032" cy="256032"/>
           </a:xfrm>
           <a:prstGeom prst="ellipse">
@@ -35032,7 +35032,7 @@
         </p:nvSpPr>
         <p:spPr>
           <a:xfrm>
-            <a:off x="5446905" y="2160480"/>
+            <a:off x="5446058" y="2171492"/>
             <a:ext cx="256032" cy="256032"/>
           </a:xfrm>
           <a:prstGeom prst="rect">
@@ -35071,7 +35071,7 @@
         </p:nvSpPr>
         <p:spPr>
           <a:xfrm>
-            <a:off x="5446058" y="2171492"/>
+            <a:off x="5444629" y="2188108"/>
             <a:ext cx="256032" cy="256032"/>
           </a:xfrm>
           <a:prstGeom prst="ellipse">
@@ -35096,7 +35096,7 @@
         </p:nvSpPr>
         <p:spPr>
           <a:xfrm>
-            <a:off x="5446058" y="2171492"/>
+            <a:off x="5444629" y="2188108"/>
             <a:ext cx="256032" cy="256032"/>
           </a:xfrm>
           <a:prstGeom prst="rect">
@@ -35135,7 +35135,7 @@
         </p:nvSpPr>
         <p:spPr>
           <a:xfrm>
-            <a:off x="5444629" y="2188108"/>
+            <a:off x="5446419" y="2179886"/>
             <a:ext cx="256032" cy="256032"/>
           </a:xfrm>
           <a:prstGeom prst="ellipse">
@@ -35160,7 +35160,7 @@
         </p:nvSpPr>
         <p:spPr>
           <a:xfrm>
-            <a:off x="5444629" y="2188108"/>
+            <a:off x="5446419" y="2179886"/>
             <a:ext cx="256032" cy="256032"/>
           </a:xfrm>
           <a:prstGeom prst="rect">
@@ -35199,7 +35199,7 @@
         </p:nvSpPr>
         <p:spPr>
           <a:xfrm>
-            <a:off x="5446419" y="2179886"/>
+            <a:off x="5448361" y="2183547"/>
             <a:ext cx="256032" cy="256032"/>
           </a:xfrm>
           <a:prstGeom prst="ellipse">
@@ -35224,7 +35224,7 @@
         </p:nvSpPr>
         <p:spPr>
           <a:xfrm>
-            <a:off x="5446419" y="2179886"/>
+            <a:off x="5448361" y="2183547"/>
             <a:ext cx="256032" cy="256032"/>
           </a:xfrm>
           <a:prstGeom prst="rect">
@@ -35263,7 +35263,7 @@
         </p:nvSpPr>
         <p:spPr>
           <a:xfrm>
-            <a:off x="5448361" y="2183547"/>
+            <a:off x="5446344" y="2165648"/>
             <a:ext cx="256032" cy="256032"/>
           </a:xfrm>
           <a:prstGeom prst="ellipse">
@@ -35288,7 +35288,7 @@
         </p:nvSpPr>
         <p:spPr>
           <a:xfrm>
-            <a:off x="5448361" y="2183547"/>
+            <a:off x="5446344" y="2165648"/>
             <a:ext cx="256032" cy="256032"/>
           </a:xfrm>
           <a:prstGeom prst="rect">
@@ -35327,7 +35327,7 @@
         </p:nvSpPr>
         <p:spPr>
           <a:xfrm>
-            <a:off x="5446344" y="2165648"/>
+            <a:off x="5445852" y="2170655"/>
             <a:ext cx="256032" cy="256032"/>
           </a:xfrm>
           <a:prstGeom prst="ellipse">
@@ -35352,7 +35352,7 @@
         </p:nvSpPr>
         <p:spPr>
           <a:xfrm>
-            <a:off x="5446344" y="2165648"/>
+            <a:off x="5445852" y="2170655"/>
             <a:ext cx="256032" cy="256032"/>
           </a:xfrm>
           <a:prstGeom prst="rect">
@@ -35391,7 +35391,7 @@
         </p:nvSpPr>
         <p:spPr>
           <a:xfrm>
-            <a:off x="5445852" y="2170655"/>
+            <a:off x="5446676" y="2178818"/>
             <a:ext cx="256032" cy="256032"/>
           </a:xfrm>
           <a:prstGeom prst="ellipse">
@@ -35416,7 +35416,7 @@
         </p:nvSpPr>
         <p:spPr>
           <a:xfrm>
-            <a:off x="5445852" y="2170655"/>
+            <a:off x="5446676" y="2178818"/>
             <a:ext cx="256032" cy="256032"/>
           </a:xfrm>
           <a:prstGeom prst="rect">
@@ -35455,7 +35455,7 @@
         </p:nvSpPr>
         <p:spPr>
           <a:xfrm>
-            <a:off x="5446676" y="2178818"/>
+            <a:off x="925707" y="5472286"/>
             <a:ext cx="256032" cy="256032"/>
           </a:xfrm>
           <a:prstGeom prst="ellipse">
@@ -35480,7 +35480,7 @@
         </p:nvSpPr>
         <p:spPr>
           <a:xfrm>
-            <a:off x="5446676" y="2178818"/>
+            <a:off x="925707" y="5472286"/>
             <a:ext cx="256032" cy="256032"/>
           </a:xfrm>
           <a:prstGeom prst="rect">
@@ -35519,7 +35519,7 @@
         </p:nvSpPr>
         <p:spPr>
           <a:xfrm>
-            <a:off x="925707" y="5472286"/>
+            <a:off x="5446757" y="2160205"/>
             <a:ext cx="256032" cy="256032"/>
           </a:xfrm>
           <a:prstGeom prst="ellipse">
@@ -35544,7 +35544,7 @@
         </p:nvSpPr>
         <p:spPr>
           <a:xfrm>
-            <a:off x="925707" y="5472286"/>
+            <a:off x="5446757" y="2160205"/>
             <a:ext cx="256032" cy="256032"/>
           </a:xfrm>
           <a:prstGeom prst="rect">
@@ -35583,7 +35583,7 @@
         </p:nvSpPr>
         <p:spPr>
           <a:xfrm>
-            <a:off x="5446757" y="2160205"/>
+            <a:off x="5448252" y="2177984"/>
             <a:ext cx="256032" cy="256032"/>
           </a:xfrm>
           <a:prstGeom prst="ellipse">
@@ -35608,7 +35608,7 @@
         </p:nvSpPr>
         <p:spPr>
           <a:xfrm>
-            <a:off x="5446757" y="2160205"/>
+            <a:off x="5448252" y="2177984"/>
             <a:ext cx="256032" cy="256032"/>
           </a:xfrm>
           <a:prstGeom prst="rect">
@@ -35647,7 +35647,7 @@
         </p:nvSpPr>
         <p:spPr>
           <a:xfrm>
-            <a:off x="5448252" y="2177984"/>
+            <a:off x="5444632" y="2177721"/>
             <a:ext cx="256032" cy="256032"/>
           </a:xfrm>
           <a:prstGeom prst="ellipse">
@@ -35672,7 +35672,7 @@
         </p:nvSpPr>
         <p:spPr>
           <a:xfrm>
-            <a:off x="5448252" y="2177984"/>
+            <a:off x="5444632" y="2177721"/>
             <a:ext cx="256032" cy="256032"/>
           </a:xfrm>
           <a:prstGeom prst="rect">
@@ -35711,7 +35711,7 @@
         </p:nvSpPr>
         <p:spPr>
           <a:xfrm>
-            <a:off x="5444632" y="2177721"/>
+            <a:off x="5446069" y="2162191"/>
             <a:ext cx="256032" cy="256032"/>
           </a:xfrm>
           <a:prstGeom prst="ellipse">
@@ -35736,7 +35736,7 @@
         </p:nvSpPr>
         <p:spPr>
           <a:xfrm>
-            <a:off x="5444632" y="2177721"/>
+            <a:off x="5446069" y="2162191"/>
             <a:ext cx="256032" cy="256032"/>
           </a:xfrm>
           <a:prstGeom prst="rect">
@@ -35775,7 +35775,7 @@
         </p:nvSpPr>
         <p:spPr>
           <a:xfrm>
-            <a:off x="5446069" y="2162191"/>
+            <a:off x="5448173" y="2178573"/>
             <a:ext cx="256032" cy="256032"/>
           </a:xfrm>
           <a:prstGeom prst="ellipse">
@@ -35800,7 +35800,7 @@
         </p:nvSpPr>
         <p:spPr>
           <a:xfrm>
-            <a:off x="5446069" y="2162191"/>
+            <a:off x="5448173" y="2178573"/>
             <a:ext cx="256032" cy="256032"/>
           </a:xfrm>
           <a:prstGeom prst="rect">
@@ -35839,7 +35839,7 @@
         </p:nvSpPr>
         <p:spPr>
           <a:xfrm>
-            <a:off x="5448173" y="2178573"/>
+            <a:off x="5445803" y="2170376"/>
             <a:ext cx="256032" cy="256032"/>
           </a:xfrm>
           <a:prstGeom prst="ellipse">
@@ -35864,7 +35864,7 @@
         </p:nvSpPr>
         <p:spPr>
           <a:xfrm>
-            <a:off x="5448173" y="2178573"/>
+            <a:off x="5445803" y="2170376"/>
             <a:ext cx="256032" cy="256032"/>
           </a:xfrm>
           <a:prstGeom prst="rect">
@@ -35903,7 +35903,7 @@
         </p:nvSpPr>
         <p:spPr>
           <a:xfrm>
-            <a:off x="5445803" y="2170376"/>
+            <a:off x="924838" y="5465685"/>
             <a:ext cx="256032" cy="256032"/>
           </a:xfrm>
           <a:prstGeom prst="ellipse">
@@ -35928,7 +35928,7 @@
         </p:nvSpPr>
         <p:spPr>
           <a:xfrm>
-            <a:off x="5445803" y="2170376"/>
+            <a:off x="924838" y="5465685"/>
             <a:ext cx="256032" cy="256032"/>
           </a:xfrm>
           <a:prstGeom prst="rect">
@@ -35967,7 +35967,7 @@
         </p:nvSpPr>
         <p:spPr>
           <a:xfrm>
-            <a:off x="924838" y="5465685"/>
+            <a:off x="926278" y="5472163"/>
             <a:ext cx="256032" cy="256032"/>
           </a:xfrm>
           <a:prstGeom prst="ellipse">
@@ -35992,7 +35992,7 @@
         </p:nvSpPr>
         <p:spPr>
           <a:xfrm>
-            <a:off x="924838" y="5465685"/>
+            <a:off x="926278" y="5472163"/>
             <a:ext cx="256032" cy="256032"/>
           </a:xfrm>
           <a:prstGeom prst="rect">
@@ -36031,7 +36031,7 @@
         </p:nvSpPr>
         <p:spPr>
           <a:xfrm>
-            <a:off x="926278" y="5472163"/>
+            <a:off x="924903" y="5474316"/>
             <a:ext cx="256032" cy="256032"/>
           </a:xfrm>
           <a:prstGeom prst="ellipse">
@@ -36056,7 +36056,7 @@
         </p:nvSpPr>
         <p:spPr>
           <a:xfrm>
-            <a:off x="926278" y="5472163"/>
+            <a:off x="924903" y="5474316"/>
             <a:ext cx="256032" cy="256032"/>
           </a:xfrm>
           <a:prstGeom prst="rect">
@@ -36095,7 +36095,7 @@
         </p:nvSpPr>
         <p:spPr>
           <a:xfrm>
-            <a:off x="924903" y="5474316"/>
+            <a:off x="925680" y="5474041"/>
             <a:ext cx="256032" cy="256032"/>
           </a:xfrm>
           <a:prstGeom prst="ellipse">
@@ -36120,7 +36120,7 @@
         </p:nvSpPr>
         <p:spPr>
           <a:xfrm>
-            <a:off x="924903" y="5474316"/>
+            <a:off x="925680" y="5474041"/>
             <a:ext cx="256032" cy="256032"/>
           </a:xfrm>
           <a:prstGeom prst="rect">
@@ -36159,7 +36159,7 @@
         </p:nvSpPr>
         <p:spPr>
           <a:xfrm>
-            <a:off x="925680" y="5474041"/>
+            <a:off x="5447683" y="2192096"/>
             <a:ext cx="256032" cy="256032"/>
           </a:xfrm>
           <a:prstGeom prst="ellipse">
@@ -36184,32 +36184,32 @@
         </p:nvSpPr>
         <p:spPr>
           <a:xfrm>
-            <a:off x="925680" y="5474041"/>
-            <a:ext cx="256032" cy="256032"/>
-          </a:xfrm>
-          <a:prstGeom prst="rect">
-            <a:avLst/>
-          </a:prstGeom>
-          <a:noFill/>
-          <a:ln/>
-        </p:spPr>
-        <p:txBody>
-          <a:bodyPr wrap="square" lIns="0" tIns="0" rIns="0" bIns="0" rtlCol="0" anchor="ctr"/>
-          <a:lstStyle/>
-          <a:p>
-            <a:pPr algn="ctr" indent="0" marL="0">
-              <a:buNone/>
-            </a:pPr>
-            <a:r>
-              <a:rPr lang="en-US" sz="900" b="1" dirty="0">
-                <a:solidFill>
-                  <a:srgbClr val="FFFFFF"/>
-                </a:solidFill>
-                <a:latin typeface="Arial" pitchFamily="34" charset="0"/>
-                <a:ea typeface="Arial" pitchFamily="34" charset="-122"/>
-                <a:cs typeface="Arial" pitchFamily="34" charset="-120"/>
-              </a:rPr>
-              <a:t>20</a:t>
+            <a:off x="5447683" y="2192096"/>
+            <a:ext cx="256032" cy="256032"/>
+          </a:xfrm>
+          <a:prstGeom prst="rect">
+            <a:avLst/>
+          </a:prstGeom>
+          <a:noFill/>
+          <a:ln/>
+        </p:spPr>
+        <p:txBody>
+          <a:bodyPr wrap="square" lIns="0" tIns="0" rIns="0" bIns="0" rtlCol="0" anchor="ctr"/>
+          <a:lstStyle/>
+          <a:p>
+            <a:pPr algn="ctr" indent="0" marL="0">
+              <a:buNone/>
+            </a:pPr>
+            <a:r>
+              <a:rPr lang="en-US" sz="900" b="1" dirty="0">
+                <a:solidFill>
+                  <a:srgbClr val="FFFFFF"/>
+                </a:solidFill>
+                <a:latin typeface="Arial" pitchFamily="34" charset="0"/>
+                <a:ea typeface="Arial" pitchFamily="34" charset="-122"/>
+                <a:cs typeface="Arial" pitchFamily="34" charset="-120"/>
+              </a:rPr>
+              <a:t>21</a:t>
             </a:r>
             <a:endParaRPr lang="en-US" sz="900" dirty="0"/>
           </a:p>
@@ -36223,7 +36223,7 @@
         </p:nvSpPr>
         <p:spPr>
           <a:xfrm>
-            <a:off x="5447683" y="2192096"/>
+            <a:off x="5447875" y="2180734"/>
             <a:ext cx="256032" cy="256032"/>
           </a:xfrm>
           <a:prstGeom prst="ellipse">
@@ -36248,7 +36248,7 @@
         </p:nvSpPr>
         <p:spPr>
           <a:xfrm>
-            <a:off x="5447683" y="2192096"/>
+            <a:off x="5447875" y="2180734"/>
             <a:ext cx="256032" cy="256032"/>
           </a:xfrm>
           <a:prstGeom prst="rect">
@@ -36287,7 +36287,7 @@
         </p:nvSpPr>
         <p:spPr>
           <a:xfrm>
-            <a:off x="5447875" y="2180734"/>
+            <a:off x="5447029" y="2187669"/>
             <a:ext cx="256032" cy="256032"/>
           </a:xfrm>
           <a:prstGeom prst="ellipse">
@@ -36312,7 +36312,7 @@
         </p:nvSpPr>
         <p:spPr>
           <a:xfrm>
-            <a:off x="5447875" y="2180734"/>
+            <a:off x="5447029" y="2187669"/>
             <a:ext cx="256032" cy="256032"/>
           </a:xfrm>
           <a:prstGeom prst="rect">
@@ -36351,7 +36351,7 @@
         </p:nvSpPr>
         <p:spPr>
           <a:xfrm>
-            <a:off x="5447029" y="2187669"/>
+            <a:off x="5447638" y="2177673"/>
             <a:ext cx="256032" cy="256032"/>
           </a:xfrm>
           <a:prstGeom prst="ellipse">
@@ -36376,7 +36376,7 @@
         </p:nvSpPr>
         <p:spPr>
           <a:xfrm>
-            <a:off x="5447029" y="2187669"/>
+            <a:off x="5447638" y="2177673"/>
             <a:ext cx="256032" cy="256032"/>
           </a:xfrm>
           <a:prstGeom prst="rect">
@@ -36415,7 +36415,7 @@
         </p:nvSpPr>
         <p:spPr>
           <a:xfrm>
-            <a:off x="5447638" y="2177673"/>
+            <a:off x="5446003" y="2167306"/>
             <a:ext cx="256032" cy="256032"/>
           </a:xfrm>
           <a:prstGeom prst="ellipse">
@@ -36440,7 +36440,7 @@
         </p:nvSpPr>
         <p:spPr>
           <a:xfrm>
-            <a:off x="5447638" y="2177673"/>
+            <a:off x="5446003" y="2167306"/>
             <a:ext cx="256032" cy="256032"/>
           </a:xfrm>
           <a:prstGeom prst="rect">
@@ -36479,7 +36479,7 @@
         </p:nvSpPr>
         <p:spPr>
           <a:xfrm>
-            <a:off x="5446003" y="2167306"/>
+            <a:off x="5447808" y="2179991"/>
             <a:ext cx="256032" cy="256032"/>
           </a:xfrm>
           <a:prstGeom prst="ellipse">
@@ -36504,7 +36504,7 @@
         </p:nvSpPr>
         <p:spPr>
           <a:xfrm>
-            <a:off x="5446003" y="2167306"/>
+            <a:off x="5447808" y="2179991"/>
             <a:ext cx="256032" cy="256032"/>
           </a:xfrm>
           <a:prstGeom prst="rect">
@@ -36543,7 +36543,7 @@
         </p:nvSpPr>
         <p:spPr>
           <a:xfrm>
-            <a:off x="5447808" y="2179991"/>
+            <a:off x="5448238" y="2179108"/>
             <a:ext cx="256032" cy="256032"/>
           </a:xfrm>
           <a:prstGeom prst="ellipse">
@@ -36568,32 +36568,32 @@
         </p:nvSpPr>
         <p:spPr>
           <a:xfrm>
-            <a:off x="5447808" y="2179991"/>
-            <a:ext cx="256032" cy="256032"/>
-          </a:xfrm>
-          <a:prstGeom prst="rect">
-            <a:avLst/>
-          </a:prstGeom>
-          <a:noFill/>
-          <a:ln/>
-        </p:spPr>
-        <p:txBody>
-          <a:bodyPr wrap="square" lIns="0" tIns="0" rIns="0" bIns="0" rtlCol="0" anchor="ctr"/>
-          <a:lstStyle/>
-          <a:p>
-            <a:pPr algn="ctr" indent="0" marL="0">
-              <a:buNone/>
-            </a:pPr>
-            <a:r>
-              <a:rPr lang="en-US" sz="900" b="1" dirty="0">
-                <a:solidFill>
-                  <a:srgbClr val="FFFFFF"/>
-                </a:solidFill>
-                <a:latin typeface="Arial" pitchFamily="34" charset="0"/>
-                <a:ea typeface="Arial" pitchFamily="34" charset="-122"/>
-                <a:cs typeface="Arial" pitchFamily="34" charset="-120"/>
-              </a:rPr>
-              <a:t>21</a:t>
+            <a:off x="5448238" y="2179108"/>
+            <a:ext cx="256032" cy="256032"/>
+          </a:xfrm>
+          <a:prstGeom prst="rect">
+            <a:avLst/>
+          </a:prstGeom>
+          <a:noFill/>
+          <a:ln/>
+        </p:spPr>
+        <p:txBody>
+          <a:bodyPr wrap="square" lIns="0" tIns="0" rIns="0" bIns="0" rtlCol="0" anchor="ctr"/>
+          <a:lstStyle/>
+          <a:p>
+            <a:pPr algn="ctr" indent="0" marL="0">
+              <a:buNone/>
+            </a:pPr>
+            <a:r>
+              <a:rPr lang="en-US" sz="900" b="1" dirty="0">
+                <a:solidFill>
+                  <a:srgbClr val="FFFFFF"/>
+                </a:solidFill>
+                <a:latin typeface="Arial" pitchFamily="34" charset="0"/>
+                <a:ea typeface="Arial" pitchFamily="34" charset="-122"/>
+                <a:cs typeface="Arial" pitchFamily="34" charset="-120"/>
+              </a:rPr>
+              <a:t>22</a:t>
             </a:r>
             <a:endParaRPr lang="en-US" sz="900" dirty="0"/>
           </a:p>
@@ -36607,7 +36607,7 @@
         </p:nvSpPr>
         <p:spPr>
           <a:xfrm>
-            <a:off x="5448238" y="2179108"/>
+            <a:off x="5447847" y="2180754"/>
             <a:ext cx="256032" cy="256032"/>
           </a:xfrm>
           <a:prstGeom prst="ellipse">
@@ -36632,7 +36632,7 @@
         </p:nvSpPr>
         <p:spPr>
           <a:xfrm>
-            <a:off x="5448238" y="2179108"/>
+            <a:off x="5447847" y="2180754"/>
             <a:ext cx="256032" cy="256032"/>
           </a:xfrm>
           <a:prstGeom prst="rect">
@@ -36671,7 +36671,7 @@
         </p:nvSpPr>
         <p:spPr>
           <a:xfrm>
-            <a:off x="5447847" y="2180754"/>
+            <a:off x="5445895" y="2183441"/>
             <a:ext cx="256032" cy="256032"/>
           </a:xfrm>
           <a:prstGeom prst="ellipse">
@@ -36696,32 +36696,32 @@
         </p:nvSpPr>
         <p:spPr>
           <a:xfrm>
-            <a:off x="5447847" y="2180754"/>
-            <a:ext cx="256032" cy="256032"/>
-          </a:xfrm>
-          <a:prstGeom prst="rect">
-            <a:avLst/>
-          </a:prstGeom>
-          <a:noFill/>
-          <a:ln/>
-        </p:spPr>
-        <p:txBody>
-          <a:bodyPr wrap="square" lIns="0" tIns="0" rIns="0" bIns="0" rtlCol="0" anchor="ctr"/>
-          <a:lstStyle/>
-          <a:p>
-            <a:pPr algn="ctr" indent="0" marL="0">
-              <a:buNone/>
-            </a:pPr>
-            <a:r>
-              <a:rPr lang="en-US" sz="900" b="1" dirty="0">
-                <a:solidFill>
-                  <a:srgbClr val="FFFFFF"/>
-                </a:solidFill>
-                <a:latin typeface="Arial" pitchFamily="34" charset="0"/>
-                <a:ea typeface="Arial" pitchFamily="34" charset="-122"/>
-                <a:cs typeface="Arial" pitchFamily="34" charset="-120"/>
-              </a:rPr>
-              <a:t>22</a:t>
+            <a:off x="5445895" y="2183441"/>
+            <a:ext cx="256032" cy="256032"/>
+          </a:xfrm>
+          <a:prstGeom prst="rect">
+            <a:avLst/>
+          </a:prstGeom>
+          <a:noFill/>
+          <a:ln/>
+        </p:spPr>
+        <p:txBody>
+          <a:bodyPr wrap="square" lIns="0" tIns="0" rIns="0" bIns="0" rtlCol="0" anchor="ctr"/>
+          <a:lstStyle/>
+          <a:p>
+            <a:pPr algn="ctr" indent="0" marL="0">
+              <a:buNone/>
+            </a:pPr>
+            <a:r>
+              <a:rPr lang="en-US" sz="900" b="1" dirty="0">
+                <a:solidFill>
+                  <a:srgbClr val="FFFFFF"/>
+                </a:solidFill>
+                <a:latin typeface="Arial" pitchFamily="34" charset="0"/>
+                <a:ea typeface="Arial" pitchFamily="34" charset="-122"/>
+                <a:cs typeface="Arial" pitchFamily="34" charset="-120"/>
+              </a:rPr>
+              <a:t>23</a:t>
             </a:r>
             <a:endParaRPr lang="en-US" sz="900" dirty="0"/>
           </a:p>
@@ -36735,7 +36735,7 @@
         </p:nvSpPr>
         <p:spPr>
           <a:xfrm>
-            <a:off x="5445895" y="2183441"/>
+            <a:off x="5446875" y="2184840"/>
             <a:ext cx="256032" cy="256032"/>
           </a:xfrm>
           <a:prstGeom prst="ellipse">
@@ -36760,7 +36760,7 @@
         </p:nvSpPr>
         <p:spPr>
           <a:xfrm>
-            <a:off x="5445895" y="2183441"/>
+            <a:off x="5446875" y="2184840"/>
             <a:ext cx="256032" cy="256032"/>
           </a:xfrm>
           <a:prstGeom prst="rect">
@@ -36799,7 +36799,7 @@
         </p:nvSpPr>
         <p:spPr>
           <a:xfrm>
-            <a:off x="5446875" y="2184840"/>
+            <a:off x="5447630" y="2177506"/>
             <a:ext cx="256032" cy="256032"/>
           </a:xfrm>
           <a:prstGeom prst="ellipse">
@@ -36824,7 +36824,7 @@
         </p:nvSpPr>
         <p:spPr>
           <a:xfrm>
-            <a:off x="5446875" y="2184840"/>
+            <a:off x="5447630" y="2177506"/>
             <a:ext cx="256032" cy="256032"/>
           </a:xfrm>
           <a:prstGeom prst="rect">
@@ -36863,7 +36863,7 @@
         </p:nvSpPr>
         <p:spPr>
           <a:xfrm>
-            <a:off x="5447630" y="2177506"/>
+            <a:off x="5446897" y="2185326"/>
             <a:ext cx="256032" cy="256032"/>
           </a:xfrm>
           <a:prstGeom prst="ellipse">
@@ -36888,7 +36888,7 @@
         </p:nvSpPr>
         <p:spPr>
           <a:xfrm>
-            <a:off x="5447630" y="2177506"/>
+            <a:off x="5446897" y="2185326"/>
             <a:ext cx="256032" cy="256032"/>
           </a:xfrm>
           <a:prstGeom prst="rect">
@@ -36927,7 +36927,7 @@
         </p:nvSpPr>
         <p:spPr>
           <a:xfrm>
-            <a:off x="5446897" y="2185326"/>
+            <a:off x="5447312" y="2189328"/>
             <a:ext cx="256032" cy="256032"/>
           </a:xfrm>
           <a:prstGeom prst="ellipse">
@@ -36952,32 +36952,32 @@
         </p:nvSpPr>
         <p:spPr>
           <a:xfrm>
-            <a:off x="5446897" y="2185326"/>
-            <a:ext cx="256032" cy="256032"/>
-          </a:xfrm>
-          <a:prstGeom prst="rect">
-            <a:avLst/>
-          </a:prstGeom>
-          <a:noFill/>
-          <a:ln/>
-        </p:spPr>
-        <p:txBody>
-          <a:bodyPr wrap="square" lIns="0" tIns="0" rIns="0" bIns="0" rtlCol="0" anchor="ctr"/>
-          <a:lstStyle/>
-          <a:p>
-            <a:pPr algn="ctr" indent="0" marL="0">
-              <a:buNone/>
-            </a:pPr>
-            <a:r>
-              <a:rPr lang="en-US" sz="900" b="1" dirty="0">
-                <a:solidFill>
-                  <a:srgbClr val="FFFFFF"/>
-                </a:solidFill>
-                <a:latin typeface="Arial" pitchFamily="34" charset="0"/>
-                <a:ea typeface="Arial" pitchFamily="34" charset="-122"/>
-                <a:cs typeface="Arial" pitchFamily="34" charset="-120"/>
-              </a:rPr>
-              <a:t>23</a:t>
+            <a:off x="5447312" y="2189328"/>
+            <a:ext cx="256032" cy="256032"/>
+          </a:xfrm>
+          <a:prstGeom prst="rect">
+            <a:avLst/>
+          </a:prstGeom>
+          <a:noFill/>
+          <a:ln/>
+        </p:spPr>
+        <p:txBody>
+          <a:bodyPr wrap="square" lIns="0" tIns="0" rIns="0" bIns="0" rtlCol="0" anchor="ctr"/>
+          <a:lstStyle/>
+          <a:p>
+            <a:pPr algn="ctr" indent="0" marL="0">
+              <a:buNone/>
+            </a:pPr>
+            <a:r>
+              <a:rPr lang="en-US" sz="900" b="1" dirty="0">
+                <a:solidFill>
+                  <a:srgbClr val="FFFFFF"/>
+                </a:solidFill>
+                <a:latin typeface="Arial" pitchFamily="34" charset="0"/>
+                <a:ea typeface="Arial" pitchFamily="34" charset="-122"/>
+                <a:cs typeface="Arial" pitchFamily="34" charset="-120"/>
+              </a:rPr>
+              <a:t>24</a:t>
             </a:r>
             <a:endParaRPr lang="en-US" sz="900" dirty="0"/>
           </a:p>
@@ -36991,7 +36991,7 @@
         </p:nvSpPr>
         <p:spPr>
           <a:xfrm>
-            <a:off x="5447312" y="2189328"/>
+            <a:off x="5446989" y="2185628"/>
             <a:ext cx="256032" cy="256032"/>
           </a:xfrm>
           <a:prstGeom prst="ellipse">
@@ -37016,7 +37016,7 @@
         </p:nvSpPr>
         <p:spPr>
           <a:xfrm>
-            <a:off x="5447312" y="2189328"/>
+            <a:off x="5446989" y="2185628"/>
             <a:ext cx="256032" cy="256032"/>
           </a:xfrm>
           <a:prstGeom prst="rect">
@@ -37055,7 +37055,7 @@
         </p:nvSpPr>
         <p:spPr>
           <a:xfrm>
-            <a:off x="5446989" y="2185628"/>
+            <a:off x="5445939" y="2183485"/>
             <a:ext cx="256032" cy="256032"/>
           </a:xfrm>
           <a:prstGeom prst="ellipse">
@@ -37080,7 +37080,7 @@
         </p:nvSpPr>
         <p:spPr>
           <a:xfrm>
-            <a:off x="5446989" y="2185628"/>
+            <a:off x="5445939" y="2183485"/>
             <a:ext cx="256032" cy="256032"/>
           </a:xfrm>
           <a:prstGeom prst="rect">
@@ -37119,7 +37119,7 @@
         </p:nvSpPr>
         <p:spPr>
           <a:xfrm>
-            <a:off x="5445939" y="2183485"/>
+            <a:off x="5448042" y="2169179"/>
             <a:ext cx="256032" cy="256032"/>
           </a:xfrm>
           <a:prstGeom prst="ellipse">
@@ -37144,7 +37144,7 @@
         </p:nvSpPr>
         <p:spPr>
           <a:xfrm>
-            <a:off x="5445939" y="2183485"/>
+            <a:off x="5448042" y="2169179"/>
             <a:ext cx="256032" cy="256032"/>
           </a:xfrm>
           <a:prstGeom prst="rect">
@@ -37183,7 +37183,7 @@
         </p:nvSpPr>
         <p:spPr>
           <a:xfrm>
-            <a:off x="5448042" y="2169179"/>
+            <a:off x="5446375" y="2185243"/>
             <a:ext cx="256032" cy="256032"/>
           </a:xfrm>
           <a:prstGeom prst="ellipse">
@@ -37208,7 +37208,7 @@
         </p:nvSpPr>
         <p:spPr>
           <a:xfrm>
-            <a:off x="5448042" y="2169179"/>
+            <a:off x="5446375" y="2185243"/>
             <a:ext cx="256032" cy="256032"/>
           </a:xfrm>
           <a:prstGeom prst="rect">
@@ -37247,7 +37247,7 @@
         </p:nvSpPr>
         <p:spPr>
           <a:xfrm>
-            <a:off x="5446375" y="2185243"/>
+            <a:off x="5446959" y="2185547"/>
             <a:ext cx="256032" cy="256032"/>
           </a:xfrm>
           <a:prstGeom prst="ellipse">
@@ -37272,7 +37272,7 @@
         </p:nvSpPr>
         <p:spPr>
           <a:xfrm>
-            <a:off x="5446375" y="2185243"/>
+            <a:off x="5446959" y="2185547"/>
             <a:ext cx="256032" cy="256032"/>
           </a:xfrm>
           <a:prstGeom prst="rect">
@@ -37306,70 +37306,6 @@
       <p:sp>
         <p:nvSpPr>
           <p:cNvPr id="901" name="Shape 899"/>
-          <p:cNvSpPr/>
-          <p:nvPr/>
-        </p:nvSpPr>
-        <p:spPr>
-          <a:xfrm>
-            <a:off x="5446959" y="2185547"/>
-            <a:ext cx="256032" cy="256032"/>
-          </a:xfrm>
-          <a:prstGeom prst="ellipse">
-            <a:avLst/>
-          </a:prstGeom>
-          <a:solidFill>
-            <a:srgbClr val="888888"/>
-          </a:solidFill>
-          <a:ln w="15240">
-            <a:solidFill>
-              <a:srgbClr val="FFFFFF"/>
-            </a:solidFill>
-            <a:prstDash val="solid"/>
-          </a:ln>
-        </p:spPr>
-      </p:sp>
-      <p:sp>
-        <p:nvSpPr>
-          <p:cNvPr id="902" name="Text 900"/>
-          <p:cNvSpPr/>
-          <p:nvPr/>
-        </p:nvSpPr>
-        <p:spPr>
-          <a:xfrm>
-            <a:off x="5446959" y="2185547"/>
-            <a:ext cx="256032" cy="256032"/>
-          </a:xfrm>
-          <a:prstGeom prst="rect">
-            <a:avLst/>
-          </a:prstGeom>
-          <a:noFill/>
-          <a:ln/>
-        </p:spPr>
-        <p:txBody>
-          <a:bodyPr wrap="square" lIns="0" tIns="0" rIns="0" bIns="0" rtlCol="0" anchor="ctr"/>
-          <a:lstStyle/>
-          <a:p>
-            <a:pPr algn="ctr" indent="0" marL="0">
-              <a:buNone/>
-            </a:pPr>
-            <a:r>
-              <a:rPr lang="en-US" sz="900" b="1" dirty="0">
-                <a:solidFill>
-                  <a:srgbClr val="FFFFFF"/>
-                </a:solidFill>
-                <a:latin typeface="Arial" pitchFamily="34" charset="0"/>
-                <a:ea typeface="Arial" pitchFamily="34" charset="-122"/>
-                <a:cs typeface="Arial" pitchFamily="34" charset="-120"/>
-              </a:rPr>
-              <a:t>24</a:t>
-            </a:r>
-            <a:endParaRPr lang="en-US" sz="900" dirty="0"/>
-          </a:p>
-        </p:txBody>
-      </p:sp>
-      <p:sp>
-        <p:nvSpPr>
-          <p:cNvPr id="903" name="Shape 901"/>
           <p:cNvSpPr/>
           <p:nvPr/>
         </p:nvSpPr>
@@ -37394,7 +37330,7 @@
       </p:sp>
       <p:sp>
         <p:nvSpPr>
-          <p:cNvPr id="904" name="Text 902"/>
+          <p:cNvPr id="902" name="Text 900"/>
           <p:cNvSpPr/>
           <p:nvPr/>
         </p:nvSpPr>
@@ -37433,7 +37369,7 @@
       </p:sp>
       <p:sp>
         <p:nvSpPr>
-          <p:cNvPr id="905" name="Shape 903"/>
+          <p:cNvPr id="903" name="Shape 901"/>
           <p:cNvSpPr/>
           <p:nvPr/>
         </p:nvSpPr>
@@ -37458,7 +37394,7 @@
       </p:sp>
       <p:sp>
         <p:nvSpPr>
-          <p:cNvPr id="906" name="Text 904"/>
+          <p:cNvPr id="904" name="Text 902"/>
           <p:cNvSpPr/>
           <p:nvPr/>
         </p:nvSpPr>
@@ -37497,7 +37433,7 @@
       </p:sp>
       <p:sp>
         <p:nvSpPr>
-          <p:cNvPr id="907" name="Shape 905"/>
+          <p:cNvPr id="905" name="Shape 903"/>
           <p:cNvSpPr/>
           <p:nvPr/>
         </p:nvSpPr>
@@ -37522,7 +37458,7 @@
       </p:sp>
       <p:sp>
         <p:nvSpPr>
-          <p:cNvPr id="908" name="Text 906"/>
+          <p:cNvPr id="906" name="Text 904"/>
           <p:cNvSpPr/>
           <p:nvPr/>
         </p:nvSpPr>
@@ -37561,7 +37497,7 @@
       </p:sp>
       <p:sp>
         <p:nvSpPr>
-          <p:cNvPr id="909" name="Shape 907"/>
+          <p:cNvPr id="907" name="Shape 905"/>
           <p:cNvSpPr/>
           <p:nvPr/>
         </p:nvSpPr>
@@ -37586,7 +37522,7 @@
       </p:sp>
       <p:sp>
         <p:nvSpPr>
-          <p:cNvPr id="910" name="Text 908"/>
+          <p:cNvPr id="908" name="Text 906"/>
           <p:cNvSpPr/>
           <p:nvPr/>
         </p:nvSpPr>
@@ -37625,7 +37561,7 @@
       </p:sp>
       <p:sp>
         <p:nvSpPr>
-          <p:cNvPr id="911" name="Shape 909"/>
+          <p:cNvPr id="909" name="Shape 907"/>
           <p:cNvSpPr/>
           <p:nvPr/>
         </p:nvSpPr>
@@ -37650,7 +37586,7 @@
       </p:sp>
       <p:sp>
         <p:nvSpPr>
-          <p:cNvPr id="912" name="Text 910"/>
+          <p:cNvPr id="910" name="Text 908"/>
           <p:cNvSpPr/>
           <p:nvPr/>
         </p:nvSpPr>
@@ -37689,7 +37625,7 @@
       </p:sp>
       <p:sp>
         <p:nvSpPr>
-          <p:cNvPr id="913" name="Shape 911"/>
+          <p:cNvPr id="911" name="Shape 909"/>
           <p:cNvSpPr/>
           <p:nvPr/>
         </p:nvSpPr>
@@ -37714,7 +37650,7 @@
       </p:sp>
       <p:sp>
         <p:nvSpPr>
-          <p:cNvPr id="914" name="Text 912"/>
+          <p:cNvPr id="912" name="Text 910"/>
           <p:cNvSpPr/>
           <p:nvPr/>
         </p:nvSpPr>
@@ -37753,7 +37689,7 @@
       </p:sp>
       <p:sp>
         <p:nvSpPr>
-          <p:cNvPr id="915" name="Shape 913"/>
+          <p:cNvPr id="913" name="Shape 911"/>
           <p:cNvSpPr/>
           <p:nvPr/>
         </p:nvSpPr>
@@ -37778,7 +37714,7 @@
       </p:sp>
       <p:sp>
         <p:nvSpPr>
-          <p:cNvPr id="916" name="Text 914"/>
+          <p:cNvPr id="914" name="Text 912"/>
           <p:cNvSpPr/>
           <p:nvPr/>
         </p:nvSpPr>
@@ -37817,7 +37753,7 @@
       </p:sp>
       <p:sp>
         <p:nvSpPr>
-          <p:cNvPr id="917" name="Shape 915"/>
+          <p:cNvPr id="915" name="Shape 913"/>
           <p:cNvSpPr/>
           <p:nvPr/>
         </p:nvSpPr>
@@ -37842,7 +37778,7 @@
       </p:sp>
       <p:sp>
         <p:nvSpPr>
-          <p:cNvPr id="918" name="Text 916"/>
+          <p:cNvPr id="916" name="Text 914"/>
           <p:cNvSpPr/>
           <p:nvPr/>
         </p:nvSpPr>
@@ -37881,7 +37817,7 @@
       </p:sp>
       <p:sp>
         <p:nvSpPr>
-          <p:cNvPr id="919" name="Shape 917"/>
+          <p:cNvPr id="917" name="Shape 915"/>
           <p:cNvSpPr/>
           <p:nvPr/>
         </p:nvSpPr>
@@ -37906,7 +37842,7 @@
       </p:sp>
       <p:sp>
         <p:nvSpPr>
-          <p:cNvPr id="920" name="Text 918"/>
+          <p:cNvPr id="918" name="Text 916"/>
           <p:cNvSpPr/>
           <p:nvPr/>
         </p:nvSpPr>
@@ -37945,7 +37881,7 @@
       </p:sp>
       <p:sp>
         <p:nvSpPr>
-          <p:cNvPr id="921" name="Shape 919"/>
+          <p:cNvPr id="919" name="Shape 917"/>
           <p:cNvSpPr/>
           <p:nvPr/>
         </p:nvSpPr>
@@ -37970,7 +37906,7 @@
       </p:sp>
       <p:sp>
         <p:nvSpPr>
-          <p:cNvPr id="922" name="Text 920"/>
+          <p:cNvPr id="920" name="Text 918"/>
           <p:cNvSpPr/>
           <p:nvPr/>
         </p:nvSpPr>
@@ -38009,7 +37945,7 @@
       </p:sp>
       <p:sp>
         <p:nvSpPr>
-          <p:cNvPr id="923" name="Shape 921"/>
+          <p:cNvPr id="921" name="Shape 919"/>
           <p:cNvSpPr/>
           <p:nvPr/>
         </p:nvSpPr>
@@ -38034,7 +37970,7 @@
       </p:sp>
       <p:sp>
         <p:nvSpPr>
-          <p:cNvPr id="924" name="Text 922"/>
+          <p:cNvPr id="922" name="Text 920"/>
           <p:cNvSpPr/>
           <p:nvPr/>
         </p:nvSpPr>
@@ -38073,7 +38009,7 @@
       </p:sp>
       <p:sp>
         <p:nvSpPr>
-          <p:cNvPr id="925" name="Shape 923"/>
+          <p:cNvPr id="923" name="Shape 921"/>
           <p:cNvSpPr/>
           <p:nvPr/>
         </p:nvSpPr>
@@ -38098,7 +38034,7 @@
       </p:sp>
       <p:sp>
         <p:nvSpPr>
-          <p:cNvPr id="926" name="Text 924"/>
+          <p:cNvPr id="924" name="Text 922"/>
           <p:cNvSpPr/>
           <p:nvPr/>
         </p:nvSpPr>
@@ -38137,7 +38073,7 @@
       </p:sp>
       <p:sp>
         <p:nvSpPr>
-          <p:cNvPr id="927" name="Shape 925"/>
+          <p:cNvPr id="925" name="Shape 923"/>
           <p:cNvSpPr/>
           <p:nvPr/>
         </p:nvSpPr>
@@ -38162,7 +38098,7 @@
       </p:sp>
       <p:sp>
         <p:nvSpPr>
-          <p:cNvPr id="928" name="Text 926"/>
+          <p:cNvPr id="926" name="Text 924"/>
           <p:cNvSpPr/>
           <p:nvPr/>
         </p:nvSpPr>
@@ -38201,7 +38137,7 @@
       </p:sp>
       <p:sp>
         <p:nvSpPr>
-          <p:cNvPr id="929" name="Shape 927"/>
+          <p:cNvPr id="927" name="Shape 925"/>
           <p:cNvSpPr/>
           <p:nvPr/>
         </p:nvSpPr>
@@ -38226,7 +38162,7 @@
       </p:sp>
       <p:sp>
         <p:nvSpPr>
-          <p:cNvPr id="930" name="Text 928"/>
+          <p:cNvPr id="928" name="Text 926"/>
           <p:cNvSpPr/>
           <p:nvPr/>
         </p:nvSpPr>
@@ -38265,7 +38201,7 @@
       </p:sp>
       <p:sp>
         <p:nvSpPr>
-          <p:cNvPr id="931" name="Shape 929"/>
+          <p:cNvPr id="929" name="Shape 927"/>
           <p:cNvSpPr/>
           <p:nvPr/>
         </p:nvSpPr>
@@ -38290,7 +38226,7 @@
       </p:sp>
       <p:sp>
         <p:nvSpPr>
-          <p:cNvPr id="932" name="Text 930"/>
+          <p:cNvPr id="930" name="Text 928"/>
           <p:cNvSpPr/>
           <p:nvPr/>
         </p:nvSpPr>
@@ -38329,7 +38265,7 @@
       </p:sp>
       <p:sp>
         <p:nvSpPr>
-          <p:cNvPr id="933" name="Shape 931"/>
+          <p:cNvPr id="931" name="Shape 929"/>
           <p:cNvSpPr/>
           <p:nvPr/>
         </p:nvSpPr>
@@ -38354,7 +38290,7 @@
       </p:sp>
       <p:sp>
         <p:nvSpPr>
-          <p:cNvPr id="934" name="Text 932"/>
+          <p:cNvPr id="932" name="Text 930"/>
           <p:cNvSpPr/>
           <p:nvPr/>
         </p:nvSpPr>
@@ -38393,7 +38329,7 @@
       </p:sp>
       <p:sp>
         <p:nvSpPr>
-          <p:cNvPr id="935" name="Shape 933"/>
+          <p:cNvPr id="933" name="Shape 931"/>
           <p:cNvSpPr/>
           <p:nvPr/>
         </p:nvSpPr>
@@ -38418,7 +38354,7 @@
       </p:sp>
       <p:sp>
         <p:nvSpPr>
-          <p:cNvPr id="936" name="Text 934"/>
+          <p:cNvPr id="934" name="Text 932"/>
           <p:cNvSpPr/>
           <p:nvPr/>
         </p:nvSpPr>
@@ -38457,7 +38393,7 @@
       </p:sp>
       <p:sp>
         <p:nvSpPr>
-          <p:cNvPr id="937" name="Shape 935"/>
+          <p:cNvPr id="935" name="Shape 933"/>
           <p:cNvSpPr/>
           <p:nvPr/>
         </p:nvSpPr>
@@ -38482,7 +38418,7 @@
       </p:sp>
       <p:sp>
         <p:nvSpPr>
-          <p:cNvPr id="938" name="Text 936"/>
+          <p:cNvPr id="936" name="Text 934"/>
           <p:cNvSpPr/>
           <p:nvPr/>
         </p:nvSpPr>
@@ -38521,7 +38457,7 @@
       </p:sp>
       <p:sp>
         <p:nvSpPr>
-          <p:cNvPr id="939" name="Shape 937"/>
+          <p:cNvPr id="937" name="Shape 935"/>
           <p:cNvSpPr/>
           <p:nvPr/>
         </p:nvSpPr>
@@ -38546,7 +38482,7 @@
       </p:sp>
       <p:sp>
         <p:nvSpPr>
-          <p:cNvPr id="940" name="Text 938"/>
+          <p:cNvPr id="938" name="Text 936"/>
           <p:cNvSpPr/>
           <p:nvPr/>
         </p:nvSpPr>
@@ -38585,7 +38521,7 @@
       </p:sp>
       <p:sp>
         <p:nvSpPr>
-          <p:cNvPr id="941" name="Shape 939"/>
+          <p:cNvPr id="939" name="Shape 937"/>
           <p:cNvSpPr/>
           <p:nvPr/>
         </p:nvSpPr>
@@ -38610,7 +38546,7 @@
       </p:sp>
       <p:sp>
         <p:nvSpPr>
-          <p:cNvPr id="942" name="Text 940"/>
+          <p:cNvPr id="940" name="Text 938"/>
           <p:cNvSpPr/>
           <p:nvPr/>
         </p:nvSpPr>
@@ -38649,7 +38585,7 @@
       </p:sp>
       <p:sp>
         <p:nvSpPr>
-          <p:cNvPr id="943" name="Shape 941"/>
+          <p:cNvPr id="941" name="Shape 939"/>
           <p:cNvSpPr/>
           <p:nvPr/>
         </p:nvSpPr>
@@ -38674,7 +38610,7 @@
       </p:sp>
       <p:sp>
         <p:nvSpPr>
-          <p:cNvPr id="944" name="Text 942"/>
+          <p:cNvPr id="942" name="Text 940"/>
           <p:cNvSpPr/>
           <p:nvPr/>
         </p:nvSpPr>
@@ -38713,7 +38649,7 @@
       </p:sp>
       <p:sp>
         <p:nvSpPr>
-          <p:cNvPr id="945" name="Shape 943"/>
+          <p:cNvPr id="943" name="Shape 941"/>
           <p:cNvSpPr/>
           <p:nvPr/>
         </p:nvSpPr>
@@ -38738,7 +38674,7 @@
       </p:sp>
       <p:sp>
         <p:nvSpPr>
-          <p:cNvPr id="946" name="Text 944"/>
+          <p:cNvPr id="944" name="Text 942"/>
           <p:cNvSpPr/>
           <p:nvPr/>
         </p:nvSpPr>
@@ -38777,7 +38713,7 @@
       </p:sp>
       <p:sp>
         <p:nvSpPr>
-          <p:cNvPr id="947" name="Shape 945"/>
+          <p:cNvPr id="945" name="Shape 943"/>
           <p:cNvSpPr/>
           <p:nvPr/>
         </p:nvSpPr>
@@ -38802,7 +38738,7 @@
       </p:sp>
       <p:sp>
         <p:nvSpPr>
-          <p:cNvPr id="948" name="Text 946"/>
+          <p:cNvPr id="946" name="Text 944"/>
           <p:cNvSpPr/>
           <p:nvPr/>
         </p:nvSpPr>
@@ -38841,7 +38777,7 @@
       </p:sp>
       <p:sp>
         <p:nvSpPr>
-          <p:cNvPr id="949" name="Shape 947"/>
+          <p:cNvPr id="947" name="Shape 945"/>
           <p:cNvSpPr/>
           <p:nvPr/>
         </p:nvSpPr>
@@ -38866,7 +38802,7 @@
       </p:sp>
       <p:sp>
         <p:nvSpPr>
-          <p:cNvPr id="950" name="Text 948"/>
+          <p:cNvPr id="948" name="Text 946"/>
           <p:cNvSpPr/>
           <p:nvPr/>
         </p:nvSpPr>
@@ -38905,7 +38841,7 @@
       </p:sp>
       <p:sp>
         <p:nvSpPr>
-          <p:cNvPr id="951" name="Shape 949"/>
+          <p:cNvPr id="949" name="Shape 947"/>
           <p:cNvSpPr/>
           <p:nvPr/>
         </p:nvSpPr>
@@ -38930,7 +38866,7 @@
       </p:sp>
       <p:sp>
         <p:nvSpPr>
-          <p:cNvPr id="952" name="Text 950"/>
+          <p:cNvPr id="950" name="Text 948"/>
           <p:cNvSpPr/>
           <p:nvPr/>
         </p:nvSpPr>
@@ -38969,7 +38905,7 @@
       </p:sp>
       <p:sp>
         <p:nvSpPr>
-          <p:cNvPr id="953" name="Shape 951"/>
+          <p:cNvPr id="951" name="Shape 949"/>
           <p:cNvSpPr/>
           <p:nvPr/>
         </p:nvSpPr>
@@ -38994,7 +38930,7 @@
       </p:sp>
       <p:sp>
         <p:nvSpPr>
-          <p:cNvPr id="954" name="Text 952"/>
+          <p:cNvPr id="952" name="Text 950"/>
           <p:cNvSpPr/>
           <p:nvPr/>
         </p:nvSpPr>
@@ -39033,7 +38969,7 @@
       </p:sp>
       <p:sp>
         <p:nvSpPr>
-          <p:cNvPr id="955" name="Shape 953"/>
+          <p:cNvPr id="953" name="Shape 951"/>
           <p:cNvSpPr/>
           <p:nvPr/>
         </p:nvSpPr>
@@ -39058,7 +38994,7 @@
       </p:sp>
       <p:sp>
         <p:nvSpPr>
-          <p:cNvPr id="956" name="Text 954"/>
+          <p:cNvPr id="954" name="Text 952"/>
           <p:cNvSpPr/>
           <p:nvPr/>
         </p:nvSpPr>
@@ -39097,7 +39033,7 @@
       </p:sp>
       <p:sp>
         <p:nvSpPr>
-          <p:cNvPr id="957" name="Shape 955"/>
+          <p:cNvPr id="955" name="Shape 953"/>
           <p:cNvSpPr/>
           <p:nvPr/>
         </p:nvSpPr>
@@ -39122,7 +39058,7 @@
       </p:sp>
       <p:sp>
         <p:nvSpPr>
-          <p:cNvPr id="958" name="Text 956"/>
+          <p:cNvPr id="956" name="Text 954"/>
           <p:cNvSpPr/>
           <p:nvPr/>
         </p:nvSpPr>
@@ -39161,7 +39097,7 @@
       </p:sp>
       <p:sp>
         <p:nvSpPr>
-          <p:cNvPr id="959" name="Shape 957"/>
+          <p:cNvPr id="957" name="Shape 955"/>
           <p:cNvSpPr/>
           <p:nvPr/>
         </p:nvSpPr>
@@ -39186,7 +39122,7 @@
       </p:sp>
       <p:sp>
         <p:nvSpPr>
-          <p:cNvPr id="960" name="Text 958"/>
+          <p:cNvPr id="958" name="Text 956"/>
           <p:cNvSpPr/>
           <p:nvPr/>
         </p:nvSpPr>
@@ -39225,7 +39161,7 @@
       </p:sp>
       <p:sp>
         <p:nvSpPr>
-          <p:cNvPr id="961" name="Shape 959"/>
+          <p:cNvPr id="959" name="Shape 957"/>
           <p:cNvSpPr/>
           <p:nvPr/>
         </p:nvSpPr>
@@ -39250,7 +39186,7 @@
       </p:sp>
       <p:sp>
         <p:nvSpPr>
-          <p:cNvPr id="962" name="Text 960"/>
+          <p:cNvPr id="960" name="Text 958"/>
           <p:cNvSpPr/>
           <p:nvPr/>
         </p:nvSpPr>
@@ -39289,7 +39225,7 @@
       </p:sp>
       <p:sp>
         <p:nvSpPr>
-          <p:cNvPr id="963" name="Shape 961"/>
+          <p:cNvPr id="961" name="Shape 959"/>
           <p:cNvSpPr/>
           <p:nvPr/>
         </p:nvSpPr>
@@ -39314,7 +39250,7 @@
       </p:sp>
       <p:sp>
         <p:nvSpPr>
-          <p:cNvPr id="964" name="Text 962"/>
+          <p:cNvPr id="962" name="Text 960"/>
           <p:cNvSpPr/>
           <p:nvPr/>
         </p:nvSpPr>
@@ -39353,7 +39289,7 @@
       </p:sp>
       <p:sp>
         <p:nvSpPr>
-          <p:cNvPr id="965" name="Shape 963"/>
+          <p:cNvPr id="963" name="Shape 961"/>
           <p:cNvSpPr/>
           <p:nvPr/>
         </p:nvSpPr>
@@ -39378,7 +39314,7 @@
       </p:sp>
       <p:sp>
         <p:nvSpPr>
-          <p:cNvPr id="966" name="Text 964"/>
+          <p:cNvPr id="964" name="Text 962"/>
           <p:cNvSpPr/>
           <p:nvPr/>
         </p:nvSpPr>
@@ -39417,7 +39353,7 @@
       </p:sp>
       <p:sp>
         <p:nvSpPr>
-          <p:cNvPr id="967" name="Shape 965"/>
+          <p:cNvPr id="965" name="Shape 963"/>
           <p:cNvSpPr/>
           <p:nvPr/>
         </p:nvSpPr>
@@ -39442,7 +39378,7 @@
       </p:sp>
       <p:sp>
         <p:nvSpPr>
-          <p:cNvPr id="968" name="Text 966"/>
+          <p:cNvPr id="966" name="Text 964"/>
           <p:cNvSpPr/>
           <p:nvPr/>
         </p:nvSpPr>
@@ -39481,7 +39417,7 @@
       </p:sp>
       <p:sp>
         <p:nvSpPr>
-          <p:cNvPr id="969" name="Shape 967"/>
+          <p:cNvPr id="967" name="Shape 965"/>
           <p:cNvSpPr/>
           <p:nvPr/>
         </p:nvSpPr>
@@ -39506,7 +39442,7 @@
       </p:sp>
       <p:sp>
         <p:nvSpPr>
-          <p:cNvPr id="970" name="Text 968"/>
+          <p:cNvPr id="968" name="Text 966"/>
           <p:cNvSpPr/>
           <p:nvPr/>
         </p:nvSpPr>
@@ -39545,7 +39481,7 @@
       </p:sp>
       <p:sp>
         <p:nvSpPr>
-          <p:cNvPr id="971" name="Shape 969"/>
+          <p:cNvPr id="969" name="Shape 967"/>
           <p:cNvSpPr/>
           <p:nvPr/>
         </p:nvSpPr>
@@ -39570,7 +39506,7 @@
       </p:sp>
       <p:sp>
         <p:nvSpPr>
-          <p:cNvPr id="972" name="Text 970"/>
+          <p:cNvPr id="970" name="Text 968"/>
           <p:cNvSpPr/>
           <p:nvPr/>
         </p:nvSpPr>
@@ -39609,7 +39545,7 @@
       </p:sp>
       <p:sp>
         <p:nvSpPr>
-          <p:cNvPr id="973" name="Shape 971"/>
+          <p:cNvPr id="971" name="Shape 969"/>
           <p:cNvSpPr/>
           <p:nvPr/>
         </p:nvSpPr>
@@ -39634,7 +39570,7 @@
       </p:sp>
       <p:sp>
         <p:nvSpPr>
-          <p:cNvPr id="974" name="Text 972"/>
+          <p:cNvPr id="972" name="Text 970"/>
           <p:cNvSpPr/>
           <p:nvPr/>
         </p:nvSpPr>
@@ -39673,7 +39609,7 @@
       </p:sp>
       <p:sp>
         <p:nvSpPr>
-          <p:cNvPr id="975" name="Shape 973"/>
+          <p:cNvPr id="973" name="Shape 971"/>
           <p:cNvSpPr/>
           <p:nvPr/>
         </p:nvSpPr>
@@ -39698,7 +39634,7 @@
       </p:sp>
       <p:sp>
         <p:nvSpPr>
-          <p:cNvPr id="976" name="Text 974"/>
+          <p:cNvPr id="974" name="Text 972"/>
           <p:cNvSpPr/>
           <p:nvPr/>
         </p:nvSpPr>
@@ -39737,7 +39673,7 @@
       </p:sp>
       <p:sp>
         <p:nvSpPr>
-          <p:cNvPr id="977" name="Shape 975"/>
+          <p:cNvPr id="975" name="Shape 973"/>
           <p:cNvSpPr/>
           <p:nvPr/>
         </p:nvSpPr>
@@ -39762,7 +39698,7 @@
       </p:sp>
       <p:sp>
         <p:nvSpPr>
-          <p:cNvPr id="978" name="Text 976"/>
+          <p:cNvPr id="976" name="Text 974"/>
           <p:cNvSpPr/>
           <p:nvPr/>
         </p:nvSpPr>
@@ -39801,7 +39737,7 @@
       </p:sp>
       <p:sp>
         <p:nvSpPr>
-          <p:cNvPr id="979" name="Shape 977"/>
+          <p:cNvPr id="977" name="Shape 975"/>
           <p:cNvSpPr/>
           <p:nvPr/>
         </p:nvSpPr>
@@ -39826,7 +39762,7 @@
       </p:sp>
       <p:sp>
         <p:nvSpPr>
-          <p:cNvPr id="980" name="Text 978"/>
+          <p:cNvPr id="978" name="Text 976"/>
           <p:cNvSpPr/>
           <p:nvPr/>
         </p:nvSpPr>
@@ -39865,7 +39801,7 @@
       </p:sp>
       <p:sp>
         <p:nvSpPr>
-          <p:cNvPr id="981" name="Shape 979"/>
+          <p:cNvPr id="979" name="Shape 977"/>
           <p:cNvSpPr/>
           <p:nvPr/>
         </p:nvSpPr>
@@ -39890,7 +39826,7 @@
       </p:sp>
       <p:sp>
         <p:nvSpPr>
-          <p:cNvPr id="982" name="Text 980"/>
+          <p:cNvPr id="980" name="Text 978"/>
           <p:cNvSpPr/>
           <p:nvPr/>
         </p:nvSpPr>
@@ -39929,7 +39865,7 @@
       </p:sp>
       <p:sp>
         <p:nvSpPr>
-          <p:cNvPr id="983" name="Shape 981"/>
+          <p:cNvPr id="981" name="Shape 979"/>
           <p:cNvSpPr/>
           <p:nvPr/>
         </p:nvSpPr>
@@ -39954,7 +39890,7 @@
       </p:sp>
       <p:sp>
         <p:nvSpPr>
-          <p:cNvPr id="984" name="Text 982"/>
+          <p:cNvPr id="982" name="Text 980"/>
           <p:cNvSpPr/>
           <p:nvPr/>
         </p:nvSpPr>
@@ -39993,7 +39929,7 @@
       </p:sp>
       <p:sp>
         <p:nvSpPr>
-          <p:cNvPr id="985" name="Shape 983"/>
+          <p:cNvPr id="983" name="Shape 981"/>
           <p:cNvSpPr/>
           <p:nvPr/>
         </p:nvSpPr>
@@ -40018,7 +39954,7 @@
       </p:sp>
       <p:sp>
         <p:nvSpPr>
-          <p:cNvPr id="986" name="Text 984"/>
+          <p:cNvPr id="984" name="Text 982"/>
           <p:cNvSpPr/>
           <p:nvPr/>
         </p:nvSpPr>
@@ -40057,7 +39993,7 @@
       </p:sp>
       <p:sp>
         <p:nvSpPr>
-          <p:cNvPr id="987" name="Shape 985"/>
+          <p:cNvPr id="985" name="Shape 983"/>
           <p:cNvSpPr/>
           <p:nvPr/>
         </p:nvSpPr>
@@ -40082,7 +40018,7 @@
       </p:sp>
       <p:sp>
         <p:nvSpPr>
-          <p:cNvPr id="988" name="Text 986"/>
+          <p:cNvPr id="986" name="Text 984"/>
           <p:cNvSpPr/>
           <p:nvPr/>
         </p:nvSpPr>
@@ -40121,7 +40057,7 @@
       </p:sp>
       <p:sp>
         <p:nvSpPr>
-          <p:cNvPr id="989" name="Shape 987"/>
+          <p:cNvPr id="987" name="Shape 985"/>
           <p:cNvSpPr/>
           <p:nvPr/>
         </p:nvSpPr>
@@ -40146,7 +40082,7 @@
       </p:sp>
       <p:sp>
         <p:nvSpPr>
-          <p:cNvPr id="990" name="Text 988"/>
+          <p:cNvPr id="988" name="Text 986"/>
           <p:cNvSpPr/>
           <p:nvPr/>
         </p:nvSpPr>
@@ -40185,7 +40121,7 @@
       </p:sp>
       <p:sp>
         <p:nvSpPr>
-          <p:cNvPr id="991" name="Shape 989"/>
+          <p:cNvPr id="989" name="Shape 987"/>
           <p:cNvSpPr/>
           <p:nvPr/>
         </p:nvSpPr>
@@ -40210,7 +40146,7 @@
       </p:sp>
       <p:sp>
         <p:nvSpPr>
-          <p:cNvPr id="992" name="Text 990"/>
+          <p:cNvPr id="990" name="Text 988"/>
           <p:cNvSpPr/>
           <p:nvPr/>
         </p:nvSpPr>
@@ -40249,7 +40185,7 @@
       </p:sp>
       <p:sp>
         <p:nvSpPr>
-          <p:cNvPr id="993" name="Shape 991"/>
+          <p:cNvPr id="991" name="Shape 989"/>
           <p:cNvSpPr/>
           <p:nvPr/>
         </p:nvSpPr>
@@ -40274,7 +40210,7 @@
       </p:sp>
       <p:sp>
         <p:nvSpPr>
-          <p:cNvPr id="994" name="Text 992"/>
+          <p:cNvPr id="992" name="Text 990"/>
           <p:cNvSpPr/>
           <p:nvPr/>
         </p:nvSpPr>
@@ -40313,7 +40249,7 @@
       </p:sp>
       <p:sp>
         <p:nvSpPr>
-          <p:cNvPr id="995" name="Shape 993"/>
+          <p:cNvPr id="993" name="Shape 991"/>
           <p:cNvSpPr/>
           <p:nvPr/>
         </p:nvSpPr>
@@ -40338,7 +40274,7 @@
       </p:sp>
       <p:sp>
         <p:nvSpPr>
-          <p:cNvPr id="996" name="Text 994"/>
+          <p:cNvPr id="994" name="Text 992"/>
           <p:cNvSpPr/>
           <p:nvPr/>
         </p:nvSpPr>
@@ -40377,7 +40313,7 @@
       </p:sp>
       <p:sp>
         <p:nvSpPr>
-          <p:cNvPr id="997" name="Shape 995"/>
+          <p:cNvPr id="995" name="Shape 993"/>
           <p:cNvSpPr/>
           <p:nvPr/>
         </p:nvSpPr>
@@ -40402,7 +40338,7 @@
       </p:sp>
       <p:sp>
         <p:nvSpPr>
-          <p:cNvPr id="998" name="Text 996"/>
+          <p:cNvPr id="996" name="Text 994"/>
           <p:cNvSpPr/>
           <p:nvPr/>
         </p:nvSpPr>
@@ -40441,7 +40377,7 @@
       </p:sp>
       <p:sp>
         <p:nvSpPr>
-          <p:cNvPr id="999" name="Shape 997"/>
+          <p:cNvPr id="997" name="Shape 995"/>
           <p:cNvSpPr/>
           <p:nvPr/>
         </p:nvSpPr>
@@ -40466,7 +40402,7 @@
       </p:sp>
       <p:sp>
         <p:nvSpPr>
-          <p:cNvPr id="1000" name="Text 998"/>
+          <p:cNvPr id="998" name="Text 996"/>
           <p:cNvSpPr/>
           <p:nvPr/>
         </p:nvSpPr>
@@ -40505,7 +40441,7 @@
       </p:sp>
       <p:sp>
         <p:nvSpPr>
-          <p:cNvPr id="1001" name="Shape 999"/>
+          <p:cNvPr id="999" name="Shape 997"/>
           <p:cNvSpPr/>
           <p:nvPr/>
         </p:nvSpPr>
@@ -40530,7 +40466,7 @@
       </p:sp>
       <p:sp>
         <p:nvSpPr>
-          <p:cNvPr id="1002" name="Text 1000"/>
+          <p:cNvPr id="1000" name="Text 998"/>
           <p:cNvSpPr/>
           <p:nvPr/>
         </p:nvSpPr>
@@ -40569,7 +40505,7 @@
       </p:sp>
       <p:sp>
         <p:nvSpPr>
-          <p:cNvPr id="1003" name="Shape 1001"/>
+          <p:cNvPr id="1001" name="Shape 999"/>
           <p:cNvSpPr/>
           <p:nvPr/>
         </p:nvSpPr>
@@ -40594,7 +40530,7 @@
       </p:sp>
       <p:sp>
         <p:nvSpPr>
-          <p:cNvPr id="1004" name="Text 1002"/>
+          <p:cNvPr id="1002" name="Text 1000"/>
           <p:cNvSpPr/>
           <p:nvPr/>
         </p:nvSpPr>
@@ -40633,7 +40569,7 @@
       </p:sp>
       <p:sp>
         <p:nvSpPr>
-          <p:cNvPr id="1005" name="Shape 1003"/>
+          <p:cNvPr id="1003" name="Shape 1001"/>
           <p:cNvSpPr/>
           <p:nvPr/>
         </p:nvSpPr>
@@ -40658,7 +40594,7 @@
       </p:sp>
       <p:sp>
         <p:nvSpPr>
-          <p:cNvPr id="1006" name="Text 1004"/>
+          <p:cNvPr id="1004" name="Text 1002"/>
           <p:cNvSpPr/>
           <p:nvPr/>
         </p:nvSpPr>
@@ -40697,7 +40633,7 @@
       </p:sp>
       <p:sp>
         <p:nvSpPr>
-          <p:cNvPr id="1007" name="Shape 1005"/>
+          <p:cNvPr id="1005" name="Shape 1003"/>
           <p:cNvSpPr/>
           <p:nvPr/>
         </p:nvSpPr>
@@ -40722,7 +40658,7 @@
       </p:sp>
       <p:sp>
         <p:nvSpPr>
-          <p:cNvPr id="1008" name="Text 1006"/>
+          <p:cNvPr id="1006" name="Text 1004"/>
           <p:cNvSpPr/>
           <p:nvPr/>
         </p:nvSpPr>
@@ -40761,7 +40697,7 @@
       </p:sp>
       <p:sp>
         <p:nvSpPr>
-          <p:cNvPr id="1009" name="Shape 1007"/>
+          <p:cNvPr id="1007" name="Shape 1005"/>
           <p:cNvSpPr/>
           <p:nvPr/>
         </p:nvSpPr>
@@ -40786,7 +40722,7 @@
       </p:sp>
       <p:sp>
         <p:nvSpPr>
-          <p:cNvPr id="1010" name="Text 1008"/>
+          <p:cNvPr id="1008" name="Text 1006"/>
           <p:cNvSpPr/>
           <p:nvPr/>
         </p:nvSpPr>
@@ -40825,7 +40761,7 @@
       </p:sp>
       <p:sp>
         <p:nvSpPr>
-          <p:cNvPr id="1011" name="Shape 1009"/>
+          <p:cNvPr id="1009" name="Shape 1007"/>
           <p:cNvSpPr/>
           <p:nvPr/>
         </p:nvSpPr>
@@ -40850,7 +40786,7 @@
       </p:sp>
       <p:sp>
         <p:nvSpPr>
-          <p:cNvPr id="1012" name="Text 1010"/>
+          <p:cNvPr id="1010" name="Text 1008"/>
           <p:cNvSpPr/>
           <p:nvPr/>
         </p:nvSpPr>
@@ -40889,7 +40825,7 @@
       </p:sp>
       <p:sp>
         <p:nvSpPr>
-          <p:cNvPr id="1013" name="Shape 1011"/>
+          <p:cNvPr id="1011" name="Shape 1009"/>
           <p:cNvSpPr/>
           <p:nvPr/>
         </p:nvSpPr>
@@ -40914,7 +40850,7 @@
       </p:sp>
       <p:sp>
         <p:nvSpPr>
-          <p:cNvPr id="1014" name="Text 1012"/>
+          <p:cNvPr id="1012" name="Text 1010"/>
           <p:cNvSpPr/>
           <p:nvPr/>
         </p:nvSpPr>
@@ -40953,7 +40889,7 @@
       </p:sp>
       <p:sp>
         <p:nvSpPr>
-          <p:cNvPr id="1015" name="Shape 1013"/>
+          <p:cNvPr id="1013" name="Shape 1011"/>
           <p:cNvSpPr/>
           <p:nvPr/>
         </p:nvSpPr>
@@ -40978,7 +40914,7 @@
       </p:sp>
       <p:sp>
         <p:nvSpPr>
-          <p:cNvPr id="1016" name="Text 1014"/>
+          <p:cNvPr id="1014" name="Text 1012"/>
           <p:cNvSpPr/>
           <p:nvPr/>
         </p:nvSpPr>
@@ -41017,7 +40953,7 @@
       </p:sp>
       <p:sp>
         <p:nvSpPr>
-          <p:cNvPr id="1017" name="Shape 1015"/>
+          <p:cNvPr id="1015" name="Shape 1013"/>
           <p:cNvSpPr/>
           <p:nvPr/>
         </p:nvSpPr>
@@ -41042,7 +40978,7 @@
       </p:sp>
       <p:sp>
         <p:nvSpPr>
-          <p:cNvPr id="1018" name="Text 1016"/>
+          <p:cNvPr id="1016" name="Text 1014"/>
           <p:cNvSpPr/>
           <p:nvPr/>
         </p:nvSpPr>
@@ -41081,7 +41017,7 @@
       </p:sp>
       <p:sp>
         <p:nvSpPr>
-          <p:cNvPr id="1019" name="Shape 1017"/>
+          <p:cNvPr id="1017" name="Shape 1015"/>
           <p:cNvSpPr/>
           <p:nvPr/>
         </p:nvSpPr>
@@ -41106,7 +41042,7 @@
       </p:sp>
       <p:sp>
         <p:nvSpPr>
-          <p:cNvPr id="1020" name="Text 1018"/>
+          <p:cNvPr id="1018" name="Text 1016"/>
           <p:cNvSpPr/>
           <p:nvPr/>
         </p:nvSpPr>
@@ -41145,7 +41081,7 @@
       </p:sp>
       <p:sp>
         <p:nvSpPr>
-          <p:cNvPr id="1021" name="Shape 1019"/>
+          <p:cNvPr id="1019" name="Shape 1017"/>
           <p:cNvSpPr/>
           <p:nvPr/>
         </p:nvSpPr>
@@ -41170,7 +41106,7 @@
       </p:sp>
       <p:sp>
         <p:nvSpPr>
-          <p:cNvPr id="1022" name="Text 1020"/>
+          <p:cNvPr id="1020" name="Text 1018"/>
           <p:cNvSpPr/>
           <p:nvPr/>
         </p:nvSpPr>
@@ -41209,7 +41145,7 @@
       </p:sp>
       <p:sp>
         <p:nvSpPr>
-          <p:cNvPr id="1023" name="Shape 1021"/>
+          <p:cNvPr id="1021" name="Shape 1019"/>
           <p:cNvSpPr/>
           <p:nvPr/>
         </p:nvSpPr>
@@ -41234,7 +41170,7 @@
       </p:sp>
       <p:sp>
         <p:nvSpPr>
-          <p:cNvPr id="1024" name="Text 1022"/>
+          <p:cNvPr id="1022" name="Text 1020"/>
           <p:cNvSpPr/>
           <p:nvPr/>
         </p:nvSpPr>
@@ -41273,7 +41209,7 @@
       </p:sp>
       <p:sp>
         <p:nvSpPr>
-          <p:cNvPr id="1025" name="Shape 1023"/>
+          <p:cNvPr id="1023" name="Shape 1021"/>
           <p:cNvSpPr/>
           <p:nvPr/>
         </p:nvSpPr>
@@ -41298,7 +41234,7 @@
       </p:sp>
       <p:sp>
         <p:nvSpPr>
-          <p:cNvPr id="1026" name="Text 1024"/>
+          <p:cNvPr id="1024" name="Text 1022"/>
           <p:cNvSpPr/>
           <p:nvPr/>
         </p:nvSpPr>
@@ -41337,7 +41273,7 @@
       </p:sp>
       <p:sp>
         <p:nvSpPr>
-          <p:cNvPr id="1027" name="Shape 1025"/>
+          <p:cNvPr id="1025" name="Shape 1023"/>
           <p:cNvSpPr/>
           <p:nvPr/>
         </p:nvSpPr>
@@ -41362,7 +41298,7 @@
       </p:sp>
       <p:sp>
         <p:nvSpPr>
-          <p:cNvPr id="1028" name="Text 1026"/>
+          <p:cNvPr id="1026" name="Text 1024"/>
           <p:cNvSpPr/>
           <p:nvPr/>
         </p:nvSpPr>
@@ -41401,7 +41337,7 @@
       </p:sp>
       <p:sp>
         <p:nvSpPr>
-          <p:cNvPr id="1029" name="Shape 1027"/>
+          <p:cNvPr id="1027" name="Shape 1025"/>
           <p:cNvSpPr/>
           <p:nvPr/>
         </p:nvSpPr>
@@ -41426,7 +41362,7 @@
       </p:sp>
       <p:sp>
         <p:nvSpPr>
-          <p:cNvPr id="1030" name="Text 1028"/>
+          <p:cNvPr id="1028" name="Text 1026"/>
           <p:cNvSpPr/>
           <p:nvPr/>
         </p:nvSpPr>
@@ -41465,7 +41401,7 @@
       </p:sp>
       <p:sp>
         <p:nvSpPr>
-          <p:cNvPr id="1031" name="Shape 1029"/>
+          <p:cNvPr id="1029" name="Shape 1027"/>
           <p:cNvSpPr/>
           <p:nvPr/>
         </p:nvSpPr>
@@ -41490,7 +41426,7 @@
       </p:sp>
       <p:sp>
         <p:nvSpPr>
-          <p:cNvPr id="1032" name="Text 1030"/>
+          <p:cNvPr id="1030" name="Text 1028"/>
           <p:cNvSpPr/>
           <p:nvPr/>
         </p:nvSpPr>
@@ -41529,7 +41465,7 @@
       </p:sp>
       <p:sp>
         <p:nvSpPr>
-          <p:cNvPr id="1033" name="Shape 1031"/>
+          <p:cNvPr id="1031" name="Shape 1029"/>
           <p:cNvSpPr/>
           <p:nvPr/>
         </p:nvSpPr>
@@ -41554,7 +41490,7 @@
       </p:sp>
       <p:sp>
         <p:nvSpPr>
-          <p:cNvPr id="1034" name="Text 1032"/>
+          <p:cNvPr id="1032" name="Text 1030"/>
           <p:cNvSpPr/>
           <p:nvPr/>
         </p:nvSpPr>
@@ -41593,7 +41529,7 @@
       </p:sp>
       <p:sp>
         <p:nvSpPr>
-          <p:cNvPr id="1035" name="Shape 1033"/>
+          <p:cNvPr id="1033" name="Shape 1031"/>
           <p:cNvSpPr/>
           <p:nvPr/>
         </p:nvSpPr>
@@ -41618,7 +41554,7 @@
       </p:sp>
       <p:sp>
         <p:nvSpPr>
-          <p:cNvPr id="1036" name="Text 1034"/>
+          <p:cNvPr id="1034" name="Text 1032"/>
           <p:cNvSpPr/>
           <p:nvPr/>
         </p:nvSpPr>
@@ -41657,7 +41593,7 @@
       </p:sp>
       <p:sp>
         <p:nvSpPr>
-          <p:cNvPr id="1037" name="Shape 1035"/>
+          <p:cNvPr id="1035" name="Shape 1033"/>
           <p:cNvSpPr/>
           <p:nvPr/>
         </p:nvSpPr>
@@ -41682,7 +41618,7 @@
       </p:sp>
       <p:sp>
         <p:nvSpPr>
-          <p:cNvPr id="1038" name="Text 1036"/>
+          <p:cNvPr id="1036" name="Text 1034"/>
           <p:cNvSpPr/>
           <p:nvPr/>
         </p:nvSpPr>
@@ -41721,7 +41657,7 @@
       </p:sp>
       <p:sp>
         <p:nvSpPr>
-          <p:cNvPr id="1039" name="Shape 1037"/>
+          <p:cNvPr id="1037" name="Shape 1035"/>
           <p:cNvSpPr/>
           <p:nvPr/>
         </p:nvSpPr>
@@ -41746,7 +41682,7 @@
       </p:sp>
       <p:sp>
         <p:nvSpPr>
-          <p:cNvPr id="1040" name="Text 1038"/>
+          <p:cNvPr id="1038" name="Text 1036"/>
           <p:cNvSpPr/>
           <p:nvPr/>
         </p:nvSpPr>
@@ -41785,7 +41721,7 @@
       </p:sp>
       <p:sp>
         <p:nvSpPr>
-          <p:cNvPr id="1041" name="Shape 1039"/>
+          <p:cNvPr id="1039" name="Shape 1037"/>
           <p:cNvSpPr/>
           <p:nvPr/>
         </p:nvSpPr>
@@ -41810,7 +41746,7 @@
       </p:sp>
       <p:sp>
         <p:nvSpPr>
-          <p:cNvPr id="1042" name="Text 1040"/>
+          <p:cNvPr id="1040" name="Text 1038"/>
           <p:cNvSpPr/>
           <p:nvPr/>
         </p:nvSpPr>
@@ -41849,7 +41785,7 @@
       </p:sp>
       <p:sp>
         <p:nvSpPr>
-          <p:cNvPr id="1043" name="Shape 1041"/>
+          <p:cNvPr id="1041" name="Shape 1039"/>
           <p:cNvSpPr/>
           <p:nvPr/>
         </p:nvSpPr>
@@ -41874,7 +41810,7 @@
       </p:sp>
       <p:sp>
         <p:nvSpPr>
-          <p:cNvPr id="1044" name="Text 1042"/>
+          <p:cNvPr id="1042" name="Text 1040"/>
           <p:cNvSpPr/>
           <p:nvPr/>
         </p:nvSpPr>
@@ -41913,7 +41849,7 @@
       </p:sp>
       <p:sp>
         <p:nvSpPr>
-          <p:cNvPr id="1045" name="Shape 1043"/>
+          <p:cNvPr id="1043" name="Shape 1041"/>
           <p:cNvSpPr/>
           <p:nvPr/>
         </p:nvSpPr>
@@ -41938,7 +41874,7 @@
       </p:sp>
       <p:sp>
         <p:nvSpPr>
-          <p:cNvPr id="1046" name="Text 1044"/>
+          <p:cNvPr id="1044" name="Text 1042"/>
           <p:cNvSpPr/>
           <p:nvPr/>
         </p:nvSpPr>
@@ -41977,7 +41913,7 @@
       </p:sp>
       <p:sp>
         <p:nvSpPr>
-          <p:cNvPr id="1047" name="Shape 1045"/>
+          <p:cNvPr id="1045" name="Shape 1043"/>
           <p:cNvSpPr/>
           <p:nvPr/>
         </p:nvSpPr>
@@ -42002,7 +41938,7 @@
       </p:sp>
       <p:sp>
         <p:nvSpPr>
-          <p:cNvPr id="1048" name="Text 1046"/>
+          <p:cNvPr id="1046" name="Text 1044"/>
           <p:cNvSpPr/>
           <p:nvPr/>
         </p:nvSpPr>
@@ -42041,7 +41977,7 @@
       </p:sp>
       <p:sp>
         <p:nvSpPr>
-          <p:cNvPr id="1049" name="Shape 1047"/>
+          <p:cNvPr id="1047" name="Shape 1045"/>
           <p:cNvSpPr/>
           <p:nvPr/>
         </p:nvSpPr>
@@ -42066,7 +42002,7 @@
       </p:sp>
       <p:sp>
         <p:nvSpPr>
-          <p:cNvPr id="1050" name="Text 1048"/>
+          <p:cNvPr id="1048" name="Text 1046"/>
           <p:cNvSpPr/>
           <p:nvPr/>
         </p:nvSpPr>
@@ -42105,7 +42041,7 @@
       </p:sp>
       <p:sp>
         <p:nvSpPr>
-          <p:cNvPr id="1051" name="Shape 1049"/>
+          <p:cNvPr id="1049" name="Shape 1047"/>
           <p:cNvSpPr/>
           <p:nvPr/>
         </p:nvSpPr>
@@ -42130,7 +42066,7 @@
       </p:sp>
       <p:sp>
         <p:nvSpPr>
-          <p:cNvPr id="1052" name="Text 1050"/>
+          <p:cNvPr id="1050" name="Text 1048"/>
           <p:cNvSpPr/>
           <p:nvPr/>
         </p:nvSpPr>
@@ -42169,7 +42105,7 @@
       </p:sp>
       <p:sp>
         <p:nvSpPr>
-          <p:cNvPr id="1053" name="Shape 1051"/>
+          <p:cNvPr id="1051" name="Shape 1049"/>
           <p:cNvSpPr/>
           <p:nvPr/>
         </p:nvSpPr>
@@ -42194,7 +42130,7 @@
       </p:sp>
       <p:sp>
         <p:nvSpPr>
-          <p:cNvPr id="1054" name="Text 1052"/>
+          <p:cNvPr id="1052" name="Text 1050"/>
           <p:cNvSpPr/>
           <p:nvPr/>
         </p:nvSpPr>
@@ -42233,7 +42169,7 @@
       </p:sp>
       <p:sp>
         <p:nvSpPr>
-          <p:cNvPr id="1055" name="Shape 1053"/>
+          <p:cNvPr id="1053" name="Shape 1051"/>
           <p:cNvSpPr/>
           <p:nvPr/>
         </p:nvSpPr>
@@ -42258,7 +42194,7 @@
       </p:sp>
       <p:sp>
         <p:nvSpPr>
-          <p:cNvPr id="1056" name="Text 1054"/>
+          <p:cNvPr id="1054" name="Text 1052"/>
           <p:cNvSpPr/>
           <p:nvPr/>
         </p:nvSpPr>
@@ -42297,7 +42233,7 @@
       </p:sp>
       <p:sp>
         <p:nvSpPr>
-          <p:cNvPr id="1057" name="Shape 1055"/>
+          <p:cNvPr id="1055" name="Shape 1053"/>
           <p:cNvSpPr/>
           <p:nvPr/>
         </p:nvSpPr>
@@ -42322,7 +42258,7 @@
       </p:sp>
       <p:sp>
         <p:nvSpPr>
-          <p:cNvPr id="1058" name="Text 1056"/>
+          <p:cNvPr id="1056" name="Text 1054"/>
           <p:cNvSpPr/>
           <p:nvPr/>
         </p:nvSpPr>
@@ -42361,7 +42297,7 @@
       </p:sp>
       <p:sp>
         <p:nvSpPr>
-          <p:cNvPr id="1059" name="Shape 1057"/>
+          <p:cNvPr id="1057" name="Shape 1055"/>
           <p:cNvSpPr/>
           <p:nvPr/>
         </p:nvSpPr>
@@ -42386,7 +42322,7 @@
       </p:sp>
       <p:sp>
         <p:nvSpPr>
-          <p:cNvPr id="1060" name="Text 1058"/>
+          <p:cNvPr id="1058" name="Text 1056"/>
           <p:cNvSpPr/>
           <p:nvPr/>
         </p:nvSpPr>
@@ -42425,7 +42361,7 @@
       </p:sp>
       <p:sp>
         <p:nvSpPr>
-          <p:cNvPr id="1061" name="Shape 1059"/>
+          <p:cNvPr id="1059" name="Shape 1057"/>
           <p:cNvSpPr/>
           <p:nvPr/>
         </p:nvSpPr>
@@ -42450,7 +42386,7 @@
       </p:sp>
       <p:sp>
         <p:nvSpPr>
-          <p:cNvPr id="1062" name="Text 1060"/>
+          <p:cNvPr id="1060" name="Text 1058"/>
           <p:cNvSpPr/>
           <p:nvPr/>
         </p:nvSpPr>
@@ -42489,7 +42425,7 @@
       </p:sp>
       <p:sp>
         <p:nvSpPr>
-          <p:cNvPr id="1063" name="Shape 1061"/>
+          <p:cNvPr id="1061" name="Shape 1059"/>
           <p:cNvSpPr/>
           <p:nvPr/>
         </p:nvSpPr>
@@ -42514,7 +42450,7 @@
       </p:sp>
       <p:sp>
         <p:nvSpPr>
-          <p:cNvPr id="1064" name="Text 1062"/>
+          <p:cNvPr id="1062" name="Text 1060"/>
           <p:cNvSpPr/>
           <p:nvPr/>
         </p:nvSpPr>
@@ -42553,7 +42489,7 @@
       </p:sp>
       <p:sp>
         <p:nvSpPr>
-          <p:cNvPr id="1065" name="Shape 1063"/>
+          <p:cNvPr id="1063" name="Shape 1061"/>
           <p:cNvSpPr/>
           <p:nvPr/>
         </p:nvSpPr>
@@ -42578,7 +42514,7 @@
       </p:sp>
       <p:sp>
         <p:nvSpPr>
-          <p:cNvPr id="1066" name="Text 1064"/>
+          <p:cNvPr id="1064" name="Text 1062"/>
           <p:cNvSpPr/>
           <p:nvPr/>
         </p:nvSpPr>
@@ -42617,7 +42553,7 @@
       </p:sp>
       <p:sp>
         <p:nvSpPr>
-          <p:cNvPr id="1067" name="Shape 1065"/>
+          <p:cNvPr id="1065" name="Shape 1063"/>
           <p:cNvSpPr/>
           <p:nvPr/>
         </p:nvSpPr>
@@ -42642,7 +42578,7 @@
       </p:sp>
       <p:sp>
         <p:nvSpPr>
-          <p:cNvPr id="1068" name="Text 1066"/>
+          <p:cNvPr id="1066" name="Text 1064"/>
           <p:cNvSpPr/>
           <p:nvPr/>
         </p:nvSpPr>
@@ -42681,7 +42617,7 @@
       </p:sp>
       <p:sp>
         <p:nvSpPr>
-          <p:cNvPr id="1069" name="Shape 1067"/>
+          <p:cNvPr id="1067" name="Shape 1065"/>
           <p:cNvSpPr/>
           <p:nvPr/>
         </p:nvSpPr>
@@ -42706,7 +42642,7 @@
       </p:sp>
       <p:sp>
         <p:nvSpPr>
-          <p:cNvPr id="1070" name="Text 1068"/>
+          <p:cNvPr id="1068" name="Text 1066"/>
           <p:cNvSpPr/>
           <p:nvPr/>
         </p:nvSpPr>
@@ -42745,7 +42681,7 @@
       </p:sp>
       <p:sp>
         <p:nvSpPr>
-          <p:cNvPr id="1071" name="Shape 1069"/>
+          <p:cNvPr id="1069" name="Shape 1067"/>
           <p:cNvSpPr/>
           <p:nvPr/>
         </p:nvSpPr>
@@ -42770,7 +42706,7 @@
       </p:sp>
       <p:sp>
         <p:nvSpPr>
-          <p:cNvPr id="1072" name="Text 1070"/>
+          <p:cNvPr id="1070" name="Text 1068"/>
           <p:cNvSpPr/>
           <p:nvPr/>
         </p:nvSpPr>
@@ -42809,7 +42745,7 @@
       </p:sp>
       <p:sp>
         <p:nvSpPr>
-          <p:cNvPr id="1073" name="Shape 1071"/>
+          <p:cNvPr id="1071" name="Shape 1069"/>
           <p:cNvSpPr/>
           <p:nvPr/>
         </p:nvSpPr>
@@ -42834,7 +42770,7 @@
       </p:sp>
       <p:sp>
         <p:nvSpPr>
-          <p:cNvPr id="1074" name="Text 1072"/>
+          <p:cNvPr id="1072" name="Text 1070"/>
           <p:cNvSpPr/>
           <p:nvPr/>
         </p:nvSpPr>
@@ -42873,7 +42809,7 @@
       </p:sp>
       <p:sp>
         <p:nvSpPr>
-          <p:cNvPr id="1075" name="Shape 1073"/>
+          <p:cNvPr id="1073" name="Shape 1071"/>
           <p:cNvSpPr/>
           <p:nvPr/>
         </p:nvSpPr>
@@ -42898,7 +42834,7 @@
       </p:sp>
       <p:sp>
         <p:nvSpPr>
-          <p:cNvPr id="1076" name="Text 1074"/>
+          <p:cNvPr id="1074" name="Text 1072"/>
           <p:cNvSpPr/>
           <p:nvPr/>
         </p:nvSpPr>
@@ -42937,7 +42873,7 @@
       </p:sp>
       <p:sp>
         <p:nvSpPr>
-          <p:cNvPr id="1077" name="Shape 1075"/>
+          <p:cNvPr id="1075" name="Shape 1073"/>
           <p:cNvSpPr/>
           <p:nvPr/>
         </p:nvSpPr>
@@ -42962,7 +42898,7 @@
       </p:sp>
       <p:sp>
         <p:nvSpPr>
-          <p:cNvPr id="1078" name="Text 1076"/>
+          <p:cNvPr id="1076" name="Text 1074"/>
           <p:cNvSpPr/>
           <p:nvPr/>
         </p:nvSpPr>
@@ -43001,7 +42937,7 @@
       </p:sp>
       <p:sp>
         <p:nvSpPr>
-          <p:cNvPr id="1079" name="Shape 1077"/>
+          <p:cNvPr id="1077" name="Shape 1075"/>
           <p:cNvSpPr/>
           <p:nvPr/>
         </p:nvSpPr>
@@ -43026,7 +42962,7 @@
       </p:sp>
       <p:sp>
         <p:nvSpPr>
-          <p:cNvPr id="1080" name="Text 1078"/>
+          <p:cNvPr id="1078" name="Text 1076"/>
           <p:cNvSpPr/>
           <p:nvPr/>
         </p:nvSpPr>
@@ -43065,7 +43001,7 @@
       </p:sp>
       <p:sp>
         <p:nvSpPr>
-          <p:cNvPr id="1081" name="Shape 1079"/>
+          <p:cNvPr id="1079" name="Shape 1077"/>
           <p:cNvSpPr/>
           <p:nvPr/>
         </p:nvSpPr>
@@ -43090,7 +43026,7 @@
       </p:sp>
       <p:sp>
         <p:nvSpPr>
-          <p:cNvPr id="1082" name="Text 1080"/>
+          <p:cNvPr id="1080" name="Text 1078"/>
           <p:cNvSpPr/>
           <p:nvPr/>
         </p:nvSpPr>
@@ -43129,7 +43065,7 @@
       </p:sp>
       <p:sp>
         <p:nvSpPr>
-          <p:cNvPr id="1083" name="Shape 1081"/>
+          <p:cNvPr id="1081" name="Shape 1079"/>
           <p:cNvSpPr/>
           <p:nvPr/>
         </p:nvSpPr>
@@ -43154,7 +43090,7 @@
       </p:sp>
       <p:sp>
         <p:nvSpPr>
-          <p:cNvPr id="1084" name="Text 1082"/>
+          <p:cNvPr id="1082" name="Text 1080"/>
           <p:cNvSpPr/>
           <p:nvPr/>
         </p:nvSpPr>
@@ -43193,7 +43129,7 @@
       </p:sp>
       <p:sp>
         <p:nvSpPr>
-          <p:cNvPr id="1085" name="Shape 1083"/>
+          <p:cNvPr id="1083" name="Shape 1081"/>
           <p:cNvSpPr/>
           <p:nvPr/>
         </p:nvSpPr>
@@ -43218,7 +43154,7 @@
       </p:sp>
       <p:sp>
         <p:nvSpPr>
-          <p:cNvPr id="1086" name="Text 1084"/>
+          <p:cNvPr id="1084" name="Text 1082"/>
           <p:cNvSpPr/>
           <p:nvPr/>
         </p:nvSpPr>
@@ -43257,7 +43193,7 @@
       </p:sp>
       <p:sp>
         <p:nvSpPr>
-          <p:cNvPr id="1087" name="Shape 1085"/>
+          <p:cNvPr id="1085" name="Shape 1083"/>
           <p:cNvSpPr/>
           <p:nvPr/>
         </p:nvSpPr>
@@ -43282,7 +43218,7 @@
       </p:sp>
       <p:sp>
         <p:nvSpPr>
-          <p:cNvPr id="1088" name="Text 1086"/>
+          <p:cNvPr id="1086" name="Text 1084"/>
           <p:cNvSpPr/>
           <p:nvPr/>
         </p:nvSpPr>
@@ -43321,7 +43257,7 @@
       </p:sp>
       <p:sp>
         <p:nvSpPr>
-          <p:cNvPr id="1089" name="Shape 1087"/>
+          <p:cNvPr id="1087" name="Shape 1085"/>
           <p:cNvSpPr/>
           <p:nvPr/>
         </p:nvSpPr>
@@ -43346,7 +43282,7 @@
       </p:sp>
       <p:sp>
         <p:nvSpPr>
-          <p:cNvPr id="1090" name="Text 1088"/>
+          <p:cNvPr id="1088" name="Text 1086"/>
           <p:cNvSpPr/>
           <p:nvPr/>
         </p:nvSpPr>
@@ -43385,7 +43321,7 @@
       </p:sp>
       <p:sp>
         <p:nvSpPr>
-          <p:cNvPr id="1091" name="Shape 1089"/>
+          <p:cNvPr id="1089" name="Shape 1087"/>
           <p:cNvSpPr/>
           <p:nvPr/>
         </p:nvSpPr>
@@ -43410,7 +43346,7 @@
       </p:sp>
       <p:sp>
         <p:nvSpPr>
-          <p:cNvPr id="1092" name="Text 1090"/>
+          <p:cNvPr id="1090" name="Text 1088"/>
           <p:cNvSpPr/>
           <p:nvPr/>
         </p:nvSpPr>
@@ -43449,7 +43385,7 @@
       </p:sp>
       <p:sp>
         <p:nvSpPr>
-          <p:cNvPr id="1093" name="Shape 1091"/>
+          <p:cNvPr id="1091" name="Shape 1089"/>
           <p:cNvSpPr/>
           <p:nvPr/>
         </p:nvSpPr>
@@ -43474,7 +43410,7 @@
       </p:sp>
       <p:sp>
         <p:nvSpPr>
-          <p:cNvPr id="1094" name="Text 1092"/>
+          <p:cNvPr id="1092" name="Text 1090"/>
           <p:cNvSpPr/>
           <p:nvPr/>
         </p:nvSpPr>
@@ -43513,7 +43449,7 @@
       </p:sp>
       <p:sp>
         <p:nvSpPr>
-          <p:cNvPr id="1095" name="Shape 1093"/>
+          <p:cNvPr id="1093" name="Shape 1091"/>
           <p:cNvSpPr/>
           <p:nvPr/>
         </p:nvSpPr>
@@ -43538,7 +43474,7 @@
       </p:sp>
       <p:sp>
         <p:nvSpPr>
-          <p:cNvPr id="1096" name="Text 1094"/>
+          <p:cNvPr id="1094" name="Text 1092"/>
           <p:cNvSpPr/>
           <p:nvPr/>
         </p:nvSpPr>
@@ -43577,7 +43513,7 @@
       </p:sp>
       <p:sp>
         <p:nvSpPr>
-          <p:cNvPr id="1097" name="Shape 1095"/>
+          <p:cNvPr id="1095" name="Shape 1093"/>
           <p:cNvSpPr/>
           <p:nvPr/>
         </p:nvSpPr>
@@ -43602,7 +43538,7 @@
       </p:sp>
       <p:sp>
         <p:nvSpPr>
-          <p:cNvPr id="1098" name="Text 1096"/>
+          <p:cNvPr id="1096" name="Text 1094"/>
           <p:cNvSpPr/>
           <p:nvPr/>
         </p:nvSpPr>
@@ -43641,7 +43577,7 @@
       </p:sp>
       <p:sp>
         <p:nvSpPr>
-          <p:cNvPr id="1099" name="Shape 1097"/>
+          <p:cNvPr id="1097" name="Shape 1095"/>
           <p:cNvSpPr/>
           <p:nvPr/>
         </p:nvSpPr>
@@ -43666,7 +43602,7 @@
       </p:sp>
       <p:sp>
         <p:nvSpPr>
-          <p:cNvPr id="1100" name="Text 1098"/>
+          <p:cNvPr id="1098" name="Text 1096"/>
           <p:cNvSpPr/>
           <p:nvPr/>
         </p:nvSpPr>
@@ -43705,7 +43641,7 @@
       </p:sp>
       <p:sp>
         <p:nvSpPr>
-          <p:cNvPr id="1101" name="Shape 1099"/>
+          <p:cNvPr id="1099" name="Shape 1097"/>
           <p:cNvSpPr/>
           <p:nvPr/>
         </p:nvSpPr>
@@ -43730,7 +43666,7 @@
       </p:sp>
       <p:sp>
         <p:nvSpPr>
-          <p:cNvPr id="1102" name="Text 1100"/>
+          <p:cNvPr id="1100" name="Text 1098"/>
           <p:cNvSpPr/>
           <p:nvPr/>
         </p:nvSpPr>
@@ -43769,7 +43705,7 @@
       </p:sp>
       <p:sp>
         <p:nvSpPr>
-          <p:cNvPr id="1103" name="Shape 1101"/>
+          <p:cNvPr id="1101" name="Shape 1099"/>
           <p:cNvSpPr/>
           <p:nvPr/>
         </p:nvSpPr>
@@ -43794,7 +43730,7 @@
       </p:sp>
       <p:sp>
         <p:nvSpPr>
-          <p:cNvPr id="1104" name="Text 1102"/>
+          <p:cNvPr id="1102" name="Text 1100"/>
           <p:cNvSpPr/>
           <p:nvPr/>
         </p:nvSpPr>
@@ -43833,7 +43769,7 @@
       </p:sp>
       <p:sp>
         <p:nvSpPr>
-          <p:cNvPr id="1105" name="Shape 1103"/>
+          <p:cNvPr id="1103" name="Shape 1101"/>
           <p:cNvSpPr/>
           <p:nvPr/>
         </p:nvSpPr>
@@ -43858,7 +43794,7 @@
       </p:sp>
       <p:sp>
         <p:nvSpPr>
-          <p:cNvPr id="1106" name="Text 1104"/>
+          <p:cNvPr id="1104" name="Text 1102"/>
           <p:cNvSpPr/>
           <p:nvPr/>
         </p:nvSpPr>
@@ -43897,7 +43833,7 @@
       </p:sp>
       <p:sp>
         <p:nvSpPr>
-          <p:cNvPr id="1107" name="Shape 1105"/>
+          <p:cNvPr id="1105" name="Shape 1103"/>
           <p:cNvSpPr/>
           <p:nvPr/>
         </p:nvSpPr>
@@ -43922,7 +43858,7 @@
       </p:sp>
       <p:sp>
         <p:nvSpPr>
-          <p:cNvPr id="1108" name="Text 1106"/>
+          <p:cNvPr id="1106" name="Text 1104"/>
           <p:cNvSpPr/>
           <p:nvPr/>
         </p:nvSpPr>
@@ -43961,7 +43897,7 @@
       </p:sp>
       <p:sp>
         <p:nvSpPr>
-          <p:cNvPr id="1109" name="Shape 1107"/>
+          <p:cNvPr id="1107" name="Shape 1105"/>
           <p:cNvSpPr/>
           <p:nvPr/>
         </p:nvSpPr>
@@ -43986,7 +43922,7 @@
       </p:sp>
       <p:sp>
         <p:nvSpPr>
-          <p:cNvPr id="1110" name="Text 1108"/>
+          <p:cNvPr id="1108" name="Text 1106"/>
           <p:cNvSpPr/>
           <p:nvPr/>
         </p:nvSpPr>
@@ -44025,7 +43961,7 @@
       </p:sp>
       <p:sp>
         <p:nvSpPr>
-          <p:cNvPr id="1111" name="Shape 1109"/>
+          <p:cNvPr id="1109" name="Shape 1107"/>
           <p:cNvSpPr/>
           <p:nvPr/>
         </p:nvSpPr>
@@ -44050,7 +43986,7 @@
       </p:sp>
       <p:sp>
         <p:nvSpPr>
-          <p:cNvPr id="1112" name="Text 1110"/>
+          <p:cNvPr id="1110" name="Text 1108"/>
           <p:cNvSpPr/>
           <p:nvPr/>
         </p:nvSpPr>
@@ -44089,7 +44025,7 @@
       </p:sp>
       <p:sp>
         <p:nvSpPr>
-          <p:cNvPr id="1113" name="Shape 1111"/>
+          <p:cNvPr id="1111" name="Shape 1109"/>
           <p:cNvSpPr/>
           <p:nvPr/>
         </p:nvSpPr>
@@ -44114,7 +44050,7 @@
       </p:sp>
       <p:sp>
         <p:nvSpPr>
-          <p:cNvPr id="1114" name="Text 1112"/>
+          <p:cNvPr id="1112" name="Text 1110"/>
           <p:cNvSpPr/>
           <p:nvPr/>
         </p:nvSpPr>
@@ -44153,7 +44089,7 @@
       </p:sp>
       <p:sp>
         <p:nvSpPr>
-          <p:cNvPr id="1115" name="Shape 1113"/>
+          <p:cNvPr id="1113" name="Shape 1111"/>
           <p:cNvSpPr/>
           <p:nvPr/>
         </p:nvSpPr>
@@ -44178,7 +44114,7 @@
       </p:sp>
       <p:sp>
         <p:nvSpPr>
-          <p:cNvPr id="1116" name="Text 1114"/>
+          <p:cNvPr id="1114" name="Text 1112"/>
           <p:cNvSpPr/>
           <p:nvPr/>
         </p:nvSpPr>
@@ -44217,7 +44153,7 @@
       </p:sp>
       <p:sp>
         <p:nvSpPr>
-          <p:cNvPr id="1117" name="Shape 1115"/>
+          <p:cNvPr id="1115" name="Shape 1113"/>
           <p:cNvSpPr/>
           <p:nvPr/>
         </p:nvSpPr>
@@ -44242,7 +44178,7 @@
       </p:sp>
       <p:sp>
         <p:nvSpPr>
-          <p:cNvPr id="1118" name="Text 1116"/>
+          <p:cNvPr id="1116" name="Text 1114"/>
           <p:cNvSpPr/>
           <p:nvPr/>
         </p:nvSpPr>
@@ -44281,7 +44217,7 @@
       </p:sp>
       <p:sp>
         <p:nvSpPr>
-          <p:cNvPr id="1119" name="Shape 1117"/>
+          <p:cNvPr id="1117" name="Shape 1115"/>
           <p:cNvSpPr/>
           <p:nvPr/>
         </p:nvSpPr>
@@ -44306,7 +44242,7 @@
       </p:sp>
       <p:sp>
         <p:nvSpPr>
-          <p:cNvPr id="1120" name="Text 1118"/>
+          <p:cNvPr id="1118" name="Text 1116"/>
           <p:cNvSpPr/>
           <p:nvPr/>
         </p:nvSpPr>
@@ -44345,7 +44281,7 @@
       </p:sp>
       <p:sp>
         <p:nvSpPr>
-          <p:cNvPr id="1121" name="Shape 1119"/>
+          <p:cNvPr id="1119" name="Shape 1117"/>
           <p:cNvSpPr/>
           <p:nvPr/>
         </p:nvSpPr>
@@ -44370,7 +44306,7 @@
       </p:sp>
       <p:sp>
         <p:nvSpPr>
-          <p:cNvPr id="1122" name="Text 1120"/>
+          <p:cNvPr id="1120" name="Text 1118"/>
           <p:cNvSpPr/>
           <p:nvPr/>
         </p:nvSpPr>
@@ -44409,7 +44345,7 @@
       </p:sp>
       <p:sp>
         <p:nvSpPr>
-          <p:cNvPr id="1123" name="Shape 1121"/>
+          <p:cNvPr id="1121" name="Shape 1119"/>
           <p:cNvSpPr/>
           <p:nvPr/>
         </p:nvSpPr>
@@ -44434,7 +44370,7 @@
       </p:sp>
       <p:sp>
         <p:nvSpPr>
-          <p:cNvPr id="1124" name="Text 1122"/>
+          <p:cNvPr id="1122" name="Text 1120"/>
           <p:cNvSpPr/>
           <p:nvPr/>
         </p:nvSpPr>
@@ -44473,7 +44409,7 @@
       </p:sp>
       <p:sp>
         <p:nvSpPr>
-          <p:cNvPr id="1125" name="Shape 1123"/>
+          <p:cNvPr id="1123" name="Shape 1121"/>
           <p:cNvSpPr/>
           <p:nvPr/>
         </p:nvSpPr>
@@ -44498,7 +44434,7 @@
       </p:sp>
       <p:sp>
         <p:nvSpPr>
-          <p:cNvPr id="1126" name="Text 1124"/>
+          <p:cNvPr id="1124" name="Text 1122"/>
           <p:cNvSpPr/>
           <p:nvPr/>
         </p:nvSpPr>
@@ -44537,7 +44473,7 @@
       </p:sp>
       <p:sp>
         <p:nvSpPr>
-          <p:cNvPr id="1127" name="Shape 1125"/>
+          <p:cNvPr id="1125" name="Shape 1123"/>
           <p:cNvSpPr/>
           <p:nvPr/>
         </p:nvSpPr>
@@ -44562,7 +44498,7 @@
       </p:sp>
       <p:sp>
         <p:nvSpPr>
-          <p:cNvPr id="1128" name="Text 1126"/>
+          <p:cNvPr id="1126" name="Text 1124"/>
           <p:cNvSpPr/>
           <p:nvPr/>
         </p:nvSpPr>
@@ -44601,7 +44537,7 @@
       </p:sp>
       <p:sp>
         <p:nvSpPr>
-          <p:cNvPr id="1129" name="Shape 1127"/>
+          <p:cNvPr id="1127" name="Shape 1125"/>
           <p:cNvSpPr/>
           <p:nvPr/>
         </p:nvSpPr>
@@ -44626,7 +44562,7 @@
       </p:sp>
       <p:sp>
         <p:nvSpPr>
-          <p:cNvPr id="1130" name="Text 1128"/>
+          <p:cNvPr id="1128" name="Text 1126"/>
           <p:cNvSpPr/>
           <p:nvPr/>
         </p:nvSpPr>
@@ -44665,7 +44601,7 @@
       </p:sp>
       <p:sp>
         <p:nvSpPr>
-          <p:cNvPr id="1131" name="Shape 1129"/>
+          <p:cNvPr id="1129" name="Shape 1127"/>
           <p:cNvSpPr/>
           <p:nvPr/>
         </p:nvSpPr>
@@ -44690,7 +44626,7 @@
       </p:sp>
       <p:sp>
         <p:nvSpPr>
-          <p:cNvPr id="1132" name="Text 1130"/>
+          <p:cNvPr id="1130" name="Text 1128"/>
           <p:cNvSpPr/>
           <p:nvPr/>
         </p:nvSpPr>
@@ -44729,7 +44665,7 @@
       </p:sp>
       <p:sp>
         <p:nvSpPr>
-          <p:cNvPr id="1133" name="Shape 1131"/>
+          <p:cNvPr id="1131" name="Shape 1129"/>
           <p:cNvSpPr/>
           <p:nvPr/>
         </p:nvSpPr>
@@ -44754,7 +44690,7 @@
       </p:sp>
       <p:sp>
         <p:nvSpPr>
-          <p:cNvPr id="1134" name="Text 1132"/>
+          <p:cNvPr id="1132" name="Text 1130"/>
           <p:cNvSpPr/>
           <p:nvPr/>
         </p:nvSpPr>
@@ -44793,7 +44729,7 @@
       </p:sp>
       <p:sp>
         <p:nvSpPr>
-          <p:cNvPr id="1135" name="Shape 1133"/>
+          <p:cNvPr id="1133" name="Shape 1131"/>
           <p:cNvSpPr/>
           <p:nvPr/>
         </p:nvSpPr>
@@ -44818,7 +44754,7 @@
       </p:sp>
       <p:sp>
         <p:nvSpPr>
-          <p:cNvPr id="1136" name="Text 1134"/>
+          <p:cNvPr id="1134" name="Text 1132"/>
           <p:cNvSpPr/>
           <p:nvPr/>
         </p:nvSpPr>
@@ -44857,7 +44793,7 @@
       </p:sp>
       <p:sp>
         <p:nvSpPr>
-          <p:cNvPr id="1137" name="Shape 1135"/>
+          <p:cNvPr id="1135" name="Shape 1133"/>
           <p:cNvSpPr/>
           <p:nvPr/>
         </p:nvSpPr>
@@ -44882,7 +44818,7 @@
       </p:sp>
       <p:sp>
         <p:nvSpPr>
-          <p:cNvPr id="1138" name="Text 1136"/>
+          <p:cNvPr id="1136" name="Text 1134"/>
           <p:cNvSpPr/>
           <p:nvPr/>
         </p:nvSpPr>
@@ -44921,7 +44857,7 @@
       </p:sp>
       <p:sp>
         <p:nvSpPr>
-          <p:cNvPr id="1139" name="Shape 1137"/>
+          <p:cNvPr id="1137" name="Shape 1135"/>
           <p:cNvSpPr/>
           <p:nvPr/>
         </p:nvSpPr>
@@ -44946,7 +44882,7 @@
       </p:sp>
       <p:sp>
         <p:nvSpPr>
-          <p:cNvPr id="1140" name="Text 1138"/>
+          <p:cNvPr id="1138" name="Text 1136"/>
           <p:cNvSpPr/>
           <p:nvPr/>
         </p:nvSpPr>
@@ -44985,7 +44921,7 @@
       </p:sp>
       <p:sp>
         <p:nvSpPr>
-          <p:cNvPr id="1141" name="Shape 1139"/>
+          <p:cNvPr id="1139" name="Shape 1137"/>
           <p:cNvSpPr/>
           <p:nvPr/>
         </p:nvSpPr>
@@ -45010,7 +44946,7 @@
       </p:sp>
       <p:sp>
         <p:nvSpPr>
-          <p:cNvPr id="1142" name="Text 1140"/>
+          <p:cNvPr id="1140" name="Text 1138"/>
           <p:cNvSpPr/>
           <p:nvPr/>
         </p:nvSpPr>
@@ -45049,7 +44985,7 @@
       </p:sp>
       <p:sp>
         <p:nvSpPr>
-          <p:cNvPr id="1143" name="Shape 1141"/>
+          <p:cNvPr id="1141" name="Shape 1139"/>
           <p:cNvSpPr/>
           <p:nvPr/>
         </p:nvSpPr>
@@ -45074,7 +45010,7 @@
       </p:sp>
       <p:sp>
         <p:nvSpPr>
-          <p:cNvPr id="1144" name="Text 1142"/>
+          <p:cNvPr id="1142" name="Text 1140"/>
           <p:cNvSpPr/>
           <p:nvPr/>
         </p:nvSpPr>
@@ -45113,7 +45049,7 @@
       </p:sp>
       <p:sp>
         <p:nvSpPr>
-          <p:cNvPr id="1145" name="Shape 1143"/>
+          <p:cNvPr id="1143" name="Shape 1141"/>
           <p:cNvSpPr/>
           <p:nvPr/>
         </p:nvSpPr>
@@ -45138,7 +45074,7 @@
       </p:sp>
       <p:sp>
         <p:nvSpPr>
-          <p:cNvPr id="1146" name="Text 1144"/>
+          <p:cNvPr id="1144" name="Text 1142"/>
           <p:cNvSpPr/>
           <p:nvPr/>
         </p:nvSpPr>
@@ -45177,7 +45113,7 @@
       </p:sp>
       <p:sp>
         <p:nvSpPr>
-          <p:cNvPr id="1147" name="Shape 1145"/>
+          <p:cNvPr id="1145" name="Shape 1143"/>
           <p:cNvSpPr/>
           <p:nvPr/>
         </p:nvSpPr>
@@ -45202,7 +45138,7 @@
       </p:sp>
       <p:sp>
         <p:nvSpPr>
-          <p:cNvPr id="1148" name="Text 1146"/>
+          <p:cNvPr id="1146" name="Text 1144"/>
           <p:cNvSpPr/>
           <p:nvPr/>
         </p:nvSpPr>
@@ -45241,7 +45177,7 @@
       </p:sp>
       <p:sp>
         <p:nvSpPr>
-          <p:cNvPr id="1149" name="Shape 1147"/>
+          <p:cNvPr id="1147" name="Shape 1145"/>
           <p:cNvSpPr/>
           <p:nvPr/>
         </p:nvSpPr>
@@ -45266,7 +45202,7 @@
       </p:sp>
       <p:sp>
         <p:nvSpPr>
-          <p:cNvPr id="1150" name="Text 1148"/>
+          <p:cNvPr id="1148" name="Text 1146"/>
           <p:cNvSpPr/>
           <p:nvPr/>
         </p:nvSpPr>
@@ -45305,7 +45241,7 @@
       </p:sp>
       <p:sp>
         <p:nvSpPr>
-          <p:cNvPr id="1151" name="Shape 1149"/>
+          <p:cNvPr id="1149" name="Shape 1147"/>
           <p:cNvSpPr/>
           <p:nvPr/>
         </p:nvSpPr>
@@ -45330,7 +45266,7 @@
       </p:sp>
       <p:sp>
         <p:nvSpPr>
-          <p:cNvPr id="1152" name="Text 1150"/>
+          <p:cNvPr id="1150" name="Text 1148"/>
           <p:cNvSpPr/>
           <p:nvPr/>
         </p:nvSpPr>
@@ -45369,7 +45305,7 @@
       </p:sp>
       <p:sp>
         <p:nvSpPr>
-          <p:cNvPr id="1153" name="Shape 1151"/>
+          <p:cNvPr id="1151" name="Shape 1149"/>
           <p:cNvSpPr/>
           <p:nvPr/>
         </p:nvSpPr>
@@ -45394,7 +45330,7 @@
       </p:sp>
       <p:sp>
         <p:nvSpPr>
-          <p:cNvPr id="1154" name="Text 1152"/>
+          <p:cNvPr id="1152" name="Text 1150"/>
           <p:cNvSpPr/>
           <p:nvPr/>
         </p:nvSpPr>
@@ -45433,7 +45369,7 @@
       </p:sp>
       <p:sp>
         <p:nvSpPr>
-          <p:cNvPr id="1155" name="Shape 1153"/>
+          <p:cNvPr id="1153" name="Shape 1151"/>
           <p:cNvSpPr/>
           <p:nvPr/>
         </p:nvSpPr>
@@ -45458,7 +45394,7 @@
       </p:sp>
       <p:sp>
         <p:nvSpPr>
-          <p:cNvPr id="1156" name="Text 1154"/>
+          <p:cNvPr id="1154" name="Text 1152"/>
           <p:cNvSpPr/>
           <p:nvPr/>
         </p:nvSpPr>
@@ -45497,7 +45433,7 @@
       </p:sp>
       <p:sp>
         <p:nvSpPr>
-          <p:cNvPr id="1157" name="Shape 1155"/>
+          <p:cNvPr id="1155" name="Shape 1153"/>
           <p:cNvSpPr/>
           <p:nvPr/>
         </p:nvSpPr>
@@ -45522,7 +45458,7 @@
       </p:sp>
       <p:sp>
         <p:nvSpPr>
-          <p:cNvPr id="1158" name="Text 1156"/>
+          <p:cNvPr id="1156" name="Text 1154"/>
           <p:cNvSpPr/>
           <p:nvPr/>
         </p:nvSpPr>
@@ -45561,7 +45497,7 @@
       </p:sp>
       <p:sp>
         <p:nvSpPr>
-          <p:cNvPr id="1159" name="Shape 1157"/>
+          <p:cNvPr id="1157" name="Shape 1155"/>
           <p:cNvSpPr/>
           <p:nvPr/>
         </p:nvSpPr>
@@ -45586,7 +45522,7 @@
       </p:sp>
       <p:sp>
         <p:nvSpPr>
-          <p:cNvPr id="1160" name="Text 1158"/>
+          <p:cNvPr id="1158" name="Text 1156"/>
           <p:cNvSpPr/>
           <p:nvPr/>
         </p:nvSpPr>
@@ -45625,7 +45561,7 @@
       </p:sp>
       <p:sp>
         <p:nvSpPr>
-          <p:cNvPr id="1161" name="Shape 1159"/>
+          <p:cNvPr id="1159" name="Shape 1157"/>
           <p:cNvSpPr/>
           <p:nvPr/>
         </p:nvSpPr>
@@ -45650,7 +45586,7 @@
       </p:sp>
       <p:sp>
         <p:nvSpPr>
-          <p:cNvPr id="1162" name="Text 1160"/>
+          <p:cNvPr id="1160" name="Text 1158"/>
           <p:cNvSpPr/>
           <p:nvPr/>
         </p:nvSpPr>
@@ -45689,7 +45625,7 @@
       </p:sp>
       <p:sp>
         <p:nvSpPr>
-          <p:cNvPr id="1163" name="Shape 1161"/>
+          <p:cNvPr id="1161" name="Shape 1159"/>
           <p:cNvSpPr/>
           <p:nvPr/>
         </p:nvSpPr>
@@ -45714,7 +45650,7 @@
       </p:sp>
       <p:sp>
         <p:nvSpPr>
-          <p:cNvPr id="1164" name="Text 1162"/>
+          <p:cNvPr id="1162" name="Text 1160"/>
           <p:cNvSpPr/>
           <p:nvPr/>
         </p:nvSpPr>
@@ -45753,7 +45689,7 @@
       </p:sp>
       <p:sp>
         <p:nvSpPr>
-          <p:cNvPr id="1165" name="Shape 1163"/>
+          <p:cNvPr id="1163" name="Shape 1161"/>
           <p:cNvSpPr/>
           <p:nvPr/>
         </p:nvSpPr>
@@ -45778,7 +45714,7 @@
       </p:sp>
       <p:sp>
         <p:nvSpPr>
-          <p:cNvPr id="1166" name="Text 1164"/>
+          <p:cNvPr id="1164" name="Text 1162"/>
           <p:cNvSpPr/>
           <p:nvPr/>
         </p:nvSpPr>
@@ -45817,7 +45753,7 @@
       </p:sp>
       <p:sp>
         <p:nvSpPr>
-          <p:cNvPr id="1167" name="Shape 1165"/>
+          <p:cNvPr id="1165" name="Shape 1163"/>
           <p:cNvSpPr/>
           <p:nvPr/>
         </p:nvSpPr>
@@ -45842,7 +45778,7 @@
       </p:sp>
       <p:sp>
         <p:nvSpPr>
-          <p:cNvPr id="1168" name="Text 1166"/>
+          <p:cNvPr id="1166" name="Text 1164"/>
           <p:cNvSpPr/>
           <p:nvPr/>
         </p:nvSpPr>
@@ -45881,7 +45817,7 @@
       </p:sp>
       <p:sp>
         <p:nvSpPr>
-          <p:cNvPr id="1169" name="Shape 1167"/>
+          <p:cNvPr id="1167" name="Shape 1165"/>
           <p:cNvSpPr/>
           <p:nvPr/>
         </p:nvSpPr>
@@ -45906,7 +45842,7 @@
       </p:sp>
       <p:sp>
         <p:nvSpPr>
-          <p:cNvPr id="1170" name="Text 1168"/>
+          <p:cNvPr id="1168" name="Text 1166"/>
           <p:cNvSpPr/>
           <p:nvPr/>
         </p:nvSpPr>
@@ -45945,7 +45881,7 @@
       </p:sp>
       <p:sp>
         <p:nvSpPr>
-          <p:cNvPr id="1171" name="Shape 1169"/>
+          <p:cNvPr id="1169" name="Shape 1167"/>
           <p:cNvSpPr/>
           <p:nvPr/>
         </p:nvSpPr>
@@ -45970,7 +45906,7 @@
       </p:sp>
       <p:sp>
         <p:nvSpPr>
-          <p:cNvPr id="1172" name="Text 1170"/>
+          <p:cNvPr id="1170" name="Text 1168"/>
           <p:cNvSpPr/>
           <p:nvPr/>
         </p:nvSpPr>
@@ -46009,7 +45945,7 @@
       </p:sp>
       <p:sp>
         <p:nvSpPr>
-          <p:cNvPr id="1173" name="Shape 1171"/>
+          <p:cNvPr id="1171" name="Shape 1169"/>
           <p:cNvSpPr/>
           <p:nvPr/>
         </p:nvSpPr>
@@ -46034,7 +45970,7 @@
       </p:sp>
       <p:sp>
         <p:nvSpPr>
-          <p:cNvPr id="1174" name="Text 1172"/>
+          <p:cNvPr id="1172" name="Text 1170"/>
           <p:cNvSpPr/>
           <p:nvPr/>
         </p:nvSpPr>
@@ -46073,7 +46009,7 @@
       </p:sp>
       <p:sp>
         <p:nvSpPr>
-          <p:cNvPr id="1175" name="Shape 1173"/>
+          <p:cNvPr id="1173" name="Shape 1171"/>
           <p:cNvSpPr/>
           <p:nvPr/>
         </p:nvSpPr>
@@ -46098,7 +46034,7 @@
       </p:sp>
       <p:sp>
         <p:nvSpPr>
-          <p:cNvPr id="1176" name="Text 1174"/>
+          <p:cNvPr id="1174" name="Text 1172"/>
           <p:cNvSpPr/>
           <p:nvPr/>
         </p:nvSpPr>
@@ -46137,7 +46073,7 @@
       </p:sp>
       <p:sp>
         <p:nvSpPr>
-          <p:cNvPr id="1177" name="Shape 1175"/>
+          <p:cNvPr id="1175" name="Shape 1173"/>
           <p:cNvSpPr/>
           <p:nvPr/>
         </p:nvSpPr>
@@ -46162,7 +46098,7 @@
       </p:sp>
       <p:sp>
         <p:nvSpPr>
-          <p:cNvPr id="1178" name="Text 1176"/>
+          <p:cNvPr id="1176" name="Text 1174"/>
           <p:cNvSpPr/>
           <p:nvPr/>
         </p:nvSpPr>
@@ -46201,7 +46137,7 @@
       </p:sp>
       <p:sp>
         <p:nvSpPr>
-          <p:cNvPr id="1179" name="Shape 1177"/>
+          <p:cNvPr id="1177" name="Shape 1175"/>
           <p:cNvSpPr/>
           <p:nvPr/>
         </p:nvSpPr>
@@ -46226,7 +46162,7 @@
       </p:sp>
       <p:sp>
         <p:nvSpPr>
-          <p:cNvPr id="1180" name="Text 1178"/>
+          <p:cNvPr id="1178" name="Text 1176"/>
           <p:cNvSpPr/>
           <p:nvPr/>
         </p:nvSpPr>
@@ -46265,7 +46201,7 @@
       </p:sp>
       <p:sp>
         <p:nvSpPr>
-          <p:cNvPr id="1181" name="Shape 1179"/>
+          <p:cNvPr id="1179" name="Shape 1177"/>
           <p:cNvSpPr/>
           <p:nvPr/>
         </p:nvSpPr>
@@ -46290,7 +46226,7 @@
       </p:sp>
       <p:sp>
         <p:nvSpPr>
-          <p:cNvPr id="1182" name="Text 1180"/>
+          <p:cNvPr id="1180" name="Text 1178"/>
           <p:cNvSpPr/>
           <p:nvPr/>
         </p:nvSpPr>
@@ -46329,7 +46265,7 @@
       </p:sp>
       <p:sp>
         <p:nvSpPr>
-          <p:cNvPr id="1183" name="Shape 1181"/>
+          <p:cNvPr id="1181" name="Shape 1179"/>
           <p:cNvSpPr/>
           <p:nvPr/>
         </p:nvSpPr>
@@ -46354,7 +46290,7 @@
       </p:sp>
       <p:sp>
         <p:nvSpPr>
-          <p:cNvPr id="1184" name="Text 1182"/>
+          <p:cNvPr id="1182" name="Text 1180"/>
           <p:cNvSpPr/>
           <p:nvPr/>
         </p:nvSpPr>
@@ -46393,7 +46329,7 @@
       </p:sp>
       <p:sp>
         <p:nvSpPr>
-          <p:cNvPr id="1185" name="Shape 1183"/>
+          <p:cNvPr id="1183" name="Shape 1181"/>
           <p:cNvSpPr/>
           <p:nvPr/>
         </p:nvSpPr>
@@ -46418,7 +46354,7 @@
       </p:sp>
       <p:sp>
         <p:nvSpPr>
-          <p:cNvPr id="1186" name="Text 1184"/>
+          <p:cNvPr id="1184" name="Text 1182"/>
           <p:cNvSpPr/>
           <p:nvPr/>
         </p:nvSpPr>
@@ -46457,7 +46393,7 @@
       </p:sp>
       <p:sp>
         <p:nvSpPr>
-          <p:cNvPr id="1187" name="Shape 1185"/>
+          <p:cNvPr id="1185" name="Shape 1183"/>
           <p:cNvSpPr/>
           <p:nvPr/>
         </p:nvSpPr>
@@ -46482,7 +46418,7 @@
       </p:sp>
       <p:sp>
         <p:nvSpPr>
-          <p:cNvPr id="1188" name="Text 1186"/>
+          <p:cNvPr id="1186" name="Text 1184"/>
           <p:cNvSpPr/>
           <p:nvPr/>
         </p:nvSpPr>
@@ -46521,7 +46457,7 @@
       </p:sp>
       <p:sp>
         <p:nvSpPr>
-          <p:cNvPr id="1189" name="Shape 1187"/>
+          <p:cNvPr id="1187" name="Shape 1185"/>
           <p:cNvSpPr/>
           <p:nvPr/>
         </p:nvSpPr>
@@ -46546,7 +46482,7 @@
       </p:sp>
       <p:sp>
         <p:nvSpPr>
-          <p:cNvPr id="1190" name="Text 1188"/>
+          <p:cNvPr id="1188" name="Text 1186"/>
           <p:cNvSpPr/>
           <p:nvPr/>
         </p:nvSpPr>
@@ -46585,7 +46521,7 @@
       </p:sp>
       <p:sp>
         <p:nvSpPr>
-          <p:cNvPr id="1191" name="Shape 1189"/>
+          <p:cNvPr id="1189" name="Shape 1187"/>
           <p:cNvSpPr/>
           <p:nvPr/>
         </p:nvSpPr>
@@ -46610,7 +46546,7 @@
       </p:sp>
       <p:sp>
         <p:nvSpPr>
-          <p:cNvPr id="1192" name="Text 1190"/>
+          <p:cNvPr id="1190" name="Text 1188"/>
           <p:cNvSpPr/>
           <p:nvPr/>
         </p:nvSpPr>
@@ -46649,7 +46585,7 @@
       </p:sp>
       <p:sp>
         <p:nvSpPr>
-          <p:cNvPr id="1193" name="Shape 1191"/>
+          <p:cNvPr id="1191" name="Shape 1189"/>
           <p:cNvSpPr/>
           <p:nvPr/>
         </p:nvSpPr>
@@ -46674,7 +46610,7 @@
       </p:sp>
       <p:sp>
         <p:nvSpPr>
-          <p:cNvPr id="1194" name="Text 1192"/>
+          <p:cNvPr id="1192" name="Text 1190"/>
           <p:cNvSpPr/>
           <p:nvPr/>
         </p:nvSpPr>
@@ -46713,7 +46649,7 @@
       </p:sp>
       <p:sp>
         <p:nvSpPr>
-          <p:cNvPr id="1195" name="Shape 1193"/>
+          <p:cNvPr id="1193" name="Shape 1191"/>
           <p:cNvSpPr/>
           <p:nvPr/>
         </p:nvSpPr>
@@ -46738,7 +46674,7 @@
       </p:sp>
       <p:sp>
         <p:nvSpPr>
-          <p:cNvPr id="1196" name="Text 1194"/>
+          <p:cNvPr id="1194" name="Text 1192"/>
           <p:cNvSpPr/>
           <p:nvPr/>
         </p:nvSpPr>
@@ -46777,7 +46713,7 @@
       </p:sp>
       <p:sp>
         <p:nvSpPr>
-          <p:cNvPr id="1197" name="Shape 1195"/>
+          <p:cNvPr id="1195" name="Shape 1193"/>
           <p:cNvSpPr/>
           <p:nvPr/>
         </p:nvSpPr>
@@ -46802,7 +46738,7 @@
       </p:sp>
       <p:sp>
         <p:nvSpPr>
-          <p:cNvPr id="1198" name="Text 1196"/>
+          <p:cNvPr id="1196" name="Text 1194"/>
           <p:cNvSpPr/>
           <p:nvPr/>
         </p:nvSpPr>
@@ -46841,7 +46777,7 @@
       </p:sp>
       <p:sp>
         <p:nvSpPr>
-          <p:cNvPr id="1199" name="Shape 1197"/>
+          <p:cNvPr id="1197" name="Shape 1195"/>
           <p:cNvSpPr/>
           <p:nvPr/>
         </p:nvSpPr>
@@ -46866,7 +46802,7 @@
       </p:sp>
       <p:sp>
         <p:nvSpPr>
-          <p:cNvPr id="1200" name="Text 1198"/>
+          <p:cNvPr id="1198" name="Text 1196"/>
           <p:cNvSpPr/>
           <p:nvPr/>
         </p:nvSpPr>
@@ -46905,7 +46841,7 @@
       </p:sp>
       <p:sp>
         <p:nvSpPr>
-          <p:cNvPr id="1201" name="Shape 1199"/>
+          <p:cNvPr id="1199" name="Shape 1197"/>
           <p:cNvSpPr/>
           <p:nvPr/>
         </p:nvSpPr>
@@ -46930,7 +46866,7 @@
       </p:sp>
       <p:sp>
         <p:nvSpPr>
-          <p:cNvPr id="1202" name="Text 1200"/>
+          <p:cNvPr id="1200" name="Text 1198"/>
           <p:cNvSpPr/>
           <p:nvPr/>
         </p:nvSpPr>
@@ -46969,7 +46905,7 @@
       </p:sp>
       <p:sp>
         <p:nvSpPr>
-          <p:cNvPr id="1203" name="Shape 1201"/>
+          <p:cNvPr id="1201" name="Shape 1199"/>
           <p:cNvSpPr/>
           <p:nvPr/>
         </p:nvSpPr>
@@ -46994,7 +46930,7 @@
       </p:sp>
       <p:sp>
         <p:nvSpPr>
-          <p:cNvPr id="1204" name="Text 1202"/>
+          <p:cNvPr id="1202" name="Text 1200"/>
           <p:cNvSpPr/>
           <p:nvPr/>
         </p:nvSpPr>
@@ -47033,7 +46969,7 @@
       </p:sp>
       <p:sp>
         <p:nvSpPr>
-          <p:cNvPr id="1205" name="Shape 1203"/>
+          <p:cNvPr id="1203" name="Shape 1201"/>
           <p:cNvSpPr/>
           <p:nvPr/>
         </p:nvSpPr>
@@ -47058,7 +46994,7 @@
       </p:sp>
       <p:sp>
         <p:nvSpPr>
-          <p:cNvPr id="1206" name="Text 1204"/>
+          <p:cNvPr id="1204" name="Text 1202"/>
           <p:cNvSpPr/>
           <p:nvPr/>
         </p:nvSpPr>
@@ -47097,7 +47033,7 @@
       </p:sp>
       <p:sp>
         <p:nvSpPr>
-          <p:cNvPr id="1207" name="Shape 1205"/>
+          <p:cNvPr id="1205" name="Shape 1203"/>
           <p:cNvSpPr/>
           <p:nvPr/>
         </p:nvSpPr>
@@ -47122,7 +47058,7 @@
       </p:sp>
       <p:sp>
         <p:nvSpPr>
-          <p:cNvPr id="1208" name="Text 1206"/>
+          <p:cNvPr id="1206" name="Text 1204"/>
           <p:cNvSpPr/>
           <p:nvPr/>
         </p:nvSpPr>
@@ -47161,7 +47097,7 @@
       </p:sp>
       <p:sp>
         <p:nvSpPr>
-          <p:cNvPr id="1209" name="Shape 1207"/>
+          <p:cNvPr id="1207" name="Shape 1205"/>
           <p:cNvSpPr/>
           <p:nvPr/>
         </p:nvSpPr>
@@ -47186,7 +47122,7 @@
       </p:sp>
       <p:sp>
         <p:nvSpPr>
-          <p:cNvPr id="1210" name="Text 1208"/>
+          <p:cNvPr id="1208" name="Text 1206"/>
           <p:cNvSpPr/>
           <p:nvPr/>
         </p:nvSpPr>
@@ -47225,7 +47161,7 @@
       </p:sp>
       <p:sp>
         <p:nvSpPr>
-          <p:cNvPr id="1211" name="Shape 1209"/>
+          <p:cNvPr id="1209" name="Shape 1207"/>
           <p:cNvSpPr/>
           <p:nvPr/>
         </p:nvSpPr>
@@ -47250,7 +47186,7 @@
       </p:sp>
       <p:sp>
         <p:nvSpPr>
-          <p:cNvPr id="1212" name="Text 1210"/>
+          <p:cNvPr id="1210" name="Text 1208"/>
           <p:cNvSpPr/>
           <p:nvPr/>
         </p:nvSpPr>
@@ -47289,7 +47225,7 @@
       </p:sp>
       <p:sp>
         <p:nvSpPr>
-          <p:cNvPr id="1213" name="Shape 1211"/>
+          <p:cNvPr id="1211" name="Shape 1209"/>
           <p:cNvSpPr/>
           <p:nvPr/>
         </p:nvSpPr>
@@ -47314,7 +47250,7 @@
       </p:sp>
       <p:sp>
         <p:nvSpPr>
-          <p:cNvPr id="1214" name="Text 1212"/>
+          <p:cNvPr id="1212" name="Text 1210"/>
           <p:cNvSpPr/>
           <p:nvPr/>
         </p:nvSpPr>
@@ -47353,7 +47289,7 @@
       </p:sp>
       <p:sp>
         <p:nvSpPr>
-          <p:cNvPr id="1215" name="Shape 1213"/>
+          <p:cNvPr id="1213" name="Shape 1211"/>
           <p:cNvSpPr/>
           <p:nvPr/>
         </p:nvSpPr>
@@ -47378,7 +47314,7 @@
       </p:sp>
       <p:sp>
         <p:nvSpPr>
-          <p:cNvPr id="1216" name="Text 1214"/>
+          <p:cNvPr id="1214" name="Text 1212"/>
           <p:cNvSpPr/>
           <p:nvPr/>
         </p:nvSpPr>
@@ -47417,7 +47353,7 @@
       </p:sp>
       <p:sp>
         <p:nvSpPr>
-          <p:cNvPr id="1217" name="Shape 1215"/>
+          <p:cNvPr id="1215" name="Shape 1213"/>
           <p:cNvSpPr/>
           <p:nvPr/>
         </p:nvSpPr>
@@ -47442,7 +47378,7 @@
       </p:sp>
       <p:sp>
         <p:nvSpPr>
-          <p:cNvPr id="1218" name="Text 1216"/>
+          <p:cNvPr id="1216" name="Text 1214"/>
           <p:cNvSpPr/>
           <p:nvPr/>
         </p:nvSpPr>
@@ -47481,7 +47417,7 @@
       </p:sp>
       <p:sp>
         <p:nvSpPr>
-          <p:cNvPr id="1219" name="Shape 1217"/>
+          <p:cNvPr id="1217" name="Shape 1215"/>
           <p:cNvSpPr/>
           <p:nvPr/>
         </p:nvSpPr>
@@ -47506,7 +47442,7 @@
       </p:sp>
       <p:sp>
         <p:nvSpPr>
-          <p:cNvPr id="1220" name="Text 1218"/>
+          <p:cNvPr id="1218" name="Text 1216"/>
           <p:cNvSpPr/>
           <p:nvPr/>
         </p:nvSpPr>
@@ -47545,7 +47481,7 @@
       </p:sp>
       <p:sp>
         <p:nvSpPr>
-          <p:cNvPr id="1221" name="Shape 1219"/>
+          <p:cNvPr id="1219" name="Shape 1217"/>
           <p:cNvSpPr/>
           <p:nvPr/>
         </p:nvSpPr>
@@ -47570,7 +47506,7 @@
       </p:sp>
       <p:sp>
         <p:nvSpPr>
-          <p:cNvPr id="1222" name="Text 1220"/>
+          <p:cNvPr id="1220" name="Text 1218"/>
           <p:cNvSpPr/>
           <p:nvPr/>
         </p:nvSpPr>
@@ -47609,7 +47545,7 @@
       </p:sp>
       <p:sp>
         <p:nvSpPr>
-          <p:cNvPr id="1223" name="Shape 1221"/>
+          <p:cNvPr id="1221" name="Shape 1219"/>
           <p:cNvSpPr/>
           <p:nvPr/>
         </p:nvSpPr>
@@ -47634,7 +47570,7 @@
       </p:sp>
       <p:sp>
         <p:nvSpPr>
-          <p:cNvPr id="1224" name="Text 1222"/>
+          <p:cNvPr id="1222" name="Text 1220"/>
           <p:cNvSpPr/>
           <p:nvPr/>
         </p:nvSpPr>
@@ -47673,7 +47609,7 @@
       </p:sp>
       <p:sp>
         <p:nvSpPr>
-          <p:cNvPr id="1225" name="Shape 1223"/>
+          <p:cNvPr id="1223" name="Shape 1221"/>
           <p:cNvSpPr/>
           <p:nvPr/>
         </p:nvSpPr>
@@ -47698,7 +47634,7 @@
       </p:sp>
       <p:sp>
         <p:nvSpPr>
-          <p:cNvPr id="1226" name="Text 1224"/>
+          <p:cNvPr id="1224" name="Text 1222"/>
           <p:cNvSpPr/>
           <p:nvPr/>
         </p:nvSpPr>
@@ -47737,7 +47673,7 @@
       </p:sp>
       <p:sp>
         <p:nvSpPr>
-          <p:cNvPr id="1227" name="Shape 1225"/>
+          <p:cNvPr id="1225" name="Shape 1223"/>
           <p:cNvSpPr/>
           <p:nvPr/>
         </p:nvSpPr>
@@ -47762,7 +47698,7 @@
       </p:sp>
       <p:sp>
         <p:nvSpPr>
-          <p:cNvPr id="1228" name="Text 1226"/>
+          <p:cNvPr id="1226" name="Text 1224"/>
           <p:cNvSpPr/>
           <p:nvPr/>
         </p:nvSpPr>
@@ -47801,7 +47737,7 @@
       </p:sp>
       <p:sp>
         <p:nvSpPr>
-          <p:cNvPr id="1229" name="Shape 1227"/>
+          <p:cNvPr id="1227" name="Shape 1225"/>
           <p:cNvSpPr/>
           <p:nvPr/>
         </p:nvSpPr>
@@ -47826,7 +47762,7 @@
       </p:sp>
       <p:sp>
         <p:nvSpPr>
-          <p:cNvPr id="1230" name="Text 1228"/>
+          <p:cNvPr id="1228" name="Text 1226"/>
           <p:cNvSpPr/>
           <p:nvPr/>
         </p:nvSpPr>
@@ -47865,7 +47801,7 @@
       </p:sp>
       <p:sp>
         <p:nvSpPr>
-          <p:cNvPr id="1231" name="Shape 1229"/>
+          <p:cNvPr id="1229" name="Shape 1227"/>
           <p:cNvSpPr/>
           <p:nvPr/>
         </p:nvSpPr>
@@ -47890,7 +47826,7 @@
       </p:sp>
       <p:sp>
         <p:nvSpPr>
-          <p:cNvPr id="1232" name="Text 1230"/>
+          <p:cNvPr id="1230" name="Text 1228"/>
           <p:cNvSpPr/>
           <p:nvPr/>
         </p:nvSpPr>
@@ -47929,7 +47865,7 @@
       </p:sp>
       <p:sp>
         <p:nvSpPr>
-          <p:cNvPr id="1233" name="Shape 1231"/>
+          <p:cNvPr id="1231" name="Shape 1229"/>
           <p:cNvSpPr/>
           <p:nvPr/>
         </p:nvSpPr>
@@ -47954,7 +47890,7 @@
       </p:sp>
       <p:sp>
         <p:nvSpPr>
-          <p:cNvPr id="1234" name="Text 1232"/>
+          <p:cNvPr id="1232" name="Text 1230"/>
           <p:cNvSpPr/>
           <p:nvPr/>
         </p:nvSpPr>
@@ -47993,7 +47929,7 @@
       </p:sp>
       <p:sp>
         <p:nvSpPr>
-          <p:cNvPr id="1235" name="Shape 1233"/>
+          <p:cNvPr id="1233" name="Shape 1231"/>
           <p:cNvSpPr/>
           <p:nvPr/>
         </p:nvSpPr>
@@ -48018,7 +47954,7 @@
       </p:sp>
       <p:sp>
         <p:nvSpPr>
-          <p:cNvPr id="1236" name="Text 1234"/>
+          <p:cNvPr id="1234" name="Text 1232"/>
           <p:cNvSpPr/>
           <p:nvPr/>
         </p:nvSpPr>
@@ -48057,7 +47993,7 @@
       </p:sp>
       <p:sp>
         <p:nvSpPr>
-          <p:cNvPr id="1237" name="Shape 1235"/>
+          <p:cNvPr id="1235" name="Shape 1233"/>
           <p:cNvSpPr/>
           <p:nvPr/>
         </p:nvSpPr>
@@ -48082,7 +48018,7 @@
       </p:sp>
       <p:sp>
         <p:nvSpPr>
-          <p:cNvPr id="1238" name="Text 1236"/>
+          <p:cNvPr id="1236" name="Text 1234"/>
           <p:cNvSpPr/>
           <p:nvPr/>
         </p:nvSpPr>
@@ -48121,7 +48057,7 @@
       </p:sp>
       <p:sp>
         <p:nvSpPr>
-          <p:cNvPr id="1239" name="Shape 1237"/>
+          <p:cNvPr id="1237" name="Shape 1235"/>
           <p:cNvSpPr/>
           <p:nvPr/>
         </p:nvSpPr>
@@ -48146,7 +48082,7 @@
       </p:sp>
       <p:sp>
         <p:nvSpPr>
-          <p:cNvPr id="1240" name="Text 1238"/>
+          <p:cNvPr id="1238" name="Text 1236"/>
           <p:cNvSpPr/>
           <p:nvPr/>
         </p:nvSpPr>
@@ -48185,7 +48121,7 @@
       </p:sp>
       <p:sp>
         <p:nvSpPr>
-          <p:cNvPr id="1241" name="Shape 1239"/>
+          <p:cNvPr id="1239" name="Shape 1237"/>
           <p:cNvSpPr/>
           <p:nvPr/>
         </p:nvSpPr>
@@ -48210,7 +48146,7 @@
       </p:sp>
       <p:sp>
         <p:nvSpPr>
-          <p:cNvPr id="1242" name="Text 1240"/>
+          <p:cNvPr id="1240" name="Text 1238"/>
           <p:cNvSpPr/>
           <p:nvPr/>
         </p:nvSpPr>
@@ -48249,7 +48185,7 @@
       </p:sp>
       <p:sp>
         <p:nvSpPr>
-          <p:cNvPr id="1243" name="Shape 1241"/>
+          <p:cNvPr id="1241" name="Shape 1239"/>
           <p:cNvSpPr/>
           <p:nvPr/>
         </p:nvSpPr>
@@ -48274,7 +48210,7 @@
       </p:sp>
       <p:sp>
         <p:nvSpPr>
-          <p:cNvPr id="1244" name="Text 1242"/>
+          <p:cNvPr id="1242" name="Text 1240"/>
           <p:cNvSpPr/>
           <p:nvPr/>
         </p:nvSpPr>
@@ -48313,7 +48249,7 @@
       </p:sp>
       <p:sp>
         <p:nvSpPr>
-          <p:cNvPr id="1245" name="Shape 1243"/>
+          <p:cNvPr id="1243" name="Shape 1241"/>
           <p:cNvSpPr/>
           <p:nvPr/>
         </p:nvSpPr>
@@ -48338,7 +48274,7 @@
       </p:sp>
       <p:sp>
         <p:nvSpPr>
-          <p:cNvPr id="1246" name="Text 1244"/>
+          <p:cNvPr id="1244" name="Text 1242"/>
           <p:cNvSpPr/>
           <p:nvPr/>
         </p:nvSpPr>
@@ -48377,7 +48313,7 @@
       </p:sp>
       <p:sp>
         <p:nvSpPr>
-          <p:cNvPr id="1247" name="Shape 1245"/>
+          <p:cNvPr id="1245" name="Shape 1243"/>
           <p:cNvSpPr/>
           <p:nvPr/>
         </p:nvSpPr>
@@ -48402,7 +48338,7 @@
       </p:sp>
       <p:sp>
         <p:nvSpPr>
-          <p:cNvPr id="1248" name="Text 1246"/>
+          <p:cNvPr id="1246" name="Text 1244"/>
           <p:cNvSpPr/>
           <p:nvPr/>
         </p:nvSpPr>
@@ -48441,7 +48377,7 @@
       </p:sp>
       <p:sp>
         <p:nvSpPr>
-          <p:cNvPr id="1249" name="Shape 1247"/>
+          <p:cNvPr id="1247" name="Shape 1245"/>
           <p:cNvSpPr/>
           <p:nvPr/>
         </p:nvSpPr>
@@ -48466,7 +48402,7 @@
       </p:sp>
       <p:sp>
         <p:nvSpPr>
-          <p:cNvPr id="1250" name="Text 1248"/>
+          <p:cNvPr id="1248" name="Text 1246"/>
           <p:cNvSpPr/>
           <p:nvPr/>
         </p:nvSpPr>
@@ -48505,7 +48441,7 @@
       </p:sp>
       <p:sp>
         <p:nvSpPr>
-          <p:cNvPr id="1251" name="Shape 1249"/>
+          <p:cNvPr id="1249" name="Shape 1247"/>
           <p:cNvSpPr/>
           <p:nvPr/>
         </p:nvSpPr>
@@ -48530,7 +48466,7 @@
       </p:sp>
       <p:sp>
         <p:nvSpPr>
-          <p:cNvPr id="1252" name="Text 1250"/>
+          <p:cNvPr id="1250" name="Text 1248"/>
           <p:cNvSpPr/>
           <p:nvPr/>
         </p:nvSpPr>
@@ -48569,7 +48505,7 @@
       </p:sp>
       <p:sp>
         <p:nvSpPr>
-          <p:cNvPr id="1253" name="Shape 1251"/>
+          <p:cNvPr id="1251" name="Shape 1249"/>
           <p:cNvSpPr/>
           <p:nvPr/>
         </p:nvSpPr>
@@ -48594,7 +48530,7 @@
       </p:sp>
       <p:sp>
         <p:nvSpPr>
-          <p:cNvPr id="1254" name="Text 1252"/>
+          <p:cNvPr id="1252" name="Text 1250"/>
           <p:cNvSpPr/>
           <p:nvPr/>
         </p:nvSpPr>
@@ -48633,7 +48569,7 @@
       </p:sp>
       <p:sp>
         <p:nvSpPr>
-          <p:cNvPr id="1255" name="Shape 1253"/>
+          <p:cNvPr id="1253" name="Shape 1251"/>
           <p:cNvSpPr/>
           <p:nvPr/>
         </p:nvSpPr>
@@ -48658,7 +48594,7 @@
       </p:sp>
       <p:sp>
         <p:nvSpPr>
-          <p:cNvPr id="1256" name="Text 1254"/>
+          <p:cNvPr id="1254" name="Text 1252"/>
           <p:cNvSpPr/>
           <p:nvPr/>
         </p:nvSpPr>
@@ -48697,7 +48633,7 @@
       </p:sp>
       <p:sp>
         <p:nvSpPr>
-          <p:cNvPr id="1257" name="Shape 1255"/>
+          <p:cNvPr id="1255" name="Shape 1253"/>
           <p:cNvSpPr/>
           <p:nvPr/>
         </p:nvSpPr>
@@ -48722,7 +48658,7 @@
       </p:sp>
       <p:sp>
         <p:nvSpPr>
-          <p:cNvPr id="1258" name="Text 1256"/>
+          <p:cNvPr id="1256" name="Text 1254"/>
           <p:cNvSpPr/>
           <p:nvPr/>
         </p:nvSpPr>
@@ -48761,7 +48697,7 @@
       </p:sp>
       <p:sp>
         <p:nvSpPr>
-          <p:cNvPr id="1259" name="Shape 1257"/>
+          <p:cNvPr id="1257" name="Shape 1255"/>
           <p:cNvSpPr/>
           <p:nvPr/>
         </p:nvSpPr>
@@ -48786,7 +48722,7 @@
       </p:sp>
       <p:sp>
         <p:nvSpPr>
-          <p:cNvPr id="1260" name="Text 1258"/>
+          <p:cNvPr id="1258" name="Text 1256"/>
           <p:cNvSpPr/>
           <p:nvPr/>
         </p:nvSpPr>
@@ -48825,7 +48761,7 @@
       </p:sp>
       <p:sp>
         <p:nvSpPr>
-          <p:cNvPr id="1261" name="Shape 1259"/>
+          <p:cNvPr id="1259" name="Shape 1257"/>
           <p:cNvSpPr/>
           <p:nvPr/>
         </p:nvSpPr>
@@ -48850,7 +48786,7 @@
       </p:sp>
       <p:sp>
         <p:nvSpPr>
-          <p:cNvPr id="1262" name="Text 1260"/>
+          <p:cNvPr id="1260" name="Text 1258"/>
           <p:cNvSpPr/>
           <p:nvPr/>
         </p:nvSpPr>
@@ -48889,7 +48825,7 @@
       </p:sp>
       <p:sp>
         <p:nvSpPr>
-          <p:cNvPr id="1263" name="Shape 1261"/>
+          <p:cNvPr id="1261" name="Shape 1259"/>
           <p:cNvSpPr/>
           <p:nvPr/>
         </p:nvSpPr>
@@ -48914,7 +48850,7 @@
       </p:sp>
       <p:sp>
         <p:nvSpPr>
-          <p:cNvPr id="1264" name="Text 1262"/>
+          <p:cNvPr id="1262" name="Text 1260"/>
           <p:cNvSpPr/>
           <p:nvPr/>
         </p:nvSpPr>
@@ -48953,7 +48889,7 @@
       </p:sp>
       <p:sp>
         <p:nvSpPr>
-          <p:cNvPr id="1265" name="Shape 1263"/>
+          <p:cNvPr id="1263" name="Shape 1261"/>
           <p:cNvSpPr/>
           <p:nvPr/>
         </p:nvSpPr>
@@ -48978,7 +48914,7 @@
       </p:sp>
       <p:sp>
         <p:nvSpPr>
-          <p:cNvPr id="1266" name="Text 1264"/>
+          <p:cNvPr id="1264" name="Text 1262"/>
           <p:cNvSpPr/>
           <p:nvPr/>
         </p:nvSpPr>
@@ -49017,7 +48953,7 @@
       </p:sp>
       <p:sp>
         <p:nvSpPr>
-          <p:cNvPr id="1267" name="Shape 1265"/>
+          <p:cNvPr id="1265" name="Shape 1263"/>
           <p:cNvSpPr/>
           <p:nvPr/>
         </p:nvSpPr>
@@ -49042,7 +48978,7 @@
       </p:sp>
       <p:sp>
         <p:nvSpPr>
-          <p:cNvPr id="1268" name="Text 1266"/>
+          <p:cNvPr id="1266" name="Text 1264"/>
           <p:cNvSpPr/>
           <p:nvPr/>
         </p:nvSpPr>
@@ -49081,7 +49017,7 @@
       </p:sp>
       <p:sp>
         <p:nvSpPr>
-          <p:cNvPr id="1269" name="Shape 1267"/>
+          <p:cNvPr id="1267" name="Shape 1265"/>
           <p:cNvSpPr/>
           <p:nvPr/>
         </p:nvSpPr>
@@ -49106,7 +49042,7 @@
       </p:sp>
       <p:sp>
         <p:nvSpPr>
-          <p:cNvPr id="1270" name="Text 1268"/>
+          <p:cNvPr id="1268" name="Text 1266"/>
           <p:cNvSpPr/>
           <p:nvPr/>
         </p:nvSpPr>
@@ -49145,7 +49081,7 @@
       </p:sp>
       <p:sp>
         <p:nvSpPr>
-          <p:cNvPr id="1271" name="Shape 1269"/>
+          <p:cNvPr id="1269" name="Shape 1267"/>
           <p:cNvSpPr/>
           <p:nvPr/>
         </p:nvSpPr>
@@ -49170,7 +49106,7 @@
       </p:sp>
       <p:sp>
         <p:nvSpPr>
-          <p:cNvPr id="1272" name="Text 1270"/>
+          <p:cNvPr id="1270" name="Text 1268"/>
           <p:cNvSpPr/>
           <p:nvPr/>
         </p:nvSpPr>
@@ -49209,7 +49145,7 @@
       </p:sp>
       <p:sp>
         <p:nvSpPr>
-          <p:cNvPr id="1273" name="Shape 1271"/>
+          <p:cNvPr id="1271" name="Shape 1269"/>
           <p:cNvSpPr/>
           <p:nvPr/>
         </p:nvSpPr>
@@ -49234,7 +49170,7 @@
       </p:sp>
       <p:sp>
         <p:nvSpPr>
-          <p:cNvPr id="1274" name="Text 1272"/>
+          <p:cNvPr id="1272" name="Text 1270"/>
           <p:cNvSpPr/>
           <p:nvPr/>
         </p:nvSpPr>
@@ -49273,7 +49209,7 @@
       </p:sp>
       <p:sp>
         <p:nvSpPr>
-          <p:cNvPr id="1275" name="Shape 1273"/>
+          <p:cNvPr id="1273" name="Shape 1271"/>
           <p:cNvSpPr/>
           <p:nvPr/>
         </p:nvSpPr>
@@ -49298,7 +49234,7 @@
       </p:sp>
       <p:sp>
         <p:nvSpPr>
-          <p:cNvPr id="1276" name="Text 1274"/>
+          <p:cNvPr id="1274" name="Text 1272"/>
           <p:cNvSpPr/>
           <p:nvPr/>
         </p:nvSpPr>
@@ -49337,7 +49273,7 @@
       </p:sp>
       <p:sp>
         <p:nvSpPr>
-          <p:cNvPr id="1277" name="Shape 1275"/>
+          <p:cNvPr id="1275" name="Shape 1273"/>
           <p:cNvSpPr/>
           <p:nvPr/>
         </p:nvSpPr>
@@ -49362,7 +49298,7 @@
       </p:sp>
       <p:sp>
         <p:nvSpPr>
-          <p:cNvPr id="1278" name="Text 1276"/>
+          <p:cNvPr id="1276" name="Text 1274"/>
           <p:cNvSpPr/>
           <p:nvPr/>
         </p:nvSpPr>
@@ -49401,7 +49337,7 @@
       </p:sp>
       <p:sp>
         <p:nvSpPr>
-          <p:cNvPr id="1279" name="Shape 1277"/>
+          <p:cNvPr id="1277" name="Shape 1275"/>
           <p:cNvSpPr/>
           <p:nvPr/>
         </p:nvSpPr>
@@ -49426,7 +49362,7 @@
       </p:sp>
       <p:sp>
         <p:nvSpPr>
-          <p:cNvPr id="1280" name="Text 1278"/>
+          <p:cNvPr id="1278" name="Text 1276"/>
           <p:cNvSpPr/>
           <p:nvPr/>
         </p:nvSpPr>
@@ -49465,7 +49401,7 @@
       </p:sp>
       <p:sp>
         <p:nvSpPr>
-          <p:cNvPr id="1281" name="Shape 1279"/>
+          <p:cNvPr id="1279" name="Shape 1277"/>
           <p:cNvSpPr/>
           <p:nvPr/>
         </p:nvSpPr>
@@ -49490,7 +49426,7 @@
       </p:sp>
       <p:sp>
         <p:nvSpPr>
-          <p:cNvPr id="1282" name="Text 1280"/>
+          <p:cNvPr id="1280" name="Text 1278"/>
           <p:cNvSpPr/>
           <p:nvPr/>
         </p:nvSpPr>
@@ -49529,7 +49465,7 @@
       </p:sp>
       <p:sp>
         <p:nvSpPr>
-          <p:cNvPr id="1283" name="Shape 1281"/>
+          <p:cNvPr id="1281" name="Shape 1279"/>
           <p:cNvSpPr/>
           <p:nvPr/>
         </p:nvSpPr>
@@ -49554,7 +49490,7 @@
       </p:sp>
       <p:sp>
         <p:nvSpPr>
-          <p:cNvPr id="1284" name="Text 1282"/>
+          <p:cNvPr id="1282" name="Text 1280"/>
           <p:cNvSpPr/>
           <p:nvPr/>
         </p:nvSpPr>
@@ -49593,7 +49529,7 @@
       </p:sp>
       <p:sp>
         <p:nvSpPr>
-          <p:cNvPr id="1285" name="Shape 1283"/>
+          <p:cNvPr id="1283" name="Shape 1281"/>
           <p:cNvSpPr/>
           <p:nvPr/>
         </p:nvSpPr>
@@ -49618,7 +49554,7 @@
       </p:sp>
       <p:sp>
         <p:nvSpPr>
-          <p:cNvPr id="1286" name="Text 1284"/>
+          <p:cNvPr id="1284" name="Text 1282"/>
           <p:cNvSpPr/>
           <p:nvPr/>
         </p:nvSpPr>
@@ -49657,7 +49593,7 @@
       </p:sp>
       <p:sp>
         <p:nvSpPr>
-          <p:cNvPr id="1287" name="Shape 1285"/>
+          <p:cNvPr id="1285" name="Shape 1283"/>
           <p:cNvSpPr/>
           <p:nvPr/>
         </p:nvSpPr>
@@ -49682,7 +49618,7 @@
       </p:sp>
       <p:sp>
         <p:nvSpPr>
-          <p:cNvPr id="1288" name="Text 1286"/>
+          <p:cNvPr id="1286" name="Text 1284"/>
           <p:cNvSpPr/>
           <p:nvPr/>
         </p:nvSpPr>
@@ -49721,7 +49657,7 @@
       </p:sp>
       <p:sp>
         <p:nvSpPr>
-          <p:cNvPr id="1289" name="Shape 1287"/>
+          <p:cNvPr id="1287" name="Shape 1285"/>
           <p:cNvSpPr/>
           <p:nvPr/>
         </p:nvSpPr>
@@ -49746,7 +49682,7 @@
       </p:sp>
       <p:sp>
         <p:nvSpPr>
-          <p:cNvPr id="1290" name="Text 1288"/>
+          <p:cNvPr id="1288" name="Text 1286"/>
           <p:cNvSpPr/>
           <p:nvPr/>
         </p:nvSpPr>
@@ -49785,7 +49721,7 @@
       </p:sp>
       <p:sp>
         <p:nvSpPr>
-          <p:cNvPr id="1291" name="Shape 1289"/>
+          <p:cNvPr id="1289" name="Shape 1287"/>
           <p:cNvSpPr/>
           <p:nvPr/>
         </p:nvSpPr>
@@ -49810,7 +49746,7 @@
       </p:sp>
       <p:sp>
         <p:nvSpPr>
-          <p:cNvPr id="1292" name="Text 1290"/>
+          <p:cNvPr id="1290" name="Text 1288"/>
           <p:cNvSpPr/>
           <p:nvPr/>
         </p:nvSpPr>
@@ -49849,7 +49785,7 @@
       </p:sp>
       <p:sp>
         <p:nvSpPr>
-          <p:cNvPr id="1293" name="Shape 1291"/>
+          <p:cNvPr id="1291" name="Shape 1289"/>
           <p:cNvSpPr/>
           <p:nvPr/>
         </p:nvSpPr>
@@ -49874,7 +49810,7 @@
       </p:sp>
       <p:sp>
         <p:nvSpPr>
-          <p:cNvPr id="1294" name="Text 1292"/>
+          <p:cNvPr id="1292" name="Text 1290"/>
           <p:cNvSpPr/>
           <p:nvPr/>
         </p:nvSpPr>
@@ -49913,7 +49849,7 @@
       </p:sp>
       <p:sp>
         <p:nvSpPr>
-          <p:cNvPr id="1295" name="Shape 1293"/>
+          <p:cNvPr id="1293" name="Shape 1291"/>
           <p:cNvSpPr/>
           <p:nvPr/>
         </p:nvSpPr>
@@ -49938,7 +49874,7 @@
       </p:sp>
       <p:sp>
         <p:nvSpPr>
-          <p:cNvPr id="1296" name="Text 1294"/>
+          <p:cNvPr id="1294" name="Text 1292"/>
           <p:cNvSpPr/>
           <p:nvPr/>
         </p:nvSpPr>
@@ -49977,7 +49913,7 @@
       </p:sp>
       <p:sp>
         <p:nvSpPr>
-          <p:cNvPr id="1297" name="Shape 1295"/>
+          <p:cNvPr id="1295" name="Shape 1293"/>
           <p:cNvSpPr/>
           <p:nvPr/>
         </p:nvSpPr>
@@ -50002,7 +49938,7 @@
       </p:sp>
       <p:sp>
         <p:nvSpPr>
-          <p:cNvPr id="1298" name="Text 1296"/>
+          <p:cNvPr id="1296" name="Text 1294"/>
           <p:cNvSpPr/>
           <p:nvPr/>
         </p:nvSpPr>
@@ -50041,7 +49977,7 @@
       </p:sp>
       <p:sp>
         <p:nvSpPr>
-          <p:cNvPr id="1299" name="Shape 1297"/>
+          <p:cNvPr id="1297" name="Shape 1295"/>
           <p:cNvSpPr/>
           <p:nvPr/>
         </p:nvSpPr>
@@ -50066,7 +50002,7 @@
       </p:sp>
       <p:sp>
         <p:nvSpPr>
-          <p:cNvPr id="1300" name="Text 1298"/>
+          <p:cNvPr id="1298" name="Text 1296"/>
           <p:cNvSpPr/>
           <p:nvPr/>
         </p:nvSpPr>
@@ -50105,7 +50041,7 @@
       </p:sp>
       <p:sp>
         <p:nvSpPr>
-          <p:cNvPr id="1301" name="Shape 1299"/>
+          <p:cNvPr id="1299" name="Shape 1297"/>
           <p:cNvSpPr/>
           <p:nvPr/>
         </p:nvSpPr>
@@ -50130,7 +50066,7 @@
       </p:sp>
       <p:sp>
         <p:nvSpPr>
-          <p:cNvPr id="1302" name="Text 1300"/>
+          <p:cNvPr id="1300" name="Text 1298"/>
           <p:cNvSpPr/>
           <p:nvPr/>
         </p:nvSpPr>
@@ -50169,7 +50105,7 @@
       </p:sp>
       <p:sp>
         <p:nvSpPr>
-          <p:cNvPr id="1303" name="Shape 1301"/>
+          <p:cNvPr id="1301" name="Shape 1299"/>
           <p:cNvSpPr/>
           <p:nvPr/>
         </p:nvSpPr>
@@ -50194,7 +50130,7 @@
       </p:sp>
       <p:sp>
         <p:nvSpPr>
-          <p:cNvPr id="1304" name="Text 1302"/>
+          <p:cNvPr id="1302" name="Text 1300"/>
           <p:cNvSpPr/>
           <p:nvPr/>
         </p:nvSpPr>
@@ -50233,7 +50169,7 @@
       </p:sp>
       <p:sp>
         <p:nvSpPr>
-          <p:cNvPr id="1305" name="Shape 1303"/>
+          <p:cNvPr id="1303" name="Shape 1301"/>
           <p:cNvSpPr/>
           <p:nvPr/>
         </p:nvSpPr>
@@ -50258,7 +50194,7 @@
       </p:sp>
       <p:sp>
         <p:nvSpPr>
-          <p:cNvPr id="1306" name="Text 1304"/>
+          <p:cNvPr id="1304" name="Text 1302"/>
           <p:cNvSpPr/>
           <p:nvPr/>
         </p:nvSpPr>
@@ -50297,7 +50233,7 @@
       </p:sp>
       <p:sp>
         <p:nvSpPr>
-          <p:cNvPr id="1307" name="Shape 1305"/>
+          <p:cNvPr id="1305" name="Shape 1303"/>
           <p:cNvSpPr/>
           <p:nvPr/>
         </p:nvSpPr>
@@ -50322,7 +50258,7 @@
       </p:sp>
       <p:sp>
         <p:nvSpPr>
-          <p:cNvPr id="1308" name="Text 1306"/>
+          <p:cNvPr id="1306" name="Text 1304"/>
           <p:cNvSpPr/>
           <p:nvPr/>
         </p:nvSpPr>
@@ -50361,7 +50297,7 @@
       </p:sp>
       <p:sp>
         <p:nvSpPr>
-          <p:cNvPr id="1309" name="Shape 1307"/>
+          <p:cNvPr id="1307" name="Shape 1305"/>
           <p:cNvSpPr/>
           <p:nvPr/>
         </p:nvSpPr>
@@ -50386,7 +50322,7 @@
       </p:sp>
       <p:sp>
         <p:nvSpPr>
-          <p:cNvPr id="1310" name="Text 1308"/>
+          <p:cNvPr id="1308" name="Text 1306"/>
           <p:cNvSpPr/>
           <p:nvPr/>
         </p:nvSpPr>
@@ -50425,7 +50361,7 @@
       </p:sp>
       <p:sp>
         <p:nvSpPr>
-          <p:cNvPr id="1311" name="Shape 1309"/>
+          <p:cNvPr id="1309" name="Shape 1307"/>
           <p:cNvSpPr/>
           <p:nvPr/>
         </p:nvSpPr>
@@ -50450,7 +50386,7 @@
       </p:sp>
       <p:sp>
         <p:nvSpPr>
-          <p:cNvPr id="1312" name="Text 1310"/>
+          <p:cNvPr id="1310" name="Text 1308"/>
           <p:cNvSpPr/>
           <p:nvPr/>
         </p:nvSpPr>
@@ -50489,7 +50425,7 @@
       </p:sp>
       <p:sp>
         <p:nvSpPr>
-          <p:cNvPr id="1313" name="Shape 1311"/>
+          <p:cNvPr id="1311" name="Shape 1309"/>
           <p:cNvSpPr/>
           <p:nvPr/>
         </p:nvSpPr>
@@ -50514,7 +50450,7 @@
       </p:sp>
       <p:sp>
         <p:nvSpPr>
-          <p:cNvPr id="1314" name="Text 1312"/>
+          <p:cNvPr id="1312" name="Text 1310"/>
           <p:cNvSpPr/>
           <p:nvPr/>
         </p:nvSpPr>
@@ -50553,7 +50489,7 @@
       </p:sp>
       <p:sp>
         <p:nvSpPr>
-          <p:cNvPr id="1315" name="Shape 1313"/>
+          <p:cNvPr id="1313" name="Shape 1311"/>
           <p:cNvSpPr/>
           <p:nvPr/>
         </p:nvSpPr>
@@ -50578,7 +50514,7 @@
       </p:sp>
       <p:sp>
         <p:nvSpPr>
-          <p:cNvPr id="1316" name="Text 1314"/>
+          <p:cNvPr id="1314" name="Text 1312"/>
           <p:cNvSpPr/>
           <p:nvPr/>
         </p:nvSpPr>
@@ -50617,7 +50553,7 @@
       </p:sp>
       <p:sp>
         <p:nvSpPr>
-          <p:cNvPr id="1317" name="Shape 1315"/>
+          <p:cNvPr id="1315" name="Shape 1313"/>
           <p:cNvSpPr/>
           <p:nvPr/>
         </p:nvSpPr>
@@ -50642,7 +50578,7 @@
       </p:sp>
       <p:sp>
         <p:nvSpPr>
-          <p:cNvPr id="1318" name="Text 1316"/>
+          <p:cNvPr id="1316" name="Text 1314"/>
           <p:cNvSpPr/>
           <p:nvPr/>
         </p:nvSpPr>
@@ -50681,7 +50617,7 @@
       </p:sp>
       <p:sp>
         <p:nvSpPr>
-          <p:cNvPr id="1319" name="Shape 1317"/>
+          <p:cNvPr id="1317" name="Shape 1315"/>
           <p:cNvSpPr/>
           <p:nvPr/>
         </p:nvSpPr>
@@ -50706,7 +50642,7 @@
       </p:sp>
       <p:sp>
         <p:nvSpPr>
-          <p:cNvPr id="1320" name="Text 1318"/>
+          <p:cNvPr id="1318" name="Text 1316"/>
           <p:cNvSpPr/>
           <p:nvPr/>
         </p:nvSpPr>
@@ -50745,7 +50681,7 @@
       </p:sp>
       <p:sp>
         <p:nvSpPr>
-          <p:cNvPr id="1321" name="Shape 1319"/>
+          <p:cNvPr id="1319" name="Shape 1317"/>
           <p:cNvSpPr/>
           <p:nvPr/>
         </p:nvSpPr>
@@ -50770,7 +50706,7 @@
       </p:sp>
       <p:sp>
         <p:nvSpPr>
-          <p:cNvPr id="1322" name="Text 1320"/>
+          <p:cNvPr id="1320" name="Text 1318"/>
           <p:cNvSpPr/>
           <p:nvPr/>
         </p:nvSpPr>
@@ -50809,7 +50745,7 @@
       </p:sp>
       <p:sp>
         <p:nvSpPr>
-          <p:cNvPr id="1323" name="Shape 1321"/>
+          <p:cNvPr id="1321" name="Shape 1319"/>
           <p:cNvSpPr/>
           <p:nvPr/>
         </p:nvSpPr>
@@ -50834,7 +50770,7 @@
       </p:sp>
       <p:sp>
         <p:nvSpPr>
-          <p:cNvPr id="1324" name="Text 1322"/>
+          <p:cNvPr id="1322" name="Text 1320"/>
           <p:cNvSpPr/>
           <p:nvPr/>
         </p:nvSpPr>
@@ -50873,7 +50809,7 @@
       </p:sp>
       <p:sp>
         <p:nvSpPr>
-          <p:cNvPr id="1325" name="Shape 1323"/>
+          <p:cNvPr id="1323" name="Shape 1321"/>
           <p:cNvSpPr/>
           <p:nvPr/>
         </p:nvSpPr>
@@ -50898,7 +50834,7 @@
       </p:sp>
       <p:sp>
         <p:nvSpPr>
-          <p:cNvPr id="1326" name="Text 1324"/>
+          <p:cNvPr id="1324" name="Text 1322"/>
           <p:cNvSpPr/>
           <p:nvPr/>
         </p:nvSpPr>
@@ -50937,7 +50873,7 @@
       </p:sp>
       <p:sp>
         <p:nvSpPr>
-          <p:cNvPr id="1327" name="Shape 1325"/>
+          <p:cNvPr id="1325" name="Shape 1323"/>
           <p:cNvSpPr/>
           <p:nvPr/>
         </p:nvSpPr>
@@ -50962,7 +50898,7 @@
       </p:sp>
       <p:sp>
         <p:nvSpPr>
-          <p:cNvPr id="1328" name="Text 1326"/>
+          <p:cNvPr id="1326" name="Text 1324"/>
           <p:cNvSpPr/>
           <p:nvPr/>
         </p:nvSpPr>
@@ -51001,7 +50937,7 @@
       </p:sp>
       <p:sp>
         <p:nvSpPr>
-          <p:cNvPr id="1329" name="Shape 1327"/>
+          <p:cNvPr id="1327" name="Shape 1325"/>
           <p:cNvSpPr/>
           <p:nvPr/>
         </p:nvSpPr>
@@ -51026,7 +50962,7 @@
       </p:sp>
       <p:sp>
         <p:nvSpPr>
-          <p:cNvPr id="1330" name="Text 1328"/>
+          <p:cNvPr id="1328" name="Text 1326"/>
           <p:cNvSpPr/>
           <p:nvPr/>
         </p:nvSpPr>
@@ -51065,7 +51001,7 @@
       </p:sp>
       <p:sp>
         <p:nvSpPr>
-          <p:cNvPr id="1331" name="Shape 1329"/>
+          <p:cNvPr id="1329" name="Shape 1327"/>
           <p:cNvSpPr/>
           <p:nvPr/>
         </p:nvSpPr>
@@ -51090,7 +51026,7 @@
       </p:sp>
       <p:sp>
         <p:nvSpPr>
-          <p:cNvPr id="1332" name="Text 1330"/>
+          <p:cNvPr id="1330" name="Text 1328"/>
           <p:cNvSpPr/>
           <p:nvPr/>
         </p:nvSpPr>
@@ -51129,7 +51065,7 @@
       </p:sp>
       <p:sp>
         <p:nvSpPr>
-          <p:cNvPr id="1333" name="Shape 1331"/>
+          <p:cNvPr id="1331" name="Shape 1329"/>
           <p:cNvSpPr/>
           <p:nvPr/>
         </p:nvSpPr>
@@ -51154,7 +51090,7 @@
       </p:sp>
       <p:sp>
         <p:nvSpPr>
-          <p:cNvPr id="1334" name="Text 1332"/>
+          <p:cNvPr id="1332" name="Text 1330"/>
           <p:cNvSpPr/>
           <p:nvPr/>
         </p:nvSpPr>
@@ -51193,7 +51129,7 @@
       </p:sp>
       <p:sp>
         <p:nvSpPr>
-          <p:cNvPr id="1335" name="Shape 1333"/>
+          <p:cNvPr id="1333" name="Shape 1331"/>
           <p:cNvSpPr/>
           <p:nvPr/>
         </p:nvSpPr>
@@ -51218,7 +51154,7 @@
       </p:sp>
       <p:sp>
         <p:nvSpPr>
-          <p:cNvPr id="1336" name="Text 1334"/>
+          <p:cNvPr id="1334" name="Text 1332"/>
           <p:cNvSpPr/>
           <p:nvPr/>
         </p:nvSpPr>
@@ -51257,7 +51193,7 @@
       </p:sp>
       <p:sp>
         <p:nvSpPr>
-          <p:cNvPr id="1337" name="Shape 1335"/>
+          <p:cNvPr id="1335" name="Shape 1333"/>
           <p:cNvSpPr/>
           <p:nvPr/>
         </p:nvSpPr>
@@ -51282,7 +51218,7 @@
       </p:sp>
       <p:sp>
         <p:nvSpPr>
-          <p:cNvPr id="1338" name="Text 1336"/>
+          <p:cNvPr id="1336" name="Text 1334"/>
           <p:cNvSpPr/>
           <p:nvPr/>
         </p:nvSpPr>
@@ -51321,7 +51257,7 @@
       </p:sp>
       <p:sp>
         <p:nvSpPr>
-          <p:cNvPr id="1339" name="Shape 1337"/>
+          <p:cNvPr id="1337" name="Shape 1335"/>
           <p:cNvSpPr/>
           <p:nvPr/>
         </p:nvSpPr>
@@ -51346,7 +51282,7 @@
       </p:sp>
       <p:sp>
         <p:nvSpPr>
-          <p:cNvPr id="1340" name="Text 1338"/>
+          <p:cNvPr id="1338" name="Text 1336"/>
           <p:cNvSpPr/>
           <p:nvPr/>
         </p:nvSpPr>
@@ -51385,7 +51321,7 @@
       </p:sp>
       <p:sp>
         <p:nvSpPr>
-          <p:cNvPr id="1341" name="Shape 1339"/>
+          <p:cNvPr id="1339" name="Shape 1337"/>
           <p:cNvSpPr/>
           <p:nvPr/>
         </p:nvSpPr>
@@ -51410,7 +51346,7 @@
       </p:sp>
       <p:sp>
         <p:nvSpPr>
-          <p:cNvPr id="1342" name="Text 1340"/>
+          <p:cNvPr id="1340" name="Text 1338"/>
           <p:cNvSpPr/>
           <p:nvPr/>
         </p:nvSpPr>
@@ -51449,7 +51385,7 @@
       </p:sp>
       <p:sp>
         <p:nvSpPr>
-          <p:cNvPr id="1343" name="Shape 1341"/>
+          <p:cNvPr id="1341" name="Shape 1339"/>
           <p:cNvSpPr/>
           <p:nvPr/>
         </p:nvSpPr>
@@ -51474,7 +51410,7 @@
       </p:sp>
       <p:sp>
         <p:nvSpPr>
-          <p:cNvPr id="1344" name="Text 1342"/>
+          <p:cNvPr id="1342" name="Text 1340"/>
           <p:cNvSpPr/>
           <p:nvPr/>
         </p:nvSpPr>
@@ -51513,7 +51449,7 @@
       </p:sp>
       <p:sp>
         <p:nvSpPr>
-          <p:cNvPr id="1345" name="Shape 1343"/>
+          <p:cNvPr id="1343" name="Shape 1341"/>
           <p:cNvSpPr/>
           <p:nvPr/>
         </p:nvSpPr>
@@ -51538,7 +51474,7 @@
       </p:sp>
       <p:sp>
         <p:nvSpPr>
-          <p:cNvPr id="1346" name="Text 1344"/>
+          <p:cNvPr id="1344" name="Text 1342"/>
           <p:cNvSpPr/>
           <p:nvPr/>
         </p:nvSpPr>
@@ -51577,7 +51513,7 @@
       </p:sp>
       <p:sp>
         <p:nvSpPr>
-          <p:cNvPr id="1347" name="Shape 1345"/>
+          <p:cNvPr id="1345" name="Shape 1343"/>
           <p:cNvSpPr/>
           <p:nvPr/>
         </p:nvSpPr>
@@ -51602,7 +51538,7 @@
       </p:sp>
       <p:sp>
         <p:nvSpPr>
-          <p:cNvPr id="1348" name="Text 1346"/>
+          <p:cNvPr id="1346" name="Text 1344"/>
           <p:cNvSpPr/>
           <p:nvPr/>
         </p:nvSpPr>
@@ -51641,7 +51577,7 @@
       </p:sp>
       <p:sp>
         <p:nvSpPr>
-          <p:cNvPr id="1349" name="Text 1347"/>
+          <p:cNvPr id="1347" name="Text 1345"/>
           <p:cNvSpPr/>
           <p:nvPr/>
         </p:nvSpPr>
@@ -51680,7 +51616,7 @@
       </p:sp>
       <p:sp>
         <p:nvSpPr>
-          <p:cNvPr id="1350" name="Text 1348"/>
+          <p:cNvPr id="1348" name="Text 1346"/>
           <p:cNvSpPr/>
           <p:nvPr/>
         </p:nvSpPr>
@@ -51711,7 +51647,7 @@
                 <a:ea typeface="Arial" pitchFamily="34" charset="-122"/>
                 <a:cs typeface="Arial" pitchFamily="34" charset="-120"/>
               </a:rPr>
-              <a:t>672 parkings · 20.780 plaatsen</a:t>
+              <a:t>671 parkings · 20.765 plaatsen</a:t>
             </a:r>
             <a:endParaRPr lang="en-US" sz="2200" dirty="0"/>
           </a:p>
@@ -51719,7 +51655,7 @@
       </p:sp>
       <p:sp>
         <p:nvSpPr>
-          <p:cNvPr id="1351" name="Text 1349"/>
+          <p:cNvPr id="1349" name="Text 1347"/>
           <p:cNvSpPr/>
           <p:nvPr/>
         </p:nvSpPr>
@@ -51758,7 +51694,7 @@
       </p:sp>
       <p:sp>
         <p:nvSpPr>
-          <p:cNvPr id="1352" name="Text 1350">
+          <p:cNvPr id="1350" name="Text 1348">
             <a:hlinkClick r:id="rId1" tooltip=""/>
           </p:cNvPr>
           <p:cNvSpPr/>
@@ -51806,7 +51742,46 @@
       </p:sp>
       <p:sp>
         <p:nvSpPr>
-          <p:cNvPr id="1353" name="Shape 1351"/>
+          <p:cNvPr id="1351" name="Text 1349"/>
+          <p:cNvSpPr/>
+          <p:nvPr/>
+        </p:nvSpPr>
+        <p:spPr>
+          <a:xfrm>
+            <a:off x="640080" y="6071616"/>
+            <a:ext cx="10058400" cy="237744"/>
+          </a:xfrm>
+          <a:prstGeom prst="rect">
+            <a:avLst/>
+          </a:prstGeom>
+          <a:noFill/>
+          <a:ln/>
+        </p:spPr>
+        <p:txBody>
+          <a:bodyPr wrap="square" lIns="0" tIns="0" rIns="0" bIns="0" rtlCol="0" anchor="ctr"/>
+          <a:lstStyle/>
+          <a:p>
+            <a:pPr indent="0" marL="0">
+              <a:buNone/>
+            </a:pPr>
+            <a:r>
+              <a:rPr lang="en-US" sz="800" i="1" dirty="0">
+                <a:solidFill>
+                  <a:srgbClr val="5A6473"/>
+                </a:solidFill>
+                <a:latin typeface="Arial" pitchFamily="34" charset="0"/>
+                <a:ea typeface="Arial" pitchFamily="34" charset="-122"/>
+                <a:cs typeface="Arial" pitchFamily="34" charset="-120"/>
+              </a:rPr>
+              <a:t>Bron bestaande laadpunten: Departement Mobiliteit en Openbare Werken (Vlaanderen).</a:t>
+            </a:r>
+            <a:endParaRPr lang="en-US" sz="800" dirty="0"/>
+          </a:p>
+        </p:txBody>
+      </p:sp>
+      <p:sp>
+        <p:nvSpPr>
+          <p:cNvPr id="1352" name="Shape 1350"/>
           <p:cNvSpPr/>
           <p:nvPr/>
         </p:nvSpPr>
@@ -51826,7 +51801,7 @@
       </p:sp>
       <p:pic>
         <p:nvPicPr>
-          <p:cNvPr id="1354" name="Image 0" descr="preencoded.png">    </p:cNvPr>
+          <p:cNvPr id="1353" name="Image 0" descr="preencoded.png">    </p:cNvPr>
           <p:cNvPicPr>
             <a:picLocks noChangeAspect="1"/>
           </p:cNvPicPr>
@@ -51850,7 +51825,7 @@
       </p:pic>
       <p:sp>
         <p:nvSpPr>
-          <p:cNvPr id="1355" name="Text 1352"/>
+          <p:cNvPr id="1354" name="Text 1351"/>
           <p:cNvSpPr/>
           <p:nvPr/>
         </p:nvSpPr>
@@ -51892,7 +51867,7 @@
       </p:sp>
       <p:sp>
         <p:nvSpPr>
-          <p:cNvPr id="1356" name="Shape 1353"/>
+          <p:cNvPr id="1355" name="Shape 1352"/>
           <p:cNvSpPr/>
           <p:nvPr/>
         </p:nvSpPr>
@@ -51912,7 +51887,7 @@
       </p:sp>
       <p:pic>
         <p:nvPicPr>
-          <p:cNvPr id="1357" name="Image 1" descr="preencoded.png">    </p:cNvPr>
+          <p:cNvPr id="1356" name="Image 1" descr="preencoded.png">    </p:cNvPr>
           <p:cNvPicPr>
             <a:picLocks noChangeAspect="1"/>
           </p:cNvPicPr>
@@ -51936,7 +51911,7 @@
       </p:pic>
       <p:sp>
         <p:nvSpPr>
-          <p:cNvPr id="1358" name="Text 1354"/>
+          <p:cNvPr id="1357" name="Text 1353"/>
           <p:cNvSpPr/>
           <p:nvPr/>
         </p:nvSpPr>
@@ -51978,7 +51953,7 @@
       </p:sp>
       <p:sp>
         <p:nvSpPr>
-          <p:cNvPr id="1359" name="Shape 1355"/>
+          <p:cNvPr id="1358" name="Shape 1354"/>
           <p:cNvSpPr/>
           <p:nvPr/>
         </p:nvSpPr>
@@ -51998,7 +51973,7 @@
       </p:sp>
       <p:pic>
         <p:nvPicPr>
-          <p:cNvPr id="1360" name="Image 2" descr="preencoded.png">    </p:cNvPr>
+          <p:cNvPr id="1359" name="Image 2" descr="preencoded.png">    </p:cNvPr>
           <p:cNvPicPr>
             <a:picLocks noChangeAspect="1"/>
           </p:cNvPicPr>
@@ -52022,7 +51997,7 @@
       </p:pic>
       <p:sp>
         <p:nvSpPr>
-          <p:cNvPr id="1361" name="Text 1356"/>
+          <p:cNvPr id="1360" name="Text 1355"/>
           <p:cNvSpPr/>
           <p:nvPr/>
         </p:nvSpPr>
@@ -52064,7 +52039,7 @@
       </p:sp>
       <p:sp>
         <p:nvSpPr>
-          <p:cNvPr id="1362" name="Text 1357"/>
+          <p:cNvPr id="1361" name="Text 1356"/>
           <p:cNvSpPr/>
           <p:nvPr/>
         </p:nvSpPr>
@@ -52103,7 +52078,7 @@
       </p:sp>
       <p:sp>
         <p:nvSpPr>
-          <p:cNvPr id="1363" name="Text 1358"/>
+          <p:cNvPr id="1362" name="Text 1357"/>
           <p:cNvSpPr/>
           <p:nvPr/>
         </p:nvSpPr>
@@ -53766,7 +53741,7 @@
                 <a:ea typeface="Arial" pitchFamily="34" charset="-122"/>
                 <a:cs typeface="Arial" pitchFamily="34" charset="-120"/>
               </a:rPr>
-              <a:t>19.844 auto’s op 646 slimme parkings in Charleroi </a:t>
+              <a:t>19.829 auto’s op 645 slimme parkings in Charleroi </a:t>
             </a:r>
             <a:pPr indent="0" marL="0">
               <a:lnSpc>
